--- a/public/Hurrikan-Praesentation.pptx
+++ b/public/Hurrikan-Praesentation.pptx
@@ -18,6 +18,7 @@
     <p:sldId id="266" r:id="rId18"/>
     <p:sldId id="267" r:id="rId19"/>
     <p:sldId id="268" r:id="rId20"/>
+    <p:sldId id="269" r:id="rId21"/>
   </p:sldIdLst>
   <p:sldSz cx="12191695" cy="6858000" type="screen4x3"/>
   <p:notesSz cx="6858000" cy="9144000"/>
@@ -514,7 +515,7 @@
           <a:lstStyle/>
           <a:p>
             <a:r>
-              <a:t>SPRECHER 1 · ≈ 25 s</a:t>
+              <a:t>MAXI · ≈ 25 s</a:t>
             </a:r>
           </a:p>
           <a:p/>
@@ -590,13 +591,13 @@
           <a:lstStyle/>
           <a:p>
             <a:r>
-              <a:t>SPRECHER 3 · ≈ 40 s</a:t>
+              <a:t>LINUS · ≈ 35 s</a:t>
             </a:r>
           </a:p>
           <a:p/>
           <a:p>
             <a:r>
-              <a:t>Damit zur Leitfrage: Wieso ist der karibische Raum besonders verwundbar? Die Inselstaaten liegen mitten im Entstehungsgebiet und auf den Zugbahnen der Hurrikans — und fast alles Leben spielt sich in Küstennähe ab. Dazu kommen marode Bausubstanz, veraltete Infrastruktur und oft unzureichende Warn- und Schutzsysteme. Die USA zeigen, was möglich wäre: Das National Hurricane Center überwacht jeden Sturm, Warnungen kommen über Fernsehen, Radio und Handy, Evakuierungspläne liegen fertig in der Schublade. Vielen kleinen Inselstaaten fehlen genau diese Mittel — ihre Vulnerabilität ist deshalb besonders groß.</a:t>
+              <a:t>Auf den Bahamas sind die Folgen katastrophal. Ein Augenzeuge beschreibt es so: „Man kann nicht erkennen, dass dort mal Häuser standen.“ Rund 13.000 Wohnhäuser werden schwer beschädigt oder zerstört. 70.000 Menschen — fast jeder fünfte Einwohner — brauchen dringend Hilfe zum Überleben. Die Regierung bittet die Weltgesundheitsorganisation und das Welternährungsprogramm um Unterstützung.</a:t>
             </a:r>
           </a:p>
         </p:txBody>
@@ -666,13 +667,13 @@
           <a:lstStyle/>
           <a:p>
             <a:r>
-              <a:t>SPRECHER 3 · ≈ 30 s</a:t>
+              <a:t>LINUS · ≈ 40 s</a:t>
             </a:r>
           </a:p>
           <a:p/>
           <a:p>
             <a:r>
-              <a:t>Der Klimawandel verschärft das Problem: Wärmere Ozeane liefern mehr Energie. Der Anteil besonders starker Hurrikane nimmt zu, sie bringen mehr Regen, und der steigende Meeresspiegel macht jede Sturmflut gefährlicher. Und selbst Europa bleibt nicht ganz verschont: Ex-Hurrikane wie Ophelia haben 2017 Irland erreicht, und im Mittelmeer treten sogenannte Medicanes auf.</a:t>
+              <a:t>Damit zur Leitfrage: Wieso ist der karibische Raum besonders verwundbar? Die Inselstaaten liegen mitten im Entstehungsgebiet und auf den Zugbahnen der Hurrikans — und fast alles Leben spielt sich in Küstennähe ab. Dazu kommen marode Bausubstanz, veraltete Infrastruktur und oft unzureichende Warn- und Schutzsysteme. Die USA zeigen, was möglich wäre: Das National Hurricane Center überwacht jeden Sturm, Warnungen kommen über Fernsehen, Radio und Handy, Evakuierungspläne liegen fertig in der Schublade. Vielen kleinen Inselstaaten fehlen genau diese Mittel — ihre Vulnerabilität ist deshalb besonders groß.</a:t>
             </a:r>
           </a:p>
         </p:txBody>
@@ -742,13 +743,13 @@
           <a:lstStyle/>
           <a:p>
             <a:r>
-              <a:t>ALLE / SPRECHER 1 · ≈ 20 s</a:t>
+              <a:t>LINUS · ≈ 30 s</a:t>
             </a:r>
           </a:p>
           <a:p/>
           <a:p>
             <a:r>
-              <a:t>Ein Hurrikan ist also eine gewaltige Wärmekraftmaschine des Ozeans — und die Karibik liegt genau in ihrer Zugbahn. Naturgefahr und Verwundbarkeit treffen hier aufeinander: Darum ist der karibische Raum besonders verwundbar. Danke fürs Zuschauen!</a:t>
+              <a:t>Der Klimawandel verschärft das Problem: Wärmere Ozeane liefern mehr Energie. Der Anteil besonders starker Hurrikane nimmt zu, sie bringen mehr Regen, und der steigende Meeresspiegel macht jede Sturmflut gefährlicher. Und selbst Europa bleibt nicht ganz verschont: Ex-Hurrikane wie Ophelia haben 2017 Irland erreicht, und im Mittelmeer treten sogenannte Medicanes auf.</a:t>
             </a:r>
           </a:p>
         </p:txBody>
@@ -818,6 +819,82 @@
           <a:lstStyle/>
           <a:p>
             <a:r>
+              <a:t>ALLE / MAXI · ≈ 20 s</a:t>
+            </a:r>
+          </a:p>
+          <a:p/>
+          <a:p>
+            <a:r>
+              <a:t>Ein Hurrikan ist also eine gewaltige Wärmekraftmaschine des Ozeans — und die Karibik liegt genau in ihrer Zugbahn. Naturgefahr und Verwundbarkeit treffen hier aufeinander: Darum ist der karibische Raum besonders verwundbar. Danke fürs Zuschauen!</a:t>
+            </a:r>
+          </a:p>
+        </p:txBody>
+      </p:sp>
+      <p:sp>
+        <p:nvSpPr>
+          <p:cNvPr id="4" name="Slide Number Placeholder 3"/>
+          <p:cNvSpPr>
+            <a:spLocks noGrp="1"/>
+          </p:cNvSpPr>
+          <p:nvPr>
+            <p:ph type="sldNum" idx="5" sz="quarter"/>
+          </p:nvPr>
+        </p:nvSpPr>
+        <p:spPr/>
+      </p:sp>
+    </p:spTree>
+  </p:cSld>
+  <p:clrMapOvr>
+    <a:masterClrMapping/>
+  </p:clrMapOvr>
+</p:notes>
+</file>
+
+<file path=ppt/notesSlides/notesSlide14.xml><?xml version="1.0" encoding="utf-8"?>
+<p:notes xmlns:a="http://schemas.openxmlformats.org/drawingml/2006/main" xmlns:p="http://schemas.openxmlformats.org/presentationml/2006/main" xmlns:r="http://schemas.openxmlformats.org/officeDocument/2006/relationships">
+  <p:cSld>
+    <p:spTree>
+      <p:nvGrpSpPr>
+        <p:cNvPr id="1" name=""/>
+        <p:cNvGrpSpPr/>
+        <p:nvPr/>
+      </p:nvGrpSpPr>
+      <p:grpSpPr>
+        <a:xfrm>
+          <a:off x="0" y="0"/>
+          <a:ext cx="0" cy="0"/>
+          <a:chOff x="0" y="0"/>
+          <a:chExt cx="0" cy="0"/>
+        </a:xfrm>
+      </p:grpSpPr>
+      <p:sp>
+        <p:nvSpPr>
+          <p:cNvPr id="2" name="Slide Image Placeholder 1"/>
+          <p:cNvSpPr>
+            <a:spLocks noGrp="1"/>
+          </p:cNvSpPr>
+          <p:nvPr>
+            <p:ph type="sldImg" idx="2"/>
+          </p:nvPr>
+        </p:nvSpPr>
+        <p:spPr/>
+      </p:sp>
+      <p:sp>
+        <p:nvSpPr>
+          <p:cNvPr id="3" name="Notes Placeholder 2"/>
+          <p:cNvSpPr>
+            <a:spLocks noGrp="1"/>
+          </p:cNvSpPr>
+          <p:nvPr>
+            <p:ph type="body" idx="3" sz="quarter"/>
+          </p:nvPr>
+        </p:nvSpPr>
+        <p:spPr/>
+        <p:txBody>
+          <a:bodyPr/>
+          <a:lstStyle/>
+          <a:p>
+            <a:r>
               <a:t>REGIE-TIPPS</a:t>
             </a:r>
           </a:p>
@@ -909,7 +986,7 @@
           <a:lstStyle/>
           <a:p>
             <a:r>
-              <a:t>SPRECHER 1 · ≈ 30 s</a:t>
+              <a:t>MAXI · ≈ 30 s</a:t>
             </a:r>
           </a:p>
           <a:p/>
@@ -985,7 +1062,7 @@
           <a:lstStyle/>
           <a:p>
             <a:r>
-              <a:t>SPRECHER 1 · ≈ 30 s (Teil 1 von 2)</a:t>
+              <a:t>MAXI · ≈ 30 s (Teil 1 von 2)</a:t>
             </a:r>
           </a:p>
           <a:p/>
@@ -1061,7 +1138,7 @@
           <a:lstStyle/>
           <a:p>
             <a:r>
-              <a:t>SPRECHER 1 · ≈ 25 s (Teil 2 von 2)</a:t>
+              <a:t>MAXI · ≈ 25 s (Teil 2 von 2)</a:t>
             </a:r>
           </a:p>
           <a:p/>
@@ -1137,7 +1214,7 @@
           <a:lstStyle/>
           <a:p>
             <a:r>
-              <a:t>SPRECHER 2 · ≈ 30 s</a:t>
+              <a:t>MORITZ · ≈ 30 s</a:t>
             </a:r>
           </a:p>
           <a:p/>
@@ -1213,7 +1290,7 @@
           <a:lstStyle/>
           <a:p>
             <a:r>
-              <a:t>SPRECHER 2 · ≈ 30 s</a:t>
+              <a:t>MORITZ · ≈ 30 s</a:t>
             </a:r>
           </a:p>
           <a:p/>
@@ -1289,13 +1366,13 @@
           <a:lstStyle/>
           <a:p>
             <a:r>
-              <a:t>SPRECHER 2 · ≈ 30 s</a:t>
+              <a:t>MORITZ · ≈ 20 s</a:t>
             </a:r>
           </a:p>
           <a:p/>
           <a:p>
             <a:r>
-              <a:t>Zurück zu Dorian. Am 1. September 2019 erreicht er die Bahamas — als Hurrikan der höchsten Kategorie 5, mit Windgeschwindigkeiten von fast 300 Kilometern pro Stunde. Und dann passiert das Schlimmste: Dorian bleibt fast 24 Stunden nahezu stehen — und wütet ununterbrochen über denselben Inseln.</a:t>
+              <a:t>Gemessen wird das mit der Saffir-Simpson-Skala: von Kategorie 1 ab 119 km/h bis zur höchsten Kategorie 5 ab 252 km/h. Ab Kategorie 3 spricht man von einem schweren Hurrikan. Und Dorian? Lag mit fast 300 km/h ganz oben — Kategorie 5.</a:t>
             </a:r>
           </a:p>
         </p:txBody>
@@ -1365,13 +1442,13 @@
           <a:lstStyle/>
           <a:p>
             <a:r>
-              <a:t>SPRECHER 2 · ≈ 30 s</a:t>
+              <a:t>MORITZ · ≈ 30 s</a:t>
             </a:r>
           </a:p>
           <a:p/>
           <a:p>
             <a:r>
-              <a:t>Dabei wirken gleich mehrere Gefahren zusammen: Der Orkanwind zerstört Gebäude und Infrastruktur. Meterhohe Flutwellen überschwemmen die Küsten. Starkregen löst großflächige Überschwemmungen aus — und an Hängen sogar Schlammlawinen und Erdrutsche. Die Folgen: Versorgungsengpässe, Gesundheitsrisiken und enorme wirtschaftliche Verluste.</a:t>
+              <a:t>Zurück zu Dorian. Am 1. September 2019 erreicht er die Bahamas — als Hurrikan der höchsten Kategorie 5, mit Windgeschwindigkeiten von fast 300 Kilometern pro Stunde. Und dann passiert das Schlimmste: Dorian bleibt fast 24 Stunden nahezu stehen — und wütet ununterbrochen über denselben Inseln.</a:t>
             </a:r>
           </a:p>
         </p:txBody>
@@ -1441,13 +1518,13 @@
           <a:lstStyle/>
           <a:p>
             <a:r>
-              <a:t>SPRECHER 3 · ≈ 35 s</a:t>
+              <a:t>MORITZ · ≈ 30 s</a:t>
             </a:r>
           </a:p>
           <a:p/>
           <a:p>
             <a:r>
-              <a:t>Auf den Bahamas sind die Folgen katastrophal. Ein Augenzeuge beschreibt es so: „Man kann nicht erkennen, dass dort mal Häuser standen.“ Rund 13.000 Wohnhäuser werden schwer beschädigt oder zerstört. 70.000 Menschen — fast jeder fünfte Einwohner — brauchen dringend Hilfe zum Überleben. Die Regierung bittet die Weltgesundheitsorganisation und das Welternährungsprogramm um Unterstützung.</a:t>
+              <a:t>Dabei wirken gleich mehrere Gefahren zusammen: Der Orkanwind zerstört Gebäude und Infrastruktur. Meterhohe Flutwellen überschwemmen die Küsten. Starkregen löst großflächige Überschwemmungen aus — und an Hängen sogar Schlammlawinen und Erdrutsche. Die Folgen: Versorgungsengpässe, Gesundheitsrisiken und enorme wirtschaftliche Verluste.</a:t>
             </a:r>
           </a:p>
         </p:txBody>
@@ -4522,7 +4599,7 @@
                 </a:solidFill>
                 <a:latin typeface="Menlo"/>
               </a:rPr>
-              <a:t>GEOGRAPHIE · ERKLÄRVIDEO · ≈ 6 MINUTEN</a:t>
+              <a:t>GEOGRAPHIE · KLASSE 10D · ERKLÄRVIDEO</a:t>
             </a:r>
           </a:p>
         </p:txBody>
@@ -4652,6 +4729,48 @@
                 <a:latin typeface="Menlo"/>
               </a:rPr>
               <a:t>FALLBEISPIEL DORIAN 2019   ·   ENTSTEHUNG   ·   GEFAHREN   ·   VERWUNDBARKEIT</a:t>
+            </a:r>
+          </a:p>
+        </p:txBody>
+      </p:sp>
+      <p:sp>
+        <p:nvSpPr>
+          <p:cNvPr id="7" name="TextBox 6"/>
+          <p:cNvSpPr txBox="1"/>
+          <p:nvPr/>
+        </p:nvSpPr>
+        <p:spPr>
+          <a:xfrm>
+            <a:off x="1371600" y="5989320"/>
+            <a:ext cx="9445752" cy="457200"/>
+          </a:xfrm>
+          <a:prstGeom prst="rect">
+            <a:avLst/>
+          </a:prstGeom>
+          <a:noFill/>
+        </p:spPr>
+        <p:txBody>
+          <a:bodyPr wrap="square" anchor="t">
+            <a:spAutoFit/>
+          </a:bodyPr>
+          <a:lstStyle/>
+          <a:p>
+            <a:pPr algn="ctr">
+              <a:spcBef>
+                <a:spcPts val="0"/>
+              </a:spcBef>
+              <a:spcAft>
+                <a:spcPts val="600"/>
+              </a:spcAft>
+            </a:pPr>
+            <a:r>
+              <a:rPr sz="1050" b="0" i="0" spc="220">
+                <a:solidFill>
+                  <a:srgbClr val="6E7D90"/>
+                </a:solidFill>
+                <a:latin typeface="Menlo"/>
+              </a:rPr>
+              <a:t>MAXI · MORITZ · LINUS  —  GYMNASIUM GRÜNWALD · BEI HERRN MAYR</a:t>
             </a:r>
           </a:p>
         </p:txBody>
@@ -4719,7 +4838,7 @@
                 </a:solidFill>
                 <a:latin typeface="Menlo"/>
               </a:rPr>
-              <a:t>KAPITEL 08 · DIE LEITFRAGE</a:t>
+              <a:t>KAPITEL 08 · DANACH</a:t>
             </a:r>
           </a:p>
         </p:txBody>
@@ -4758,13 +4877,13 @@
               </a:spcAft>
             </a:pPr>
             <a:r>
-              <a:rPr sz="3400" b="1" i="0">
+              <a:rPr sz="3200" b="1" i="0">
                 <a:solidFill>
                   <a:srgbClr val="E8EEF5"/>
                 </a:solidFill>
                 <a:latin typeface="Avenir Next Condensed"/>
               </a:rPr>
-              <a:t>GLEICHER STURM — UNGLEICHE CHANCEN</a:t>
+              <a:t>„ALS WÄREN HÄUSER DURCH EINE MÜHLE GEDREHT“</a:t>
             </a:r>
           </a:p>
         </p:txBody>
@@ -4777,8 +4896,8 @@
         </p:nvSpPr>
         <p:spPr>
           <a:xfrm>
-            <a:off x="685800" y="1783080"/>
-            <a:ext cx="5285232" cy="4160520"/>
+            <a:off x="6382512" y="1645920"/>
+            <a:ext cx="5248656" cy="3579883"/>
           </a:xfrm>
           <a:prstGeom prst="roundRect">
             <a:avLst>
@@ -4817,50 +4936,30 @@
           </a:p>
         </p:txBody>
       </p:sp>
-      <p:sp>
-        <p:nvSpPr>
-          <p:cNvPr id="5" name="Rectangle 4"/>
-          <p:cNvSpPr/>
-          <p:nvPr/>
-        </p:nvSpPr>
-        <p:spPr>
-          <a:xfrm>
-            <a:off x="685800" y="1783080"/>
-            <a:ext cx="5285232" cy="54864"/>
+      <p:pic>
+        <p:nvPicPr>
+          <p:cNvPr id="5" name="Picture 4" descr="m1_zerstoerung.jpg"/>
+          <p:cNvPicPr>
+            <a:picLocks noChangeAspect="1"/>
+          </p:cNvPicPr>
+          <p:nvPr/>
+        </p:nvPicPr>
+        <p:blipFill>
+          <a:blip r:embed="rId2"/>
+          <a:stretch>
+            <a:fillRect/>
+          </a:stretch>
+        </p:blipFill>
+        <p:spPr>
+          <a:xfrm>
+            <a:off x="6492240" y="1755648"/>
+            <a:ext cx="5029200" cy="3049531"/>
           </a:xfrm>
           <a:prstGeom prst="rect">
             <a:avLst/>
           </a:prstGeom>
-          <a:solidFill>
-            <a:srgbClr val="E85A3A"/>
-          </a:solidFill>
-          <a:ln>
-            <a:noFill/>
-          </a:ln>
-          <a:effectLst/>
-        </p:spPr>
-        <p:style>
-          <a:lnRef idx="1">
-            <a:schemeClr val="accent1"/>
-          </a:lnRef>
-          <a:fillRef idx="3">
-            <a:schemeClr val="accent1"/>
-          </a:fillRef>
-          <a:effectRef idx="2">
-            <a:schemeClr val="accent1"/>
-          </a:effectRef>
-          <a:fontRef idx="minor">
-            <a:schemeClr val="lt1"/>
-          </a:fontRef>
-        </p:style>
-        <p:txBody>
-          <a:bodyPr rtlCol="0" anchor="ctr"/>
-          <a:lstStyle/>
-          <a:p>
-            <a:pPr algn="ctr"/>
-          </a:p>
-        </p:txBody>
-      </p:sp>
+        </p:spPr>
+      </p:pic>
       <p:sp>
         <p:nvSpPr>
           <p:cNvPr id="6" name="TextBox 5"/>
@@ -4869,8 +4968,8 @@
         </p:nvSpPr>
         <p:spPr>
           <a:xfrm>
-            <a:off x="978408" y="2011680"/>
-            <a:ext cx="4754880" cy="548640"/>
+            <a:off x="6492240" y="4860043"/>
+            <a:ext cx="5029200" cy="320040"/>
           </a:xfrm>
           <a:prstGeom prst="rect">
             <a:avLst/>
@@ -4892,32 +4991,13 @@
               </a:spcAft>
             </a:pPr>
             <a:r>
-              <a:rPr sz="1900" b="1" i="0">
-                <a:solidFill>
-                  <a:srgbClr val="E8EEF5"/>
-                </a:solidFill>
-                <a:latin typeface="Avenir Next Condensed"/>
-              </a:rPr>
-              <a:t>KARIBISCHE INSELSTAATEN</a:t>
-            </a:r>
-          </a:p>
-          <a:p>
-            <a:pPr algn="l">
-              <a:spcBef>
-                <a:spcPts val="0"/>
-              </a:spcBef>
-              <a:spcAft>
-                <a:spcPts val="600"/>
-              </a:spcAft>
-            </a:pPr>
-            <a:r>
-              <a:rPr sz="900" b="0" i="0" spc="200">
-                <a:solidFill>
-                  <a:srgbClr val="E85A3A"/>
+              <a:rPr sz="850" b="0" i="0" spc="120">
+                <a:solidFill>
+                  <a:srgbClr val="6E7D90"/>
                 </a:solidFill>
                 <a:latin typeface="Menlo"/>
               </a:rPr>
-              <a:t>HOHE VULNERABILITÄT</a:t>
+              <a:t>M1 · MARSH HARBOUR, BAHAMAS (SCHULBUCH S. 112)</a:t>
             </a:r>
           </a:p>
         </p:txBody>
@@ -4930,8 +5010,8 @@
         </p:nvSpPr>
         <p:spPr>
           <a:xfrm>
-            <a:off x="978408" y="2788920"/>
-            <a:ext cx="4754880" cy="3108960"/>
+            <a:off x="713232" y="1965960"/>
+            <a:ext cx="5212080" cy="1554480"/>
           </a:xfrm>
           <a:prstGeom prst="rect">
             <a:avLst/>
@@ -4946,170 +5026,124 @@
           <a:p>
             <a:pPr algn="l">
               <a:lnSpc>
-                <a:spcPct val="110000"/>
+                <a:spcPct val="122000"/>
               </a:lnSpc>
               <a:spcBef>
                 <a:spcPts val="0"/>
               </a:spcBef>
               <a:spcAft>
-                <a:spcPts val="700"/>
+                <a:spcPts val="600"/>
+              </a:spcAft>
+            </a:pPr>
+            <a:r>
+              <a:rPr sz="2100" b="0" i="1">
+                <a:solidFill>
+                  <a:srgbClr val="E8EEF5"/>
+                </a:solidFill>
+                <a:latin typeface="Helvetica Neue"/>
+              </a:rPr>
+              <a:t>„Man kann nicht erkennen, dass dort mal Häuser standen.“</a:t>
+            </a:r>
+          </a:p>
+        </p:txBody>
+      </p:sp>
+      <p:sp>
+        <p:nvSpPr>
+          <p:cNvPr id="8" name="TextBox 7"/>
+          <p:cNvSpPr txBox="1"/>
+          <p:nvPr/>
+        </p:nvSpPr>
+        <p:spPr>
+          <a:xfrm>
+            <a:off x="713232" y="3520440"/>
+            <a:ext cx="5212080" cy="365760"/>
+          </a:xfrm>
+          <a:prstGeom prst="rect">
+            <a:avLst/>
+          </a:prstGeom>
+          <a:noFill/>
+        </p:spPr>
+        <p:txBody>
+          <a:bodyPr wrap="square" anchor="t">
+            <a:spAutoFit/>
+          </a:bodyPr>
+          <a:lstStyle/>
+          <a:p>
+            <a:pPr algn="l">
+              <a:spcBef>
+                <a:spcPts val="0"/>
+              </a:spcBef>
+              <a:spcAft>
+                <a:spcPts val="600"/>
+              </a:spcAft>
+            </a:pPr>
+            <a:r>
+              <a:rPr sz="950" b="0" i="0" spc="180">
+                <a:solidFill>
+                  <a:srgbClr val="6E7D90"/>
+                </a:solidFill>
+                <a:latin typeface="Menlo"/>
+              </a:rPr>
+              <a:t>AUGENZEUGE · CNN / DPA, 6.9.2019</a:t>
+            </a:r>
+          </a:p>
+        </p:txBody>
+      </p:sp>
+      <p:sp>
+        <p:nvSpPr>
+          <p:cNvPr id="9" name="TextBox 8"/>
+          <p:cNvSpPr txBox="1"/>
+          <p:nvPr/>
+        </p:nvSpPr>
+        <p:spPr>
+          <a:xfrm>
+            <a:off x="713232" y="3977639"/>
+            <a:ext cx="5212080" cy="1188720"/>
+          </a:xfrm>
+          <a:prstGeom prst="rect">
+            <a:avLst/>
+          </a:prstGeom>
+          <a:noFill/>
+        </p:spPr>
+        <p:txBody>
+          <a:bodyPr wrap="square" anchor="t">
+            <a:spAutoFit/>
+          </a:bodyPr>
+          <a:lstStyle/>
+          <a:p>
+            <a:pPr algn="l">
+              <a:lnSpc>
+                <a:spcPct val="118000"/>
+              </a:lnSpc>
+              <a:spcBef>
+                <a:spcPts val="0"/>
+              </a:spcBef>
+              <a:spcAft>
+                <a:spcPts val="600"/>
               </a:spcAft>
             </a:pPr>
             <a:r>
               <a:rPr sz="1250" b="0" i="0">
                 <a:solidFill>
-                  <a:srgbClr val="E85A3A"/>
+                  <a:srgbClr val="9AA8BA"/>
                 </a:solidFill>
                 <a:latin typeface="Helvetica Neue"/>
               </a:rPr>
-              <a:t>▪  </a:t>
-            </a:r>
-            <a:r>
-              <a:rPr sz="1250" b="0" i="0">
-                <a:solidFill>
-                  <a:srgbClr val="9AA8BA"/>
-                </a:solidFill>
-                <a:latin typeface="Helvetica Neue"/>
-              </a:rPr>
-              <a:t>Mitten in Entstehungsgebiet und Zugbahnen der Hurrikans</a:t>
-            </a:r>
-          </a:p>
-          <a:p>
-            <a:pPr algn="l">
-              <a:lnSpc>
-                <a:spcPct val="110000"/>
-              </a:lnSpc>
-              <a:spcBef>
-                <a:spcPts val="0"/>
-              </a:spcBef>
-              <a:spcAft>
-                <a:spcPts val="700"/>
-              </a:spcAft>
-            </a:pPr>
-            <a:r>
-              <a:rPr sz="1250" b="0" i="0">
-                <a:solidFill>
-                  <a:srgbClr val="E85A3A"/>
-                </a:solidFill>
-                <a:latin typeface="Helvetica Neue"/>
-              </a:rPr>
-              <a:t>▪  </a:t>
-            </a:r>
-            <a:r>
-              <a:rPr sz="1250" b="0" i="0">
-                <a:solidFill>
-                  <a:srgbClr val="9AA8BA"/>
-                </a:solidFill>
-                <a:latin typeface="Helvetica Neue"/>
-              </a:rPr>
-              <a:t>Fast alle Siedlungen in Küstennähe — voll im Bereich der Flutwellen</a:t>
-            </a:r>
-          </a:p>
-          <a:p>
-            <a:pPr algn="l">
-              <a:lnSpc>
-                <a:spcPct val="110000"/>
-              </a:lnSpc>
-              <a:spcBef>
-                <a:spcPts val="0"/>
-              </a:spcBef>
-              <a:spcAft>
-                <a:spcPts val="700"/>
-              </a:spcAft>
-            </a:pPr>
-            <a:r>
-              <a:rPr sz="1250" b="0" i="0">
-                <a:solidFill>
-                  <a:srgbClr val="E85A3A"/>
-                </a:solidFill>
-                <a:latin typeface="Helvetica Neue"/>
-              </a:rPr>
-              <a:t>▪  </a:t>
-            </a:r>
-            <a:r>
-              <a:rPr sz="1250" b="0" i="0">
-                <a:solidFill>
-                  <a:srgbClr val="9AA8BA"/>
-                </a:solidFill>
-                <a:latin typeface="Helvetica Neue"/>
-              </a:rPr>
-              <a:t>Marode Bausubstanz, veraltete Infrastruktur</a:t>
-            </a:r>
-          </a:p>
-          <a:p>
-            <a:pPr algn="l">
-              <a:lnSpc>
-                <a:spcPct val="110000"/>
-              </a:lnSpc>
-              <a:spcBef>
-                <a:spcPts val="0"/>
-              </a:spcBef>
-              <a:spcAft>
-                <a:spcPts val="700"/>
-              </a:spcAft>
-            </a:pPr>
-            <a:r>
-              <a:rPr sz="1250" b="0" i="0">
-                <a:solidFill>
-                  <a:srgbClr val="E85A3A"/>
-                </a:solidFill>
-                <a:latin typeface="Helvetica Neue"/>
-              </a:rPr>
-              <a:t>▪  </a:t>
-            </a:r>
-            <a:r>
-              <a:rPr sz="1250" b="0" i="0">
-                <a:solidFill>
-                  <a:srgbClr val="9AA8BA"/>
-                </a:solidFill>
-                <a:latin typeface="Helvetica Neue"/>
-              </a:rPr>
-              <a:t>Unzureichende Information, kaum Vorhersage- und Schutzmaßnahmen</a:t>
-            </a:r>
-          </a:p>
-          <a:p>
-            <a:pPr algn="l">
-              <a:lnSpc>
-                <a:spcPct val="110000"/>
-              </a:lnSpc>
-              <a:spcBef>
-                <a:spcPts val="0"/>
-              </a:spcBef>
-              <a:spcAft>
-                <a:spcPts val="700"/>
-              </a:spcAft>
-            </a:pPr>
-            <a:r>
-              <a:rPr sz="1250" b="0" i="0">
-                <a:solidFill>
-                  <a:srgbClr val="E85A3A"/>
-                </a:solidFill>
-                <a:latin typeface="Helvetica Neue"/>
-              </a:rPr>
-              <a:t>▪  </a:t>
-            </a:r>
-            <a:r>
-              <a:rPr sz="1250" b="0" i="0">
-                <a:solidFill>
-                  <a:srgbClr val="9AA8BA"/>
-                </a:solidFill>
-                <a:latin typeface="Helvetica Neue"/>
-              </a:rPr>
-              <a:t>Kleine Volkswirtschaften: Ein Sturm trifft das ganze Land</a:t>
-            </a:r>
-          </a:p>
-        </p:txBody>
-      </p:sp>
-      <p:sp>
-        <p:nvSpPr>
-          <p:cNvPr id="8" name="Rounded Rectangle 7"/>
+              <a:t>Dorian war der verheerendste Wirbelsturm, der die Bahamas je getroffen hat — einer der stärksten im Atlantik seit Beginn der Aufzeichnungen.</a:t>
+            </a:r>
+          </a:p>
+        </p:txBody>
+      </p:sp>
+      <p:sp>
+        <p:nvSpPr>
+          <p:cNvPr id="10" name="Rounded Rectangle 9"/>
           <p:cNvSpPr/>
           <p:nvPr/>
         </p:nvSpPr>
         <p:spPr>
           <a:xfrm>
-            <a:off x="6217920" y="1783080"/>
-            <a:ext cx="5285232" cy="4160520"/>
+            <a:off x="685800" y="5394960"/>
+            <a:ext cx="2560320" cy="1280160"/>
           </a:xfrm>
           <a:prstGeom prst="roundRect">
             <a:avLst>
@@ -5150,23 +5184,91 @@
       </p:sp>
       <p:sp>
         <p:nvSpPr>
-          <p:cNvPr id="9" name="Rectangle 8"/>
-          <p:cNvSpPr/>
-          <p:nvPr/>
-        </p:nvSpPr>
-        <p:spPr>
-          <a:xfrm>
-            <a:off x="6217920" y="1783080"/>
-            <a:ext cx="5285232" cy="54864"/>
+          <p:cNvPr id="11" name="TextBox 10"/>
+          <p:cNvSpPr txBox="1"/>
+          <p:nvPr/>
+        </p:nvSpPr>
+        <p:spPr>
+          <a:xfrm>
+            <a:off x="886968" y="5504688"/>
+            <a:ext cx="2194560" cy="1097280"/>
           </a:xfrm>
           <a:prstGeom prst="rect">
             <a:avLst/>
           </a:prstGeom>
+          <a:noFill/>
+        </p:spPr>
+        <p:txBody>
+          <a:bodyPr wrap="square" anchor="t">
+            <a:spAutoFit/>
+          </a:bodyPr>
+          <a:lstStyle/>
+          <a:p>
+            <a:pPr algn="l">
+              <a:spcBef>
+                <a:spcPts val="0"/>
+              </a:spcBef>
+              <a:spcAft>
+                <a:spcPts val="200"/>
+              </a:spcAft>
+            </a:pPr>
+            <a:r>
+              <a:rPr sz="2200" b="1" i="0">
+                <a:solidFill>
+                  <a:srgbClr val="E85A3A"/>
+                </a:solidFill>
+                <a:latin typeface="Menlo"/>
+              </a:rPr>
+              <a:t>13.000</a:t>
+            </a:r>
+          </a:p>
+          <a:p>
+            <a:pPr algn="l">
+              <a:lnSpc>
+                <a:spcPct val="105000"/>
+              </a:lnSpc>
+              <a:spcBef>
+                <a:spcPts val="0"/>
+              </a:spcBef>
+              <a:spcAft>
+                <a:spcPts val="600"/>
+              </a:spcAft>
+            </a:pPr>
+            <a:r>
+              <a:rPr sz="1000" b="0" i="0">
+                <a:solidFill>
+                  <a:srgbClr val="9AA8BA"/>
+                </a:solidFill>
+                <a:latin typeface="Helvetica Neue"/>
+              </a:rPr>
+              <a:t>Wohnhäuser schwer beschädigt oder zerstört (Rotes Kreuz)</a:t>
+            </a:r>
+          </a:p>
+        </p:txBody>
+      </p:sp>
+      <p:sp>
+        <p:nvSpPr>
+          <p:cNvPr id="12" name="Rounded Rectangle 11"/>
+          <p:cNvSpPr/>
+          <p:nvPr/>
+        </p:nvSpPr>
+        <p:spPr>
+          <a:xfrm>
+            <a:off x="3456432" y="5394960"/>
+            <a:ext cx="2560320" cy="1280160"/>
+          </a:xfrm>
+          <a:prstGeom prst="roundRect">
+            <a:avLst>
+              <a:gd name="adj" fmla="val 4500"/>
+            </a:avLst>
+          </a:prstGeom>
           <a:solidFill>
-            <a:srgbClr val="62C8DE"/>
+            <a:srgbClr val="111A27"/>
           </a:solidFill>
-          <a:ln>
-            <a:noFill/>
+          <a:ln w="9525">
+            <a:solidFill>
+              <a:srgbClr val="2A3648"/>
+            </a:solidFill>
           </a:ln>
           <a:effectLst/>
         </p:spPr>
@@ -5194,14 +5296,14 @@
       </p:sp>
       <p:sp>
         <p:nvSpPr>
-          <p:cNvPr id="10" name="TextBox 9"/>
+          <p:cNvPr id="13" name="TextBox 12"/>
           <p:cNvSpPr txBox="1"/>
           <p:nvPr/>
         </p:nvSpPr>
         <p:spPr>
           <a:xfrm>
-            <a:off x="6510528" y="2011680"/>
-            <a:ext cx="4754880" cy="548640"/>
+            <a:off x="3657600" y="5504688"/>
+            <a:ext cx="2194560" cy="1097280"/>
           </a:xfrm>
           <a:prstGeom prst="rect">
             <a:avLst/>
@@ -5219,50 +5321,101 @@
                 <a:spcPts val="0"/>
               </a:spcBef>
               <a:spcAft>
+                <a:spcPts val="200"/>
+              </a:spcAft>
+            </a:pPr>
+            <a:r>
+              <a:rPr sz="2200" b="1" i="0">
+                <a:solidFill>
+                  <a:srgbClr val="E85A3A"/>
+                </a:solidFill>
+                <a:latin typeface="Menlo"/>
+              </a:rPr>
+              <a:t>70.000</a:t>
+            </a:r>
+          </a:p>
+          <a:p>
+            <a:pPr algn="l">
+              <a:lnSpc>
+                <a:spcPct val="105000"/>
+              </a:lnSpc>
+              <a:spcBef>
+                <a:spcPts val="0"/>
+              </a:spcBef>
+              <a:spcAft>
                 <a:spcPts val="600"/>
               </a:spcAft>
             </a:pPr>
             <a:r>
-              <a:rPr sz="1900" b="1" i="0">
-                <a:solidFill>
-                  <a:srgbClr val="E8EEF5"/>
-                </a:solidFill>
-                <a:latin typeface="Avenir Next Condensed"/>
-              </a:rPr>
-              <a:t>USA — SCHUTZ ALS SYSTEM</a:t>
-            </a:r>
-          </a:p>
-          <a:p>
-            <a:pPr algn="l">
-              <a:spcBef>
-                <a:spcPts val="0"/>
-              </a:spcBef>
-              <a:spcAft>
-                <a:spcPts val="600"/>
-              </a:spcAft>
-            </a:pPr>
-            <a:r>
-              <a:rPr sz="900" b="0" i="0" spc="200">
-                <a:solidFill>
-                  <a:srgbClr val="62C8DE"/>
-                </a:solidFill>
-                <a:latin typeface="Menlo"/>
-              </a:rPr>
-              <a:t>BEISPIEL M6</a:t>
-            </a:r>
-          </a:p>
-        </p:txBody>
-      </p:sp>
-      <p:sp>
-        <p:nvSpPr>
-          <p:cNvPr id="11" name="TextBox 10"/>
+              <a:rPr sz="1000" b="0" i="0">
+                <a:solidFill>
+                  <a:srgbClr val="9AA8BA"/>
+                </a:solidFill>
+                <a:latin typeface="Helvetica Neue"/>
+              </a:rPr>
+              <a:t>Menschen brauchten dringend Hilfe — jeder fünfte Einwohner</a:t>
+            </a:r>
+          </a:p>
+        </p:txBody>
+      </p:sp>
+      <p:sp>
+        <p:nvSpPr>
+          <p:cNvPr id="14" name="Rounded Rectangle 13"/>
+          <p:cNvSpPr/>
+          <p:nvPr/>
+        </p:nvSpPr>
+        <p:spPr>
+          <a:xfrm>
+            <a:off x="6227064" y="5394960"/>
+            <a:ext cx="2560320" cy="1280160"/>
+          </a:xfrm>
+          <a:prstGeom prst="roundRect">
+            <a:avLst>
+              <a:gd name="adj" fmla="val 4500"/>
+            </a:avLst>
+          </a:prstGeom>
+          <a:solidFill>
+            <a:srgbClr val="111A27"/>
+          </a:solidFill>
+          <a:ln w="9525">
+            <a:solidFill>
+              <a:srgbClr val="2A3648"/>
+            </a:solidFill>
+          </a:ln>
+          <a:effectLst/>
+        </p:spPr>
+        <p:style>
+          <a:lnRef idx="1">
+            <a:schemeClr val="accent1"/>
+          </a:lnRef>
+          <a:fillRef idx="3">
+            <a:schemeClr val="accent1"/>
+          </a:fillRef>
+          <a:effectRef idx="2">
+            <a:schemeClr val="accent1"/>
+          </a:effectRef>
+          <a:fontRef idx="minor">
+            <a:schemeClr val="lt1"/>
+          </a:fontRef>
+        </p:style>
+        <p:txBody>
+          <a:bodyPr rtlCol="0" anchor="ctr"/>
+          <a:lstStyle/>
+          <a:p>
+            <a:pPr algn="ctr"/>
+          </a:p>
+        </p:txBody>
+      </p:sp>
+      <p:sp>
+        <p:nvSpPr>
+          <p:cNvPr id="15" name="TextBox 14"/>
           <p:cNvSpPr txBox="1"/>
           <p:nvPr/>
         </p:nvSpPr>
         <p:spPr>
           <a:xfrm>
-            <a:off x="6510528" y="2788920"/>
-            <a:ext cx="4754880" cy="3108960"/>
+            <a:off x="6428231" y="5504688"/>
+            <a:ext cx="2194560" cy="1097280"/>
           </a:xfrm>
           <a:prstGeom prst="rect">
             <a:avLst/>
@@ -5276,171 +5429,105 @@
           <a:lstStyle/>
           <a:p>
             <a:pPr algn="l">
+              <a:spcBef>
+                <a:spcPts val="0"/>
+              </a:spcBef>
+              <a:spcAft>
+                <a:spcPts val="200"/>
+              </a:spcAft>
+            </a:pPr>
+            <a:r>
+              <a:rPr sz="2200" b="1" i="0">
+                <a:solidFill>
+                  <a:srgbClr val="E85A3A"/>
+                </a:solidFill>
+                <a:latin typeface="Menlo"/>
+              </a:rPr>
+              <a:t>30+</a:t>
+            </a:r>
+          </a:p>
+          <a:p>
+            <a:pPr algn="l">
               <a:lnSpc>
-                <a:spcPct val="110000"/>
+                <a:spcPct val="105000"/>
               </a:lnSpc>
               <a:spcBef>
                 <a:spcPts val="0"/>
               </a:spcBef>
               <a:spcAft>
-                <a:spcPts val="700"/>
-              </a:spcAft>
-            </a:pPr>
-            <a:r>
-              <a:rPr sz="1250" b="0" i="0">
-                <a:solidFill>
-                  <a:srgbClr val="62C8DE"/>
+                <a:spcPts val="600"/>
+              </a:spcAft>
+            </a:pPr>
+            <a:r>
+              <a:rPr sz="1000" b="0" i="0">
+                <a:solidFill>
+                  <a:srgbClr val="9AA8BA"/>
                 </a:solidFill>
                 <a:latin typeface="Helvetica Neue"/>
               </a:rPr>
-              <a:t>●  </a:t>
-            </a:r>
-            <a:r>
-              <a:rPr sz="1250" b="0" i="0">
-                <a:solidFill>
-                  <a:srgbClr val="9AA8BA"/>
-                </a:solidFill>
-                <a:latin typeface="Helvetica Neue"/>
-              </a:rPr>
-              <a:t>National Hurricane Center (NHC) überwacht jeden Sturm</a:t>
-            </a:r>
-          </a:p>
-          <a:p>
-            <a:pPr algn="l">
-              <a:lnSpc>
-                <a:spcPct val="110000"/>
-              </a:lnSpc>
-              <a:spcBef>
-                <a:spcPts val="0"/>
-              </a:spcBef>
-              <a:spcAft>
-                <a:spcPts val="700"/>
-              </a:spcAft>
-            </a:pPr>
-            <a:r>
-              <a:rPr sz="1250" b="0" i="0">
-                <a:solidFill>
-                  <a:srgbClr val="62C8DE"/>
-                </a:solidFill>
-                <a:latin typeface="Helvetica Neue"/>
-              </a:rPr>
-              <a:t>●  </a:t>
-            </a:r>
-            <a:r>
-              <a:rPr sz="1250" b="0" i="0">
-                <a:solidFill>
-                  <a:srgbClr val="9AA8BA"/>
-                </a:solidFill>
-                <a:latin typeface="Helvetica Neue"/>
-              </a:rPr>
-              <a:t>Warnungen über TV, Radio, Mobiltelefon und Internet</a:t>
-            </a:r>
-          </a:p>
-          <a:p>
-            <a:pPr algn="l">
-              <a:lnSpc>
-                <a:spcPct val="110000"/>
-              </a:lnSpc>
-              <a:spcBef>
-                <a:spcPts val="0"/>
-              </a:spcBef>
-              <a:spcAft>
-                <a:spcPts val="700"/>
-              </a:spcAft>
-            </a:pPr>
-            <a:r>
-              <a:rPr sz="1250" b="0" i="0">
-                <a:solidFill>
-                  <a:srgbClr val="62C8DE"/>
-                </a:solidFill>
-                <a:latin typeface="Helvetica Neue"/>
-              </a:rPr>
-              <a:t>●  </a:t>
-            </a:r>
-            <a:r>
-              <a:rPr sz="1250" b="0" i="0">
-                <a:solidFill>
-                  <a:srgbClr val="9AA8BA"/>
-                </a:solidFill>
-                <a:latin typeface="Helvetica Neue"/>
-              </a:rPr>
-              <a:t>Fertige Evakuierungspläne, sofort umsetzbar</a:t>
-            </a:r>
-          </a:p>
-          <a:p>
-            <a:pPr algn="l">
-              <a:lnSpc>
-                <a:spcPct val="110000"/>
-              </a:lnSpc>
-              <a:spcBef>
-                <a:spcPts val="0"/>
-              </a:spcBef>
-              <a:spcAft>
-                <a:spcPts val="700"/>
-              </a:spcAft>
-            </a:pPr>
-            <a:r>
-              <a:rPr sz="1250" b="0" i="0">
-                <a:solidFill>
-                  <a:srgbClr val="62C8DE"/>
-                </a:solidFill>
-                <a:latin typeface="Helvetica Neue"/>
-              </a:rPr>
-              <a:t>●  </a:t>
-            </a:r>
-            <a:r>
-              <a:rPr sz="1250" b="0" i="0">
-                <a:solidFill>
-                  <a:srgbClr val="9AA8BA"/>
-                </a:solidFill>
-                <a:latin typeface="Helvetica Neue"/>
-              </a:rPr>
-              <a:t>Private Vorsorge: Häuser sichern, Vorräte, Versicherungen</a:t>
-            </a:r>
-          </a:p>
-          <a:p>
-            <a:pPr algn="l">
-              <a:lnSpc>
-                <a:spcPct val="110000"/>
-              </a:lnSpc>
-              <a:spcBef>
-                <a:spcPts val="0"/>
-              </a:spcBef>
-              <a:spcAft>
-                <a:spcPts val="700"/>
-              </a:spcAft>
-            </a:pPr>
-            <a:r>
-              <a:rPr sz="1250" b="0" i="0">
-                <a:solidFill>
-                  <a:srgbClr val="62C8DE"/>
-                </a:solidFill>
-                <a:latin typeface="Helvetica Neue"/>
-              </a:rPr>
-              <a:t>●  </a:t>
-            </a:r>
-            <a:r>
-              <a:rPr sz="1250" b="0" i="0">
-                <a:solidFill>
-                  <a:srgbClr val="9AA8BA"/>
-                </a:solidFill>
-                <a:latin typeface="Helvetica Neue"/>
-              </a:rPr>
-              <a:t>Aufklärung über Gefahren nach dem Sturm (Brände, Gaslecks)</a:t>
-            </a:r>
-          </a:p>
-        </p:txBody>
-      </p:sp>
-      <p:sp>
-        <p:nvSpPr>
-          <p:cNvPr id="12" name="TextBox 11"/>
+              <a:t>Todesopfer sofort bestätigt — später über 70</a:t>
+            </a:r>
+          </a:p>
+        </p:txBody>
+      </p:sp>
+      <p:sp>
+        <p:nvSpPr>
+          <p:cNvPr id="16" name="Rounded Rectangle 15"/>
+          <p:cNvSpPr/>
+          <p:nvPr/>
+        </p:nvSpPr>
+        <p:spPr>
+          <a:xfrm>
+            <a:off x="8997696" y="5394960"/>
+            <a:ext cx="2560320" cy="1280160"/>
+          </a:xfrm>
+          <a:prstGeom prst="roundRect">
+            <a:avLst>
+              <a:gd name="adj" fmla="val 4500"/>
+            </a:avLst>
+          </a:prstGeom>
+          <a:solidFill>
+            <a:srgbClr val="111A27"/>
+          </a:solidFill>
+          <a:ln w="9525">
+            <a:solidFill>
+              <a:srgbClr val="2A3648"/>
+            </a:solidFill>
+          </a:ln>
+          <a:effectLst/>
+        </p:spPr>
+        <p:style>
+          <a:lnRef idx="1">
+            <a:schemeClr val="accent1"/>
+          </a:lnRef>
+          <a:fillRef idx="3">
+            <a:schemeClr val="accent1"/>
+          </a:fillRef>
+          <a:effectRef idx="2">
+            <a:schemeClr val="accent1"/>
+          </a:effectRef>
+          <a:fontRef idx="minor">
+            <a:schemeClr val="lt1"/>
+          </a:fontRef>
+        </p:style>
+        <p:txBody>
+          <a:bodyPr rtlCol="0" anchor="ctr"/>
+          <a:lstStyle/>
+          <a:p>
+            <a:pPr algn="ctr"/>
+          </a:p>
+        </p:txBody>
+      </p:sp>
+      <p:sp>
+        <p:nvSpPr>
+          <p:cNvPr id="17" name="TextBox 16"/>
           <p:cNvSpPr txBox="1"/>
           <p:nvPr/>
         </p:nvSpPr>
         <p:spPr>
           <a:xfrm>
-            <a:off x="685800" y="6126480"/>
-            <a:ext cx="10881360" cy="457200"/>
+            <a:off x="9198864" y="5504688"/>
+            <a:ext cx="2194560" cy="1097280"/>
           </a:xfrm>
           <a:prstGeom prst="rect">
             <a:avLst/>
@@ -5453,7 +5540,29 @@
           </a:bodyPr>
           <a:lstStyle/>
           <a:p>
-            <a:pPr algn="ctr">
+            <a:pPr algn="l">
+              <a:spcBef>
+                <a:spcPts val="0"/>
+              </a:spcBef>
+              <a:spcAft>
+                <a:spcPts val="200"/>
+              </a:spcAft>
+            </a:pPr>
+            <a:r>
+              <a:rPr sz="2200" b="1" i="0">
+                <a:solidFill>
+                  <a:srgbClr val="E85A3A"/>
+                </a:solidFill>
+                <a:latin typeface="Menlo"/>
+              </a:rPr>
+              <a:t>7 t</a:t>
+            </a:r>
+          </a:p>
+          <a:p>
+            <a:pPr algn="l">
+              <a:lnSpc>
+                <a:spcPct val="105000"/>
+              </a:lnSpc>
               <a:spcBef>
                 <a:spcPts val="0"/>
               </a:spcBef>
@@ -5462,13 +5571,13 @@
               </a:spcAft>
             </a:pPr>
             <a:r>
-              <a:rPr sz="1300" b="0" i="0" spc="250">
-                <a:solidFill>
-                  <a:srgbClr val="E8EEF5"/>
-                </a:solidFill>
-                <a:latin typeface="Menlo"/>
-              </a:rPr>
-              <a:t>NATURGEFAHR  ×  VERWUNDBARKEIT  =  AUSMASS DER KATASTROPHE</a:t>
+              <a:rPr sz="1000" b="0" i="0">
+                <a:solidFill>
+                  <a:srgbClr val="9AA8BA"/>
+                </a:solidFill>
+                <a:latin typeface="Helvetica Neue"/>
+              </a:rPr>
+              <a:t>Fertiggerichte lieferte das Welternährungsprogramm</a:t>
             </a:r>
           </a:p>
         </p:txBody>
@@ -5536,7 +5645,7 @@
                 </a:solidFill>
                 <a:latin typeface="Menlo"/>
               </a:rPr>
-              <a:t>KAPITEL 09 · AUSBLICK</a:t>
+              <a:t>KAPITEL 09 · DIE LEITFRAGE</a:t>
             </a:r>
           </a:p>
         </p:txBody>
@@ -5575,13 +5684,13 @@
               </a:spcAft>
             </a:pPr>
             <a:r>
-              <a:rPr sz="4400" b="1" i="0">
+              <a:rPr sz="3400" b="1" i="0">
                 <a:solidFill>
                   <a:srgbClr val="E8EEF5"/>
                 </a:solidFill>
                 <a:latin typeface="Avenir Next Condensed"/>
               </a:rPr>
-              <a:t>DER KLIMAWANDEL HEIZT NACH</a:t>
+              <a:t>GLEICHER STURM — UNGLEICHE CHANCEN</a:t>
             </a:r>
           </a:p>
         </p:txBody>
@@ -5594,8 +5703,8 @@
         </p:nvSpPr>
         <p:spPr>
           <a:xfrm>
-            <a:off x="685800" y="1920240"/>
-            <a:ext cx="3456432" cy="2286000"/>
+            <a:off x="685800" y="1783080"/>
+            <a:ext cx="5285232" cy="4160520"/>
           </a:xfrm>
           <a:prstGeom prst="roundRect">
             <a:avLst>
@@ -5636,14 +5745,58 @@
       </p:sp>
       <p:sp>
         <p:nvSpPr>
-          <p:cNvPr id="5" name="TextBox 4"/>
+          <p:cNvPr id="5" name="Rectangle 4"/>
+          <p:cNvSpPr/>
+          <p:nvPr/>
+        </p:nvSpPr>
+        <p:spPr>
+          <a:xfrm>
+            <a:off x="685800" y="1783080"/>
+            <a:ext cx="5285232" cy="54864"/>
+          </a:xfrm>
+          <a:prstGeom prst="rect">
+            <a:avLst/>
+          </a:prstGeom>
+          <a:solidFill>
+            <a:srgbClr val="E85A3A"/>
+          </a:solidFill>
+          <a:ln>
+            <a:noFill/>
+          </a:ln>
+          <a:effectLst/>
+        </p:spPr>
+        <p:style>
+          <a:lnRef idx="1">
+            <a:schemeClr val="accent1"/>
+          </a:lnRef>
+          <a:fillRef idx="3">
+            <a:schemeClr val="accent1"/>
+          </a:fillRef>
+          <a:effectRef idx="2">
+            <a:schemeClr val="accent1"/>
+          </a:effectRef>
+          <a:fontRef idx="minor">
+            <a:schemeClr val="lt1"/>
+          </a:fontRef>
+        </p:style>
+        <p:txBody>
+          <a:bodyPr rtlCol="0" anchor="ctr"/>
+          <a:lstStyle/>
+          <a:p>
+            <a:pPr algn="ctr"/>
+          </a:p>
+        </p:txBody>
+      </p:sp>
+      <p:sp>
+        <p:nvSpPr>
+          <p:cNvPr id="6" name="TextBox 5"/>
           <p:cNvSpPr txBox="1"/>
           <p:nvPr/>
         </p:nvSpPr>
         <p:spPr>
           <a:xfrm>
-            <a:off x="941832" y="2121408"/>
-            <a:ext cx="2971800" cy="1920240"/>
+            <a:off x="978408" y="2011680"/>
+            <a:ext cx="4754880" cy="548640"/>
           </a:xfrm>
           <a:prstGeom prst="rect">
             <a:avLst/>
@@ -5661,72 +5814,228 @@
                 <a:spcPts val="0"/>
               </a:spcBef>
               <a:spcAft>
-                <a:spcPts val="200"/>
-              </a:spcAft>
-            </a:pPr>
-            <a:r>
-              <a:rPr sz="3000" b="1" i="0">
-                <a:solidFill>
-                  <a:srgbClr val="F5AE4B"/>
+                <a:spcPts val="600"/>
+              </a:spcAft>
+            </a:pPr>
+            <a:r>
+              <a:rPr sz="1900" b="1" i="0">
+                <a:solidFill>
+                  <a:srgbClr val="E8EEF5"/>
+                </a:solidFill>
+                <a:latin typeface="Avenir Next Condensed"/>
+              </a:rPr>
+              <a:t>KARIBISCHE INSELSTAATEN</a:t>
+            </a:r>
+          </a:p>
+          <a:p>
+            <a:pPr algn="l">
+              <a:spcBef>
+                <a:spcPts val="0"/>
+              </a:spcBef>
+              <a:spcAft>
+                <a:spcPts val="600"/>
+              </a:spcAft>
+            </a:pPr>
+            <a:r>
+              <a:rPr sz="900" b="0" i="0" spc="200">
+                <a:solidFill>
+                  <a:srgbClr val="E85A3A"/>
+                </a:solidFill>
+                <a:latin typeface="Menlo"/>
+              </a:rPr>
+              <a:t>HOHE VULNERABILITÄT</a:t>
+            </a:r>
+          </a:p>
+        </p:txBody>
+      </p:sp>
+      <p:sp>
+        <p:nvSpPr>
+          <p:cNvPr id="7" name="TextBox 6"/>
+          <p:cNvSpPr txBox="1"/>
+          <p:nvPr/>
+        </p:nvSpPr>
+        <p:spPr>
+          <a:xfrm>
+            <a:off x="978408" y="2788920"/>
+            <a:ext cx="4754880" cy="3108960"/>
+          </a:xfrm>
+          <a:prstGeom prst="rect">
+            <a:avLst/>
+          </a:prstGeom>
+          <a:noFill/>
+        </p:spPr>
+        <p:txBody>
+          <a:bodyPr wrap="square" anchor="t">
+            <a:spAutoFit/>
+          </a:bodyPr>
+          <a:lstStyle/>
+          <a:p>
+            <a:pPr algn="l">
+              <a:lnSpc>
+                <a:spcPct val="110000"/>
+              </a:lnSpc>
+              <a:spcBef>
+                <a:spcPts val="0"/>
+              </a:spcBef>
+              <a:spcAft>
+                <a:spcPts val="700"/>
+              </a:spcAft>
+            </a:pPr>
+            <a:r>
+              <a:rPr sz="1250" b="0" i="0">
+                <a:solidFill>
+                  <a:srgbClr val="E85A3A"/>
                 </a:solidFill>
                 <a:latin typeface="Helvetica Neue"/>
               </a:rPr>
-              <a:t>↑</a:t>
-            </a:r>
-          </a:p>
-          <a:p>
-            <a:pPr algn="l">
-              <a:spcBef>
-                <a:spcPts val="0"/>
-              </a:spcBef>
-              <a:spcAft>
-                <a:spcPts val="400"/>
-              </a:spcAft>
-            </a:pPr>
-            <a:r>
-              <a:rPr sz="1800" b="1" i="0">
-                <a:solidFill>
-                  <a:srgbClr val="E8EEF5"/>
-                </a:solidFill>
-                <a:latin typeface="Avenir Next Condensed"/>
-              </a:rPr>
-              <a:t>MEHR ENERGIE</a:t>
+              <a:t>▪  </a:t>
+            </a:r>
+            <a:r>
+              <a:rPr sz="1250" b="0" i="0">
+                <a:solidFill>
+                  <a:srgbClr val="9AA8BA"/>
+                </a:solidFill>
+                <a:latin typeface="Helvetica Neue"/>
+              </a:rPr>
+              <a:t>Mitten in Entstehungsgebiet und Zugbahnen der Hurrikans</a:t>
             </a:r>
           </a:p>
           <a:p>
             <a:pPr algn="l">
               <a:lnSpc>
-                <a:spcPct val="115000"/>
+                <a:spcPct val="110000"/>
               </a:lnSpc>
               <a:spcBef>
                 <a:spcPts val="0"/>
               </a:spcBef>
               <a:spcAft>
-                <a:spcPts val="600"/>
+                <a:spcPts val="700"/>
               </a:spcAft>
             </a:pPr>
             <a:r>
               <a:rPr sz="1250" b="0" i="0">
                 <a:solidFill>
+                  <a:srgbClr val="E85A3A"/>
+                </a:solidFill>
+                <a:latin typeface="Helvetica Neue"/>
+              </a:rPr>
+              <a:t>▪  </a:t>
+            </a:r>
+            <a:r>
+              <a:rPr sz="1250" b="0" i="0">
+                <a:solidFill>
                   <a:srgbClr val="9AA8BA"/>
                 </a:solidFill>
                 <a:latin typeface="Helvetica Neue"/>
               </a:rPr>
-              <a:t>Wärmere Ozeane liefern mehr Wasserdampf — der Anteil besonders starker Stürme (Kat. 4–5) steigt.</a:t>
-            </a:r>
-          </a:p>
-        </p:txBody>
-      </p:sp>
-      <p:sp>
-        <p:nvSpPr>
-          <p:cNvPr id="6" name="Rounded Rectangle 5"/>
+              <a:t>Fast alle Siedlungen in Küstennähe — voll im Bereich der Flutwellen</a:t>
+            </a:r>
+          </a:p>
+          <a:p>
+            <a:pPr algn="l">
+              <a:lnSpc>
+                <a:spcPct val="110000"/>
+              </a:lnSpc>
+              <a:spcBef>
+                <a:spcPts val="0"/>
+              </a:spcBef>
+              <a:spcAft>
+                <a:spcPts val="700"/>
+              </a:spcAft>
+            </a:pPr>
+            <a:r>
+              <a:rPr sz="1250" b="0" i="0">
+                <a:solidFill>
+                  <a:srgbClr val="E85A3A"/>
+                </a:solidFill>
+                <a:latin typeface="Helvetica Neue"/>
+              </a:rPr>
+              <a:t>▪  </a:t>
+            </a:r>
+            <a:r>
+              <a:rPr sz="1250" b="0" i="0">
+                <a:solidFill>
+                  <a:srgbClr val="9AA8BA"/>
+                </a:solidFill>
+                <a:latin typeface="Helvetica Neue"/>
+              </a:rPr>
+              <a:t>Marode Bausubstanz, veraltete Infrastruktur</a:t>
+            </a:r>
+          </a:p>
+          <a:p>
+            <a:pPr algn="l">
+              <a:lnSpc>
+                <a:spcPct val="110000"/>
+              </a:lnSpc>
+              <a:spcBef>
+                <a:spcPts val="0"/>
+              </a:spcBef>
+              <a:spcAft>
+                <a:spcPts val="700"/>
+              </a:spcAft>
+            </a:pPr>
+            <a:r>
+              <a:rPr sz="1250" b="0" i="0">
+                <a:solidFill>
+                  <a:srgbClr val="E85A3A"/>
+                </a:solidFill>
+                <a:latin typeface="Helvetica Neue"/>
+              </a:rPr>
+              <a:t>▪  </a:t>
+            </a:r>
+            <a:r>
+              <a:rPr sz="1250" b="0" i="0">
+                <a:solidFill>
+                  <a:srgbClr val="9AA8BA"/>
+                </a:solidFill>
+                <a:latin typeface="Helvetica Neue"/>
+              </a:rPr>
+              <a:t>Unzureichende Information, kaum Vorhersage- und Schutzmaßnahmen</a:t>
+            </a:r>
+          </a:p>
+          <a:p>
+            <a:pPr algn="l">
+              <a:lnSpc>
+                <a:spcPct val="110000"/>
+              </a:lnSpc>
+              <a:spcBef>
+                <a:spcPts val="0"/>
+              </a:spcBef>
+              <a:spcAft>
+                <a:spcPts val="700"/>
+              </a:spcAft>
+            </a:pPr>
+            <a:r>
+              <a:rPr sz="1250" b="0" i="0">
+                <a:solidFill>
+                  <a:srgbClr val="E85A3A"/>
+                </a:solidFill>
+                <a:latin typeface="Helvetica Neue"/>
+              </a:rPr>
+              <a:t>▪  </a:t>
+            </a:r>
+            <a:r>
+              <a:rPr sz="1250" b="0" i="0">
+                <a:solidFill>
+                  <a:srgbClr val="9AA8BA"/>
+                </a:solidFill>
+                <a:latin typeface="Helvetica Neue"/>
+              </a:rPr>
+              <a:t>Kleine Volkswirtschaften: Ein Sturm trifft das ganze Land</a:t>
+            </a:r>
+          </a:p>
+        </p:txBody>
+      </p:sp>
+      <p:sp>
+        <p:nvSpPr>
+          <p:cNvPr id="8" name="Rounded Rectangle 7"/>
           <p:cNvSpPr/>
           <p:nvPr/>
         </p:nvSpPr>
         <p:spPr>
           <a:xfrm>
-            <a:off x="4370832" y="1920240"/>
-            <a:ext cx="3456432" cy="2286000"/>
+            <a:off x="6217920" y="1783080"/>
+            <a:ext cx="5285232" cy="4160520"/>
           </a:xfrm>
           <a:prstGeom prst="roundRect">
             <a:avLst>
@@ -5767,110 +6076,23 @@
       </p:sp>
       <p:sp>
         <p:nvSpPr>
-          <p:cNvPr id="7" name="TextBox 6"/>
-          <p:cNvSpPr txBox="1"/>
-          <p:nvPr/>
-        </p:nvSpPr>
-        <p:spPr>
-          <a:xfrm>
-            <a:off x="4626864" y="2121408"/>
-            <a:ext cx="2971800" cy="1920240"/>
+          <p:cNvPr id="9" name="Rectangle 8"/>
+          <p:cNvSpPr/>
+          <p:nvPr/>
+        </p:nvSpPr>
+        <p:spPr>
+          <a:xfrm>
+            <a:off x="6217920" y="1783080"/>
+            <a:ext cx="5285232" cy="54864"/>
           </a:xfrm>
           <a:prstGeom prst="rect">
             <a:avLst/>
           </a:prstGeom>
-          <a:noFill/>
-        </p:spPr>
-        <p:txBody>
-          <a:bodyPr wrap="square" anchor="t">
-            <a:spAutoFit/>
-          </a:bodyPr>
-          <a:lstStyle/>
-          <a:p>
-            <a:pPr algn="l">
-              <a:spcBef>
-                <a:spcPts val="0"/>
-              </a:spcBef>
-              <a:spcAft>
-                <a:spcPts val="200"/>
-              </a:spcAft>
-            </a:pPr>
-            <a:r>
-              <a:rPr sz="3000" b="1" i="0">
-                <a:solidFill>
-                  <a:srgbClr val="F5AE4B"/>
-                </a:solidFill>
-                <a:latin typeface="Helvetica Neue"/>
-              </a:rPr>
-              <a:t>↑</a:t>
-            </a:r>
-          </a:p>
-          <a:p>
-            <a:pPr algn="l">
-              <a:spcBef>
-                <a:spcPts val="0"/>
-              </a:spcBef>
-              <a:spcAft>
-                <a:spcPts val="400"/>
-              </a:spcAft>
-            </a:pPr>
-            <a:r>
-              <a:rPr sz="1800" b="1" i="0">
-                <a:solidFill>
-                  <a:srgbClr val="E8EEF5"/>
-                </a:solidFill>
-                <a:latin typeface="Avenir Next Condensed"/>
-              </a:rPr>
-              <a:t>MEHR REGEN</a:t>
-            </a:r>
-          </a:p>
-          <a:p>
-            <a:pPr algn="l">
-              <a:lnSpc>
-                <a:spcPct val="115000"/>
-              </a:lnSpc>
-              <a:spcBef>
-                <a:spcPts val="0"/>
-              </a:spcBef>
-              <a:spcAft>
-                <a:spcPts val="600"/>
-              </a:spcAft>
-            </a:pPr>
-            <a:r>
-              <a:rPr sz="1250" b="0" i="0">
-                <a:solidFill>
-                  <a:srgbClr val="9AA8BA"/>
-                </a:solidFill>
-                <a:latin typeface="Helvetica Neue"/>
-              </a:rPr>
-              <a:t>Wärmere Luft speichert mehr Feuchtigkeit: heftigerer Starkregen — und Stürme ziehen teils langsamer, wie Dorian.</a:t>
-            </a:r>
-          </a:p>
-        </p:txBody>
-      </p:sp>
-      <p:sp>
-        <p:nvSpPr>
-          <p:cNvPr id="8" name="Rounded Rectangle 7"/>
-          <p:cNvSpPr/>
-          <p:nvPr/>
-        </p:nvSpPr>
-        <p:spPr>
-          <a:xfrm>
-            <a:off x="8055864" y="1920240"/>
-            <a:ext cx="3456432" cy="2286000"/>
-          </a:xfrm>
-          <a:prstGeom prst="roundRect">
-            <a:avLst>
-              <a:gd name="adj" fmla="val 4500"/>
-            </a:avLst>
-          </a:prstGeom>
           <a:solidFill>
-            <a:srgbClr val="111A27"/>
+            <a:srgbClr val="62C8DE"/>
           </a:solidFill>
-          <a:ln w="9525">
-            <a:solidFill>
-              <a:srgbClr val="2A3648"/>
-            </a:solidFill>
+          <a:ln>
+            <a:noFill/>
           </a:ln>
           <a:effectLst/>
         </p:spPr>
@@ -5898,14 +6120,14 @@
       </p:sp>
       <p:sp>
         <p:nvSpPr>
-          <p:cNvPr id="9" name="TextBox 8"/>
+          <p:cNvPr id="10" name="TextBox 9"/>
           <p:cNvSpPr txBox="1"/>
           <p:nvPr/>
         </p:nvSpPr>
         <p:spPr>
           <a:xfrm>
-            <a:off x="8311896" y="2121408"/>
-            <a:ext cx="2971800" cy="1920240"/>
+            <a:off x="6510528" y="2011680"/>
+            <a:ext cx="4754880" cy="548640"/>
           </a:xfrm>
           <a:prstGeom prst="rect">
             <a:avLst/>
@@ -5923,43 +6145,21 @@
                 <a:spcPts val="0"/>
               </a:spcBef>
               <a:spcAft>
-                <a:spcPts val="200"/>
-              </a:spcAft>
-            </a:pPr>
-            <a:r>
-              <a:rPr sz="3000" b="1" i="0">
-                <a:solidFill>
-                  <a:srgbClr val="F5AE4B"/>
-                </a:solidFill>
-                <a:latin typeface="Helvetica Neue"/>
-              </a:rPr>
-              <a:t>↑</a:t>
-            </a:r>
-          </a:p>
-          <a:p>
-            <a:pPr algn="l">
-              <a:spcBef>
-                <a:spcPts val="0"/>
-              </a:spcBef>
-              <a:spcAft>
-                <a:spcPts val="400"/>
-              </a:spcAft>
-            </a:pPr>
-            <a:r>
-              <a:rPr sz="1800" b="1" i="0">
+                <a:spcPts val="600"/>
+              </a:spcAft>
+            </a:pPr>
+            <a:r>
+              <a:rPr sz="1900" b="1" i="0">
                 <a:solidFill>
                   <a:srgbClr val="E8EEF5"/>
                 </a:solidFill>
                 <a:latin typeface="Avenir Next Condensed"/>
               </a:rPr>
-              <a:t>HÖHERE FLUTEN</a:t>
-            </a:r>
-          </a:p>
-          <a:p>
-            <a:pPr algn="l">
-              <a:lnSpc>
-                <a:spcPct val="115000"/>
-              </a:lnSpc>
+              <a:t>USA — SCHUTZ ALS SYSTEM</a:t>
+            </a:r>
+          </a:p>
+          <a:p>
+            <a:pPr algn="l">
               <a:spcBef>
                 <a:spcPts val="0"/>
               </a:spcBef>
@@ -5968,27 +6168,27 @@
               </a:spcAft>
             </a:pPr>
             <a:r>
-              <a:rPr sz="1250" b="0" i="0">
-                <a:solidFill>
-                  <a:srgbClr val="9AA8BA"/>
-                </a:solidFill>
-                <a:latin typeface="Helvetica Neue"/>
-              </a:rPr>
-              <a:t>Der steigende Meeresspiegel macht jede Sturmflut gefährlicher — besonders für flache Inselstaaten.</a:t>
-            </a:r>
-          </a:p>
-        </p:txBody>
-      </p:sp>
-      <p:sp>
-        <p:nvSpPr>
-          <p:cNvPr id="10" name="TextBox 9"/>
+              <a:rPr sz="900" b="0" i="0" spc="200">
+                <a:solidFill>
+                  <a:srgbClr val="62C8DE"/>
+                </a:solidFill>
+                <a:latin typeface="Menlo"/>
+              </a:rPr>
+              <a:t>BEISPIEL M6</a:t>
+            </a:r>
+          </a:p>
+        </p:txBody>
+      </p:sp>
+      <p:sp>
+        <p:nvSpPr>
+          <p:cNvPr id="11" name="TextBox 10"/>
           <p:cNvSpPr txBox="1"/>
           <p:nvPr/>
         </p:nvSpPr>
         <p:spPr>
           <a:xfrm>
-            <a:off x="685800" y="4663440"/>
-            <a:ext cx="10881360" cy="1188720"/>
+            <a:off x="6510528" y="2788920"/>
+            <a:ext cx="4754880" cy="3108960"/>
           </a:xfrm>
           <a:prstGeom prst="rect">
             <a:avLst/>
@@ -6003,46 +6203,170 @@
           <a:p>
             <a:pPr algn="l">
               <a:lnSpc>
-                <a:spcPct val="125000"/>
+                <a:spcPct val="110000"/>
               </a:lnSpc>
               <a:spcBef>
                 <a:spcPts val="0"/>
               </a:spcBef>
               <a:spcAft>
-                <a:spcPts val="600"/>
-              </a:spcAft>
-            </a:pPr>
-            <a:r>
-              <a:rPr sz="1500" b="1" i="0">
-                <a:solidFill>
-                  <a:srgbClr val="E8EEF5"/>
+                <a:spcPts val="700"/>
+              </a:spcAft>
+            </a:pPr>
+            <a:r>
+              <a:rPr sz="1250" b="0" i="0">
+                <a:solidFill>
+                  <a:srgbClr val="62C8DE"/>
                 </a:solidFill>
                 <a:latin typeface="Helvetica Neue"/>
               </a:rPr>
-              <a:t>Und Europa?  </a:t>
-            </a:r>
-            <a:r>
-              <a:rPr sz="1500" b="0" i="0">
+              <a:t>●  </a:t>
+            </a:r>
+            <a:r>
+              <a:rPr sz="1250" b="0" i="0">
                 <a:solidFill>
                   <a:srgbClr val="9AA8BA"/>
                 </a:solidFill>
                 <a:latin typeface="Helvetica Neue"/>
               </a:rPr>
-              <a:t>Echte Hurrikans bleiben die Ausnahme — aber Ex-Hurrikane wie „Ophelia“ (2017) erreichten Irland, und im Mittelmeer treten hurrikanähnliche Stürme auf: sogenannte „Medicanes“. Mit wärmeren Meeren könnte das häufiger werden.</a:t>
-            </a:r>
-          </a:p>
-        </p:txBody>
-      </p:sp>
-      <p:sp>
-        <p:nvSpPr>
-          <p:cNvPr id="11" name="TextBox 10"/>
+              <a:t>National Hurricane Center (NHC) überwacht jeden Sturm</a:t>
+            </a:r>
+          </a:p>
+          <a:p>
+            <a:pPr algn="l">
+              <a:lnSpc>
+                <a:spcPct val="110000"/>
+              </a:lnSpc>
+              <a:spcBef>
+                <a:spcPts val="0"/>
+              </a:spcBef>
+              <a:spcAft>
+                <a:spcPts val="700"/>
+              </a:spcAft>
+            </a:pPr>
+            <a:r>
+              <a:rPr sz="1250" b="0" i="0">
+                <a:solidFill>
+                  <a:srgbClr val="62C8DE"/>
+                </a:solidFill>
+                <a:latin typeface="Helvetica Neue"/>
+              </a:rPr>
+              <a:t>●  </a:t>
+            </a:r>
+            <a:r>
+              <a:rPr sz="1250" b="0" i="0">
+                <a:solidFill>
+                  <a:srgbClr val="9AA8BA"/>
+                </a:solidFill>
+                <a:latin typeface="Helvetica Neue"/>
+              </a:rPr>
+              <a:t>Warnungen über TV, Radio, Mobiltelefon und Internet</a:t>
+            </a:r>
+          </a:p>
+          <a:p>
+            <a:pPr algn="l">
+              <a:lnSpc>
+                <a:spcPct val="110000"/>
+              </a:lnSpc>
+              <a:spcBef>
+                <a:spcPts val="0"/>
+              </a:spcBef>
+              <a:spcAft>
+                <a:spcPts val="700"/>
+              </a:spcAft>
+            </a:pPr>
+            <a:r>
+              <a:rPr sz="1250" b="0" i="0">
+                <a:solidFill>
+                  <a:srgbClr val="62C8DE"/>
+                </a:solidFill>
+                <a:latin typeface="Helvetica Neue"/>
+              </a:rPr>
+              <a:t>●  </a:t>
+            </a:r>
+            <a:r>
+              <a:rPr sz="1250" b="0" i="0">
+                <a:solidFill>
+                  <a:srgbClr val="9AA8BA"/>
+                </a:solidFill>
+                <a:latin typeface="Helvetica Neue"/>
+              </a:rPr>
+              <a:t>Fertige Evakuierungspläne, sofort umsetzbar</a:t>
+            </a:r>
+          </a:p>
+          <a:p>
+            <a:pPr algn="l">
+              <a:lnSpc>
+                <a:spcPct val="110000"/>
+              </a:lnSpc>
+              <a:spcBef>
+                <a:spcPts val="0"/>
+              </a:spcBef>
+              <a:spcAft>
+                <a:spcPts val="700"/>
+              </a:spcAft>
+            </a:pPr>
+            <a:r>
+              <a:rPr sz="1250" b="0" i="0">
+                <a:solidFill>
+                  <a:srgbClr val="62C8DE"/>
+                </a:solidFill>
+                <a:latin typeface="Helvetica Neue"/>
+              </a:rPr>
+              <a:t>●  </a:t>
+            </a:r>
+            <a:r>
+              <a:rPr sz="1250" b="0" i="0">
+                <a:solidFill>
+                  <a:srgbClr val="9AA8BA"/>
+                </a:solidFill>
+                <a:latin typeface="Helvetica Neue"/>
+              </a:rPr>
+              <a:t>Private Vorsorge: Häuser sichern, Vorräte, Versicherungen</a:t>
+            </a:r>
+          </a:p>
+          <a:p>
+            <a:pPr algn="l">
+              <a:lnSpc>
+                <a:spcPct val="110000"/>
+              </a:lnSpc>
+              <a:spcBef>
+                <a:spcPts val="0"/>
+              </a:spcBef>
+              <a:spcAft>
+                <a:spcPts val="700"/>
+              </a:spcAft>
+            </a:pPr>
+            <a:r>
+              <a:rPr sz="1250" b="0" i="0">
+                <a:solidFill>
+                  <a:srgbClr val="62C8DE"/>
+                </a:solidFill>
+                <a:latin typeface="Helvetica Neue"/>
+              </a:rPr>
+              <a:t>●  </a:t>
+            </a:r>
+            <a:r>
+              <a:rPr sz="1250" b="0" i="0">
+                <a:solidFill>
+                  <a:srgbClr val="9AA8BA"/>
+                </a:solidFill>
+                <a:latin typeface="Helvetica Neue"/>
+              </a:rPr>
+              <a:t>Aufklärung über Gefahren nach dem Sturm (Brände, Gaslecks)</a:t>
+            </a:r>
+          </a:p>
+        </p:txBody>
+      </p:sp>
+      <p:sp>
+        <p:nvSpPr>
+          <p:cNvPr id="12" name="TextBox 11"/>
           <p:cNvSpPr txBox="1"/>
           <p:nvPr/>
         </p:nvSpPr>
         <p:spPr>
           <a:xfrm>
-            <a:off x="685800" y="6035040"/>
-            <a:ext cx="7315200" cy="365760"/>
+            <a:off x="685800" y="6126480"/>
+            <a:ext cx="10881360" cy="457200"/>
           </a:xfrm>
           <a:prstGeom prst="rect">
             <a:avLst/>
@@ -6055,7 +6379,7 @@
           </a:bodyPr>
           <a:lstStyle/>
           <a:p>
-            <a:pPr algn="l">
+            <a:pPr algn="ctr">
               <a:spcBef>
                 <a:spcPts val="0"/>
               </a:spcBef>
@@ -6064,13 +6388,13 @@
               </a:spcAft>
             </a:pPr>
             <a:r>
-              <a:rPr sz="900" b="0" i="0" spc="150">
-                <a:solidFill>
-                  <a:srgbClr val="6E7D90"/>
+              <a:rPr sz="1300" b="0" i="0" spc="250">
+                <a:solidFill>
+                  <a:srgbClr val="E8EEF5"/>
                 </a:solidFill>
                 <a:latin typeface="Menlo"/>
               </a:rPr>
-              <a:t>RECHERCHE: IPCC / NOAA · AUFGABE 6, S. 112</a:t>
+              <a:t>NATURGEFAHR  ×  VERWUNDBARKEIT  =  AUSMASS DER KATASTROPHE</a:t>
             </a:r>
           </a:p>
         </p:txBody>
@@ -6101,40 +6425,16 @@
         <p:nvPr/>
       </p:nvGrpSpPr>
       <p:grpSpPr/>
-      <p:pic>
-        <p:nvPicPr>
-          <p:cNvPr id="2" name="Picture 1" descr="storm_hero.jpg"/>
-          <p:cNvPicPr>
-            <a:picLocks noChangeAspect="1"/>
-          </p:cNvPicPr>
-          <p:nvPr/>
-        </p:nvPicPr>
-        <p:blipFill>
-          <a:blip r:embed="rId2"/>
-          <a:stretch>
-            <a:fillRect/>
-          </a:stretch>
-        </p:blipFill>
-        <p:spPr>
-          <a:xfrm>
-            <a:off x="0" y="0"/>
-            <a:ext cx="12191695" cy="6858000"/>
-          </a:xfrm>
-          <a:prstGeom prst="rect">
-            <a:avLst/>
-          </a:prstGeom>
-        </p:spPr>
-      </p:pic>
-      <p:sp>
-        <p:nvSpPr>
-          <p:cNvPr id="3" name="TextBox 2"/>
+      <p:sp>
+        <p:nvSpPr>
+          <p:cNvPr id="2" name="TextBox 1"/>
           <p:cNvSpPr txBox="1"/>
           <p:nvPr/>
         </p:nvSpPr>
         <p:spPr>
           <a:xfrm>
-            <a:off x="685800" y="640080"/>
-            <a:ext cx="10817352" cy="365760"/>
+            <a:off x="685800" y="502920"/>
+            <a:ext cx="10789920" cy="365760"/>
           </a:xfrm>
           <a:prstGeom prst="rect">
             <a:avLst/>
@@ -6147,7 +6447,7 @@
           </a:bodyPr>
           <a:lstStyle/>
           <a:p>
-            <a:pPr algn="ctr">
+            <a:pPr algn="l">
               <a:spcBef>
                 <a:spcPts val="0"/>
               </a:spcBef>
@@ -6162,21 +6462,21 @@
                 </a:solidFill>
                 <a:latin typeface="Menlo"/>
               </a:rPr>
-              <a:t>KAPITEL 10 · FAZIT</a:t>
-            </a:r>
-          </a:p>
-        </p:txBody>
-      </p:sp>
-      <p:sp>
-        <p:nvSpPr>
-          <p:cNvPr id="4" name="TextBox 3"/>
+              <a:t>KAPITEL 10 · AUSBLICK</a:t>
+            </a:r>
+          </a:p>
+        </p:txBody>
+      </p:sp>
+      <p:sp>
+        <p:nvSpPr>
+          <p:cNvPr id="3" name="TextBox 2"/>
           <p:cNvSpPr txBox="1"/>
           <p:nvPr/>
         </p:nvSpPr>
         <p:spPr>
           <a:xfrm>
-            <a:off x="658368" y="1051560"/>
-            <a:ext cx="10881360" cy="1188720"/>
+            <a:off x="658368" y="868680"/>
+            <a:ext cx="10881360" cy="1463040"/>
           </a:xfrm>
           <a:prstGeom prst="rect">
             <a:avLst/>
@@ -6189,7 +6489,10 @@
           </a:bodyPr>
           <a:lstStyle/>
           <a:p>
-            <a:pPr algn="ctr">
+            <a:pPr algn="l">
+              <a:lnSpc>
+                <a:spcPct val="98000"/>
+              </a:lnSpc>
               <a:spcBef>
                 <a:spcPts val="0"/>
               </a:spcBef>
@@ -6198,27 +6501,27 @@
               </a:spcAft>
             </a:pPr>
             <a:r>
-              <a:rPr sz="5400" b="1" i="0">
+              <a:rPr sz="4400" b="1" i="0">
                 <a:solidFill>
                   <a:srgbClr val="E8EEF5"/>
                 </a:solidFill>
                 <a:latin typeface="Avenir Next Condensed"/>
               </a:rPr>
-              <a:t>DARUM DIE KARIBIK</a:t>
-            </a:r>
-          </a:p>
-        </p:txBody>
-      </p:sp>
-      <p:sp>
-        <p:nvSpPr>
-          <p:cNvPr id="5" name="Rounded Rectangle 4"/>
+              <a:t>DER KLIMAWANDEL HEIZT NACH</a:t>
+            </a:r>
+          </a:p>
+        </p:txBody>
+      </p:sp>
+      <p:sp>
+        <p:nvSpPr>
+          <p:cNvPr id="4" name="Rounded Rectangle 3"/>
           <p:cNvSpPr/>
           <p:nvPr/>
         </p:nvSpPr>
         <p:spPr>
           <a:xfrm>
-            <a:off x="685800" y="2651760"/>
-            <a:ext cx="3456432" cy="2148840"/>
+            <a:off x="685800" y="1920240"/>
+            <a:ext cx="3456432" cy="2286000"/>
           </a:xfrm>
           <a:prstGeom prst="roundRect">
             <a:avLst>
@@ -6259,14 +6562,14 @@
       </p:sp>
       <p:sp>
         <p:nvSpPr>
-          <p:cNvPr id="6" name="TextBox 5"/>
+          <p:cNvPr id="5" name="TextBox 4"/>
           <p:cNvSpPr txBox="1"/>
           <p:nvPr/>
         </p:nvSpPr>
         <p:spPr>
           <a:xfrm>
-            <a:off x="941832" y="2834640"/>
-            <a:ext cx="2971800" cy="1828800"/>
+            <a:off x="941832" y="2121408"/>
+            <a:ext cx="2971800" cy="1920240"/>
           </a:xfrm>
           <a:prstGeom prst="rect">
             <a:avLst/>
@@ -6284,17 +6587,36 @@
                 <a:spcPts val="0"/>
               </a:spcBef>
               <a:spcAft>
-                <a:spcPts val="500"/>
-              </a:spcAft>
-            </a:pPr>
-            <a:r>
-              <a:rPr sz="1000" b="0" i="0" spc="250">
-                <a:solidFill>
-                  <a:srgbClr val="62C8DE"/>
-                </a:solidFill>
-                <a:latin typeface="Menlo"/>
-              </a:rPr>
-              <a:t>GRUND 01</a:t>
+                <a:spcPts val="200"/>
+              </a:spcAft>
+            </a:pPr>
+            <a:r>
+              <a:rPr sz="3000" b="1" i="0">
+                <a:solidFill>
+                  <a:srgbClr val="F5AE4B"/>
+                </a:solidFill>
+                <a:latin typeface="Helvetica Neue"/>
+              </a:rPr>
+              <a:t>↑</a:t>
+            </a:r>
+          </a:p>
+          <a:p>
+            <a:pPr algn="l">
+              <a:spcBef>
+                <a:spcPts val="0"/>
+              </a:spcBef>
+              <a:spcAft>
+                <a:spcPts val="400"/>
+              </a:spcAft>
+            </a:pPr>
+            <a:r>
+              <a:rPr sz="1800" b="1" i="0">
+                <a:solidFill>
+                  <a:srgbClr val="E8EEF5"/>
+                </a:solidFill>
+                <a:latin typeface="Avenir Next Condensed"/>
+              </a:rPr>
+              <a:t>MEHR ENERGIE</a:t>
             </a:r>
           </a:p>
           <a:p>
@@ -6310,36 +6632,27 @@
               </a:spcAft>
             </a:pPr>
             <a:r>
-              <a:rPr sz="1300" b="1" i="0">
-                <a:solidFill>
-                  <a:srgbClr val="E8EEF5"/>
+              <a:rPr sz="1250" b="0" i="0">
+                <a:solidFill>
+                  <a:srgbClr val="9AA8BA"/>
                 </a:solidFill>
                 <a:latin typeface="Helvetica Neue"/>
               </a:rPr>
-              <a:t>Lage: </a:t>
-            </a:r>
-            <a:r>
-              <a:rPr sz="1300" b="0" i="0">
-                <a:solidFill>
-                  <a:srgbClr val="9AA8BA"/>
-                </a:solidFill>
-                <a:latin typeface="Helvetica Neue"/>
-              </a:rPr>
-              <a:t>Die Inseln liegen genau im warmen Entstehungsgebiet und auf den Zugbahnen — Jahr für Jahr, Juni bis November.</a:t>
-            </a:r>
-          </a:p>
-        </p:txBody>
-      </p:sp>
-      <p:sp>
-        <p:nvSpPr>
-          <p:cNvPr id="7" name="Rounded Rectangle 6"/>
+              <a:t>Wärmere Ozeane liefern mehr Wasserdampf — der Anteil besonders starker Stürme (Kat. 4–5) steigt.</a:t>
+            </a:r>
+          </a:p>
+        </p:txBody>
+      </p:sp>
+      <p:sp>
+        <p:nvSpPr>
+          <p:cNvPr id="6" name="Rounded Rectangle 5"/>
           <p:cNvSpPr/>
           <p:nvPr/>
         </p:nvSpPr>
         <p:spPr>
           <a:xfrm>
-            <a:off x="4370832" y="2651760"/>
-            <a:ext cx="3456432" cy="2148840"/>
+            <a:off x="4370832" y="1920240"/>
+            <a:ext cx="3456432" cy="2286000"/>
           </a:xfrm>
           <a:prstGeom prst="roundRect">
             <a:avLst>
@@ -6380,14 +6693,14 @@
       </p:sp>
       <p:sp>
         <p:nvSpPr>
-          <p:cNvPr id="8" name="TextBox 7"/>
+          <p:cNvPr id="7" name="TextBox 6"/>
           <p:cNvSpPr txBox="1"/>
           <p:nvPr/>
         </p:nvSpPr>
         <p:spPr>
           <a:xfrm>
-            <a:off x="4626864" y="2834640"/>
-            <a:ext cx="2971800" cy="1828800"/>
+            <a:off x="4626864" y="2121408"/>
+            <a:ext cx="2971800" cy="1920240"/>
           </a:xfrm>
           <a:prstGeom prst="rect">
             <a:avLst/>
@@ -6405,17 +6718,36 @@
                 <a:spcPts val="0"/>
               </a:spcBef>
               <a:spcAft>
-                <a:spcPts val="500"/>
-              </a:spcAft>
-            </a:pPr>
-            <a:r>
-              <a:rPr sz="1000" b="0" i="0" spc="250">
-                <a:solidFill>
-                  <a:srgbClr val="62C8DE"/>
-                </a:solidFill>
-                <a:latin typeface="Menlo"/>
-              </a:rPr>
-              <a:t>GRUND 02</a:t>
+                <a:spcPts val="200"/>
+              </a:spcAft>
+            </a:pPr>
+            <a:r>
+              <a:rPr sz="3000" b="1" i="0">
+                <a:solidFill>
+                  <a:srgbClr val="F5AE4B"/>
+                </a:solidFill>
+                <a:latin typeface="Helvetica Neue"/>
+              </a:rPr>
+              <a:t>↑</a:t>
+            </a:r>
+          </a:p>
+          <a:p>
+            <a:pPr algn="l">
+              <a:spcBef>
+                <a:spcPts val="0"/>
+              </a:spcBef>
+              <a:spcAft>
+                <a:spcPts val="400"/>
+              </a:spcAft>
+            </a:pPr>
+            <a:r>
+              <a:rPr sz="1800" b="1" i="0">
+                <a:solidFill>
+                  <a:srgbClr val="E8EEF5"/>
+                </a:solidFill>
+                <a:latin typeface="Avenir Next Condensed"/>
+              </a:rPr>
+              <a:t>MEHR REGEN</a:t>
             </a:r>
           </a:p>
           <a:p>
@@ -6431,36 +6763,27 @@
               </a:spcAft>
             </a:pPr>
             <a:r>
-              <a:rPr sz="1300" b="1" i="0">
-                <a:solidFill>
-                  <a:srgbClr val="E8EEF5"/>
+              <a:rPr sz="1250" b="0" i="0">
+                <a:solidFill>
+                  <a:srgbClr val="9AA8BA"/>
                 </a:solidFill>
                 <a:latin typeface="Helvetica Neue"/>
               </a:rPr>
-              <a:t>Verwundbarkeit: </a:t>
-            </a:r>
-            <a:r>
-              <a:rPr sz="1300" b="0" i="0">
-                <a:solidFill>
-                  <a:srgbClr val="9AA8BA"/>
-                </a:solidFill>
-                <a:latin typeface="Helvetica Neue"/>
-              </a:rPr>
-              <a:t>Küstennahe Siedlungen, schwache Bausubstanz und fehlende Warnsysteme machen aus der Naturgefahr eine Katastrophe.</a:t>
-            </a:r>
-          </a:p>
-        </p:txBody>
-      </p:sp>
-      <p:sp>
-        <p:nvSpPr>
-          <p:cNvPr id="9" name="Rounded Rectangle 8"/>
+              <a:t>Wärmere Luft speichert mehr Feuchtigkeit: heftigerer Starkregen — und Stürme ziehen teils langsamer, wie Dorian.</a:t>
+            </a:r>
+          </a:p>
+        </p:txBody>
+      </p:sp>
+      <p:sp>
+        <p:nvSpPr>
+          <p:cNvPr id="8" name="Rounded Rectangle 7"/>
           <p:cNvSpPr/>
           <p:nvPr/>
         </p:nvSpPr>
         <p:spPr>
           <a:xfrm>
-            <a:off x="8055864" y="2651760"/>
-            <a:ext cx="3456432" cy="2148840"/>
+            <a:off x="8055864" y="1920240"/>
+            <a:ext cx="3456432" cy="2286000"/>
           </a:xfrm>
           <a:prstGeom prst="roundRect">
             <a:avLst>
@@ -6501,14 +6824,14 @@
       </p:sp>
       <p:sp>
         <p:nvSpPr>
-          <p:cNvPr id="10" name="TextBox 9"/>
+          <p:cNvPr id="9" name="TextBox 8"/>
           <p:cNvSpPr txBox="1"/>
           <p:nvPr/>
         </p:nvSpPr>
         <p:spPr>
           <a:xfrm>
-            <a:off x="8311896" y="2834640"/>
-            <a:ext cx="2971800" cy="1828800"/>
+            <a:off x="8311896" y="2121408"/>
+            <a:ext cx="2971800" cy="1920240"/>
           </a:xfrm>
           <a:prstGeom prst="rect">
             <a:avLst/>
@@ -6526,17 +6849,36 @@
                 <a:spcPts val="0"/>
               </a:spcBef>
               <a:spcAft>
-                <a:spcPts val="500"/>
-              </a:spcAft>
-            </a:pPr>
-            <a:r>
-              <a:rPr sz="1000" b="0" i="0" spc="250">
-                <a:solidFill>
-                  <a:srgbClr val="62C8DE"/>
-                </a:solidFill>
-                <a:latin typeface="Menlo"/>
-              </a:rPr>
-              <a:t>GRUND 03</a:t>
+                <a:spcPts val="200"/>
+              </a:spcAft>
+            </a:pPr>
+            <a:r>
+              <a:rPr sz="3000" b="1" i="0">
+                <a:solidFill>
+                  <a:srgbClr val="F5AE4B"/>
+                </a:solidFill>
+                <a:latin typeface="Helvetica Neue"/>
+              </a:rPr>
+              <a:t>↑</a:t>
+            </a:r>
+          </a:p>
+          <a:p>
+            <a:pPr algn="l">
+              <a:spcBef>
+                <a:spcPts val="0"/>
+              </a:spcBef>
+              <a:spcAft>
+                <a:spcPts val="400"/>
+              </a:spcAft>
+            </a:pPr>
+            <a:r>
+              <a:rPr sz="1800" b="1" i="0">
+                <a:solidFill>
+                  <a:srgbClr val="E8EEF5"/>
+                </a:solidFill>
+                <a:latin typeface="Avenir Next Condensed"/>
+              </a:rPr>
+              <a:t>HÖHERE FLUTEN</a:t>
             </a:r>
           </a:p>
           <a:p>
@@ -6552,36 +6894,27 @@
               </a:spcAft>
             </a:pPr>
             <a:r>
-              <a:rPr sz="1300" b="1" i="0">
-                <a:solidFill>
-                  <a:srgbClr val="E8EEF5"/>
+              <a:rPr sz="1250" b="0" i="0">
+                <a:solidFill>
+                  <a:srgbClr val="9AA8BA"/>
                 </a:solidFill>
                 <a:latin typeface="Helvetica Neue"/>
               </a:rPr>
-              <a:t>Zukunft: </a:t>
-            </a:r>
-            <a:r>
-              <a:rPr sz="1300" b="0" i="0">
-                <a:solidFill>
-                  <a:srgbClr val="9AA8BA"/>
-                </a:solidFill>
-                <a:latin typeface="Helvetica Neue"/>
-              </a:rPr>
-              <a:t>Der Klimawandel liefert den Stürmen mehr Energie — die Risiken wachsen weiter.</a:t>
-            </a:r>
-          </a:p>
-        </p:txBody>
-      </p:sp>
-      <p:sp>
-        <p:nvSpPr>
-          <p:cNvPr id="11" name="TextBox 10"/>
+              <a:t>Der steigende Meeresspiegel macht jede Sturmflut gefährlicher — besonders für flache Inselstaaten.</a:t>
+            </a:r>
+          </a:p>
+        </p:txBody>
+      </p:sp>
+      <p:sp>
+        <p:nvSpPr>
+          <p:cNvPr id="10" name="TextBox 9"/>
           <p:cNvSpPr txBox="1"/>
           <p:nvPr/>
         </p:nvSpPr>
         <p:spPr>
           <a:xfrm>
-            <a:off x="1371600" y="5257800"/>
-            <a:ext cx="9445752" cy="1188720"/>
+            <a:off x="685800" y="4663440"/>
+            <a:ext cx="10881360" cy="1188720"/>
           </a:xfrm>
           <a:prstGeom prst="rect">
             <a:avLst/>
@@ -6594,41 +6927,76 @@
           </a:bodyPr>
           <a:lstStyle/>
           <a:p>
-            <a:pPr algn="ctr">
-              <a:spcBef>
-                <a:spcPts val="0"/>
-              </a:spcBef>
-              <a:spcAft>
-                <a:spcPts val="400"/>
-              </a:spcAft>
-            </a:pPr>
-            <a:r>
-              <a:rPr sz="1300" b="0" i="0" spc="350">
+            <a:pPr algn="l">
+              <a:lnSpc>
+                <a:spcPct val="125000"/>
+              </a:lnSpc>
+              <a:spcBef>
+                <a:spcPts val="0"/>
+              </a:spcBef>
+              <a:spcAft>
+                <a:spcPts val="600"/>
+              </a:spcAft>
+            </a:pPr>
+            <a:r>
+              <a:rPr sz="1500" b="1" i="0">
+                <a:solidFill>
+                  <a:srgbClr val="E8EEF5"/>
+                </a:solidFill>
+                <a:latin typeface="Helvetica Neue"/>
+              </a:rPr>
+              <a:t>Und Europa?  </a:t>
+            </a:r>
+            <a:r>
+              <a:rPr sz="1500" b="0" i="0">
+                <a:solidFill>
+                  <a:srgbClr val="9AA8BA"/>
+                </a:solidFill>
+                <a:latin typeface="Helvetica Neue"/>
+              </a:rPr>
+              <a:t>Echte Hurrikans bleiben die Ausnahme — aber Ex-Hurrikane wie „Ophelia“ (2017) erreichten Irland, und im Mittelmeer treten hurrikanähnliche Stürme auf: sogenannte „Medicanes“. Mit wärmeren Meeren könnte das häufiger werden.</a:t>
+            </a:r>
+          </a:p>
+        </p:txBody>
+      </p:sp>
+      <p:sp>
+        <p:nvSpPr>
+          <p:cNvPr id="11" name="TextBox 10"/>
+          <p:cNvSpPr txBox="1"/>
+          <p:nvPr/>
+        </p:nvSpPr>
+        <p:spPr>
+          <a:xfrm>
+            <a:off x="685800" y="6035040"/>
+            <a:ext cx="7315200" cy="365760"/>
+          </a:xfrm>
+          <a:prstGeom prst="rect">
+            <a:avLst/>
+          </a:prstGeom>
+          <a:noFill/>
+        </p:spPr>
+        <p:txBody>
+          <a:bodyPr wrap="square" anchor="t">
+            <a:spAutoFit/>
+          </a:bodyPr>
+          <a:lstStyle/>
+          <a:p>
+            <a:pPr algn="l">
+              <a:spcBef>
+                <a:spcPts val="0"/>
+              </a:spcBef>
+              <a:spcAft>
+                <a:spcPts val="600"/>
+              </a:spcAft>
+            </a:pPr>
+            <a:r>
+              <a:rPr sz="900" b="0" i="0" spc="150">
                 <a:solidFill>
                   <a:srgbClr val="6E7D90"/>
                 </a:solidFill>
                 <a:latin typeface="Menlo"/>
               </a:rPr>
-              <a:t>DANKE FÜRS ZUSCHAUEN</a:t>
-            </a:r>
-          </a:p>
-          <a:p>
-            <a:pPr algn="ctr">
-              <a:spcBef>
-                <a:spcPts val="0"/>
-              </a:spcBef>
-              <a:spcAft>
-                <a:spcPts val="600"/>
-              </a:spcAft>
-            </a:pPr>
-            <a:r>
-              <a:rPr sz="1100" b="0" i="0" spc="250">
-                <a:solidFill>
-                  <a:srgbClr val="9AA8BA"/>
-                </a:solidFill>
-                <a:latin typeface="Menlo"/>
-              </a:rPr>
-              <a:t>EINE PRÄSENTATION VON · NAME 1 · NAME 2 · NAME 3</a:t>
+              <a:t>RECHERCHE: IPCC / NOAA · AUFGABE 6, S. 112</a:t>
             </a:r>
           </a:p>
         </p:txBody>
@@ -6659,6 +7027,583 @@
         <p:nvPr/>
       </p:nvGrpSpPr>
       <p:grpSpPr/>
+      <p:pic>
+        <p:nvPicPr>
+          <p:cNvPr id="2" name="Picture 1" descr="storm_hero.jpg"/>
+          <p:cNvPicPr>
+            <a:picLocks noChangeAspect="1"/>
+          </p:cNvPicPr>
+          <p:nvPr/>
+        </p:nvPicPr>
+        <p:blipFill>
+          <a:blip r:embed="rId2"/>
+          <a:stretch>
+            <a:fillRect/>
+          </a:stretch>
+        </p:blipFill>
+        <p:spPr>
+          <a:xfrm>
+            <a:off x="0" y="0"/>
+            <a:ext cx="12191695" cy="6858000"/>
+          </a:xfrm>
+          <a:prstGeom prst="rect">
+            <a:avLst/>
+          </a:prstGeom>
+        </p:spPr>
+      </p:pic>
+      <p:sp>
+        <p:nvSpPr>
+          <p:cNvPr id="3" name="TextBox 2"/>
+          <p:cNvSpPr txBox="1"/>
+          <p:nvPr/>
+        </p:nvSpPr>
+        <p:spPr>
+          <a:xfrm>
+            <a:off x="685800" y="640080"/>
+            <a:ext cx="10817352" cy="365760"/>
+          </a:xfrm>
+          <a:prstGeom prst="rect">
+            <a:avLst/>
+          </a:prstGeom>
+          <a:noFill/>
+        </p:spPr>
+        <p:txBody>
+          <a:bodyPr wrap="square" anchor="t">
+            <a:spAutoFit/>
+          </a:bodyPr>
+          <a:lstStyle/>
+          <a:p>
+            <a:pPr algn="ctr">
+              <a:spcBef>
+                <a:spcPts val="0"/>
+              </a:spcBef>
+              <a:spcAft>
+                <a:spcPts val="600"/>
+              </a:spcAft>
+            </a:pPr>
+            <a:r>
+              <a:rPr sz="1200" b="0" i="0" spc="300">
+                <a:solidFill>
+                  <a:srgbClr val="62C8DE"/>
+                </a:solidFill>
+                <a:latin typeface="Menlo"/>
+              </a:rPr>
+              <a:t>KAPITEL 11 · FAZIT</a:t>
+            </a:r>
+          </a:p>
+        </p:txBody>
+      </p:sp>
+      <p:sp>
+        <p:nvSpPr>
+          <p:cNvPr id="4" name="TextBox 3"/>
+          <p:cNvSpPr txBox="1"/>
+          <p:nvPr/>
+        </p:nvSpPr>
+        <p:spPr>
+          <a:xfrm>
+            <a:off x="658368" y="1051560"/>
+            <a:ext cx="10881360" cy="1188720"/>
+          </a:xfrm>
+          <a:prstGeom prst="rect">
+            <a:avLst/>
+          </a:prstGeom>
+          <a:noFill/>
+        </p:spPr>
+        <p:txBody>
+          <a:bodyPr wrap="square" anchor="t">
+            <a:spAutoFit/>
+          </a:bodyPr>
+          <a:lstStyle/>
+          <a:p>
+            <a:pPr algn="ctr">
+              <a:spcBef>
+                <a:spcPts val="0"/>
+              </a:spcBef>
+              <a:spcAft>
+                <a:spcPts val="600"/>
+              </a:spcAft>
+            </a:pPr>
+            <a:r>
+              <a:rPr sz="5400" b="1" i="0">
+                <a:solidFill>
+                  <a:srgbClr val="E8EEF5"/>
+                </a:solidFill>
+                <a:latin typeface="Avenir Next Condensed"/>
+              </a:rPr>
+              <a:t>DARUM DIE KARIBIK</a:t>
+            </a:r>
+          </a:p>
+        </p:txBody>
+      </p:sp>
+      <p:sp>
+        <p:nvSpPr>
+          <p:cNvPr id="5" name="Rounded Rectangle 4"/>
+          <p:cNvSpPr/>
+          <p:nvPr/>
+        </p:nvSpPr>
+        <p:spPr>
+          <a:xfrm>
+            <a:off x="685800" y="2651760"/>
+            <a:ext cx="3456432" cy="2148840"/>
+          </a:xfrm>
+          <a:prstGeom prst="roundRect">
+            <a:avLst>
+              <a:gd name="adj" fmla="val 4500"/>
+            </a:avLst>
+          </a:prstGeom>
+          <a:solidFill>
+            <a:srgbClr val="111A27"/>
+          </a:solidFill>
+          <a:ln w="9525">
+            <a:solidFill>
+              <a:srgbClr val="2A3648"/>
+            </a:solidFill>
+          </a:ln>
+          <a:effectLst/>
+        </p:spPr>
+        <p:style>
+          <a:lnRef idx="1">
+            <a:schemeClr val="accent1"/>
+          </a:lnRef>
+          <a:fillRef idx="3">
+            <a:schemeClr val="accent1"/>
+          </a:fillRef>
+          <a:effectRef idx="2">
+            <a:schemeClr val="accent1"/>
+          </a:effectRef>
+          <a:fontRef idx="minor">
+            <a:schemeClr val="lt1"/>
+          </a:fontRef>
+        </p:style>
+        <p:txBody>
+          <a:bodyPr rtlCol="0" anchor="ctr"/>
+          <a:lstStyle/>
+          <a:p>
+            <a:pPr algn="ctr"/>
+          </a:p>
+        </p:txBody>
+      </p:sp>
+      <p:sp>
+        <p:nvSpPr>
+          <p:cNvPr id="6" name="TextBox 5"/>
+          <p:cNvSpPr txBox="1"/>
+          <p:nvPr/>
+        </p:nvSpPr>
+        <p:spPr>
+          <a:xfrm>
+            <a:off x="941832" y="2834640"/>
+            <a:ext cx="2971800" cy="1828800"/>
+          </a:xfrm>
+          <a:prstGeom prst="rect">
+            <a:avLst/>
+          </a:prstGeom>
+          <a:noFill/>
+        </p:spPr>
+        <p:txBody>
+          <a:bodyPr wrap="square" anchor="t">
+            <a:spAutoFit/>
+          </a:bodyPr>
+          <a:lstStyle/>
+          <a:p>
+            <a:pPr algn="l">
+              <a:spcBef>
+                <a:spcPts val="0"/>
+              </a:spcBef>
+              <a:spcAft>
+                <a:spcPts val="500"/>
+              </a:spcAft>
+            </a:pPr>
+            <a:r>
+              <a:rPr sz="1000" b="0" i="0" spc="250">
+                <a:solidFill>
+                  <a:srgbClr val="62C8DE"/>
+                </a:solidFill>
+                <a:latin typeface="Menlo"/>
+              </a:rPr>
+              <a:t>GRUND 01</a:t>
+            </a:r>
+          </a:p>
+          <a:p>
+            <a:pPr algn="l">
+              <a:lnSpc>
+                <a:spcPct val="115000"/>
+              </a:lnSpc>
+              <a:spcBef>
+                <a:spcPts val="0"/>
+              </a:spcBef>
+              <a:spcAft>
+                <a:spcPts val="600"/>
+              </a:spcAft>
+            </a:pPr>
+            <a:r>
+              <a:rPr sz="1300" b="1" i="0">
+                <a:solidFill>
+                  <a:srgbClr val="E8EEF5"/>
+                </a:solidFill>
+                <a:latin typeface="Helvetica Neue"/>
+              </a:rPr>
+              <a:t>Lage: </a:t>
+            </a:r>
+            <a:r>
+              <a:rPr sz="1300" b="0" i="0">
+                <a:solidFill>
+                  <a:srgbClr val="9AA8BA"/>
+                </a:solidFill>
+                <a:latin typeface="Helvetica Neue"/>
+              </a:rPr>
+              <a:t>Die Inseln liegen genau im warmen Entstehungsgebiet und auf den Zugbahnen — Jahr für Jahr, Juni bis November.</a:t>
+            </a:r>
+          </a:p>
+        </p:txBody>
+      </p:sp>
+      <p:sp>
+        <p:nvSpPr>
+          <p:cNvPr id="7" name="Rounded Rectangle 6"/>
+          <p:cNvSpPr/>
+          <p:nvPr/>
+        </p:nvSpPr>
+        <p:spPr>
+          <a:xfrm>
+            <a:off x="4370832" y="2651760"/>
+            <a:ext cx="3456432" cy="2148840"/>
+          </a:xfrm>
+          <a:prstGeom prst="roundRect">
+            <a:avLst>
+              <a:gd name="adj" fmla="val 4500"/>
+            </a:avLst>
+          </a:prstGeom>
+          <a:solidFill>
+            <a:srgbClr val="111A27"/>
+          </a:solidFill>
+          <a:ln w="9525">
+            <a:solidFill>
+              <a:srgbClr val="2A3648"/>
+            </a:solidFill>
+          </a:ln>
+          <a:effectLst/>
+        </p:spPr>
+        <p:style>
+          <a:lnRef idx="1">
+            <a:schemeClr val="accent1"/>
+          </a:lnRef>
+          <a:fillRef idx="3">
+            <a:schemeClr val="accent1"/>
+          </a:fillRef>
+          <a:effectRef idx="2">
+            <a:schemeClr val="accent1"/>
+          </a:effectRef>
+          <a:fontRef idx="minor">
+            <a:schemeClr val="lt1"/>
+          </a:fontRef>
+        </p:style>
+        <p:txBody>
+          <a:bodyPr rtlCol="0" anchor="ctr"/>
+          <a:lstStyle/>
+          <a:p>
+            <a:pPr algn="ctr"/>
+          </a:p>
+        </p:txBody>
+      </p:sp>
+      <p:sp>
+        <p:nvSpPr>
+          <p:cNvPr id="8" name="TextBox 7"/>
+          <p:cNvSpPr txBox="1"/>
+          <p:nvPr/>
+        </p:nvSpPr>
+        <p:spPr>
+          <a:xfrm>
+            <a:off x="4626864" y="2834640"/>
+            <a:ext cx="2971800" cy="1828800"/>
+          </a:xfrm>
+          <a:prstGeom prst="rect">
+            <a:avLst/>
+          </a:prstGeom>
+          <a:noFill/>
+        </p:spPr>
+        <p:txBody>
+          <a:bodyPr wrap="square" anchor="t">
+            <a:spAutoFit/>
+          </a:bodyPr>
+          <a:lstStyle/>
+          <a:p>
+            <a:pPr algn="l">
+              <a:spcBef>
+                <a:spcPts val="0"/>
+              </a:spcBef>
+              <a:spcAft>
+                <a:spcPts val="500"/>
+              </a:spcAft>
+            </a:pPr>
+            <a:r>
+              <a:rPr sz="1000" b="0" i="0" spc="250">
+                <a:solidFill>
+                  <a:srgbClr val="62C8DE"/>
+                </a:solidFill>
+                <a:latin typeface="Menlo"/>
+              </a:rPr>
+              <a:t>GRUND 02</a:t>
+            </a:r>
+          </a:p>
+          <a:p>
+            <a:pPr algn="l">
+              <a:lnSpc>
+                <a:spcPct val="115000"/>
+              </a:lnSpc>
+              <a:spcBef>
+                <a:spcPts val="0"/>
+              </a:spcBef>
+              <a:spcAft>
+                <a:spcPts val="600"/>
+              </a:spcAft>
+            </a:pPr>
+            <a:r>
+              <a:rPr sz="1300" b="1" i="0">
+                <a:solidFill>
+                  <a:srgbClr val="E8EEF5"/>
+                </a:solidFill>
+                <a:latin typeface="Helvetica Neue"/>
+              </a:rPr>
+              <a:t>Verwundbarkeit: </a:t>
+            </a:r>
+            <a:r>
+              <a:rPr sz="1300" b="0" i="0">
+                <a:solidFill>
+                  <a:srgbClr val="9AA8BA"/>
+                </a:solidFill>
+                <a:latin typeface="Helvetica Neue"/>
+              </a:rPr>
+              <a:t>Küstennahe Siedlungen, schwache Bausubstanz und fehlende Warnsysteme machen aus der Naturgefahr eine Katastrophe.</a:t>
+            </a:r>
+          </a:p>
+        </p:txBody>
+      </p:sp>
+      <p:sp>
+        <p:nvSpPr>
+          <p:cNvPr id="9" name="Rounded Rectangle 8"/>
+          <p:cNvSpPr/>
+          <p:nvPr/>
+        </p:nvSpPr>
+        <p:spPr>
+          <a:xfrm>
+            <a:off x="8055864" y="2651760"/>
+            <a:ext cx="3456432" cy="2148840"/>
+          </a:xfrm>
+          <a:prstGeom prst="roundRect">
+            <a:avLst>
+              <a:gd name="adj" fmla="val 4500"/>
+            </a:avLst>
+          </a:prstGeom>
+          <a:solidFill>
+            <a:srgbClr val="111A27"/>
+          </a:solidFill>
+          <a:ln w="9525">
+            <a:solidFill>
+              <a:srgbClr val="2A3648"/>
+            </a:solidFill>
+          </a:ln>
+          <a:effectLst/>
+        </p:spPr>
+        <p:style>
+          <a:lnRef idx="1">
+            <a:schemeClr val="accent1"/>
+          </a:lnRef>
+          <a:fillRef idx="3">
+            <a:schemeClr val="accent1"/>
+          </a:fillRef>
+          <a:effectRef idx="2">
+            <a:schemeClr val="accent1"/>
+          </a:effectRef>
+          <a:fontRef idx="minor">
+            <a:schemeClr val="lt1"/>
+          </a:fontRef>
+        </p:style>
+        <p:txBody>
+          <a:bodyPr rtlCol="0" anchor="ctr"/>
+          <a:lstStyle/>
+          <a:p>
+            <a:pPr algn="ctr"/>
+          </a:p>
+        </p:txBody>
+      </p:sp>
+      <p:sp>
+        <p:nvSpPr>
+          <p:cNvPr id="10" name="TextBox 9"/>
+          <p:cNvSpPr txBox="1"/>
+          <p:nvPr/>
+        </p:nvSpPr>
+        <p:spPr>
+          <a:xfrm>
+            <a:off x="8311896" y="2834640"/>
+            <a:ext cx="2971800" cy="1828800"/>
+          </a:xfrm>
+          <a:prstGeom prst="rect">
+            <a:avLst/>
+          </a:prstGeom>
+          <a:noFill/>
+        </p:spPr>
+        <p:txBody>
+          <a:bodyPr wrap="square" anchor="t">
+            <a:spAutoFit/>
+          </a:bodyPr>
+          <a:lstStyle/>
+          <a:p>
+            <a:pPr algn="l">
+              <a:spcBef>
+                <a:spcPts val="0"/>
+              </a:spcBef>
+              <a:spcAft>
+                <a:spcPts val="500"/>
+              </a:spcAft>
+            </a:pPr>
+            <a:r>
+              <a:rPr sz="1000" b="0" i="0" spc="250">
+                <a:solidFill>
+                  <a:srgbClr val="62C8DE"/>
+                </a:solidFill>
+                <a:latin typeface="Menlo"/>
+              </a:rPr>
+              <a:t>GRUND 03</a:t>
+            </a:r>
+          </a:p>
+          <a:p>
+            <a:pPr algn="l">
+              <a:lnSpc>
+                <a:spcPct val="115000"/>
+              </a:lnSpc>
+              <a:spcBef>
+                <a:spcPts val="0"/>
+              </a:spcBef>
+              <a:spcAft>
+                <a:spcPts val="600"/>
+              </a:spcAft>
+            </a:pPr>
+            <a:r>
+              <a:rPr sz="1300" b="1" i="0">
+                <a:solidFill>
+                  <a:srgbClr val="E8EEF5"/>
+                </a:solidFill>
+                <a:latin typeface="Helvetica Neue"/>
+              </a:rPr>
+              <a:t>Zukunft: </a:t>
+            </a:r>
+            <a:r>
+              <a:rPr sz="1300" b="0" i="0">
+                <a:solidFill>
+                  <a:srgbClr val="9AA8BA"/>
+                </a:solidFill>
+                <a:latin typeface="Helvetica Neue"/>
+              </a:rPr>
+              <a:t>Der Klimawandel liefert den Stürmen mehr Energie — die Risiken wachsen weiter.</a:t>
+            </a:r>
+          </a:p>
+        </p:txBody>
+      </p:sp>
+      <p:sp>
+        <p:nvSpPr>
+          <p:cNvPr id="11" name="TextBox 10"/>
+          <p:cNvSpPr txBox="1"/>
+          <p:nvPr/>
+        </p:nvSpPr>
+        <p:spPr>
+          <a:xfrm>
+            <a:off x="1371600" y="5257800"/>
+            <a:ext cx="9445752" cy="1188720"/>
+          </a:xfrm>
+          <a:prstGeom prst="rect">
+            <a:avLst/>
+          </a:prstGeom>
+          <a:noFill/>
+        </p:spPr>
+        <p:txBody>
+          <a:bodyPr wrap="square" anchor="t">
+            <a:spAutoFit/>
+          </a:bodyPr>
+          <a:lstStyle/>
+          <a:p>
+            <a:pPr algn="ctr">
+              <a:spcBef>
+                <a:spcPts val="0"/>
+              </a:spcBef>
+              <a:spcAft>
+                <a:spcPts val="400"/>
+              </a:spcAft>
+            </a:pPr>
+            <a:r>
+              <a:rPr sz="1300" b="0" i="0" spc="350">
+                <a:solidFill>
+                  <a:srgbClr val="6E7D90"/>
+                </a:solidFill>
+                <a:latin typeface="Menlo"/>
+              </a:rPr>
+              <a:t>DANKE FÜRS ZUSCHAUEN</a:t>
+            </a:r>
+          </a:p>
+          <a:p>
+            <a:pPr algn="ctr">
+              <a:spcBef>
+                <a:spcPts val="0"/>
+              </a:spcBef>
+              <a:spcAft>
+                <a:spcPts val="300"/>
+              </a:spcAft>
+            </a:pPr>
+            <a:r>
+              <a:rPr sz="1100" b="0" i="0" spc="250">
+                <a:solidFill>
+                  <a:srgbClr val="9AA8BA"/>
+                </a:solidFill>
+                <a:latin typeface="Menlo"/>
+              </a:rPr>
+              <a:t>EINE PRÄSENTATION VON MAXI · MORITZ · LINUS</a:t>
+            </a:r>
+          </a:p>
+          <a:p>
+            <a:pPr algn="ctr">
+              <a:spcBef>
+                <a:spcPts val="0"/>
+              </a:spcBef>
+              <a:spcAft>
+                <a:spcPts val="600"/>
+              </a:spcAft>
+            </a:pPr>
+            <a:r>
+              <a:rPr sz="950" b="0" i="0" spc="200">
+                <a:solidFill>
+                  <a:srgbClr val="6E7D90"/>
+                </a:solidFill>
+                <a:latin typeface="Menlo"/>
+              </a:rPr>
+              <a:t>KLASSE 10D · GEOGRAPHIE BEI HERRN MAYR · GYMNASIUM GRÜNWALD</a:t>
+            </a:r>
+          </a:p>
+        </p:txBody>
+      </p:sp>
+    </p:spTree>
+  </p:cSld>
+  <p:clrMapOvr>
+    <a:masterClrMapping/>
+  </p:clrMapOvr>
+</p:sld>
+</file>
+
+<file path=ppt/slides/slide14.xml><?xml version="1.0" encoding="utf-8"?>
+<p:sld xmlns:a="http://schemas.openxmlformats.org/drawingml/2006/main" xmlns:p="http://schemas.openxmlformats.org/presentationml/2006/main" xmlns:r="http://schemas.openxmlformats.org/officeDocument/2006/relationships">
+  <p:cSld>
+    <p:bg>
+      <p:bgPr>
+        <a:solidFill>
+          <a:srgbClr val="0B1119"/>
+        </a:solidFill>
+        <a:effectLst/>
+      </p:bgPr>
+    </p:bg>
+    <p:spTree>
+      <p:nvGrpSpPr>
+        <p:cNvPr id="1" name=""/>
+        <p:cNvGrpSpPr/>
+        <p:nvPr/>
+      </p:nvGrpSpPr>
+      <p:grpSpPr/>
       <p:sp>
         <p:nvSpPr>
           <p:cNvPr id="2" name="TextBox 1"/>
@@ -10470,40 +11415,16 @@
         <p:nvPr/>
       </p:nvGrpSpPr>
       <p:grpSpPr/>
-      <p:pic>
-        <p:nvPicPr>
-          <p:cNvPr id="2" name="Picture 1" descr="m3_slide.jpg"/>
-          <p:cNvPicPr>
-            <a:picLocks noChangeAspect="1"/>
-          </p:cNvPicPr>
-          <p:nvPr/>
-        </p:nvPicPr>
-        <p:blipFill>
-          <a:blip r:embed="rId2"/>
-          <a:stretch>
-            <a:fillRect/>
-          </a:stretch>
-        </p:blipFill>
-        <p:spPr>
-          <a:xfrm>
-            <a:off x="0" y="0"/>
-            <a:ext cx="12191695" cy="6858000"/>
-          </a:xfrm>
-          <a:prstGeom prst="rect">
-            <a:avLst/>
-          </a:prstGeom>
-        </p:spPr>
-      </p:pic>
-      <p:sp>
-        <p:nvSpPr>
-          <p:cNvPr id="3" name="TextBox 2"/>
+      <p:sp>
+        <p:nvSpPr>
+          <p:cNvPr id="2" name="TextBox 1"/>
           <p:cNvSpPr txBox="1"/>
           <p:nvPr/>
         </p:nvSpPr>
         <p:spPr>
           <a:xfrm>
-            <a:off x="777240" y="3520440"/>
-            <a:ext cx="7315200" cy="365760"/>
+            <a:off x="685800" y="502920"/>
+            <a:ext cx="10789920" cy="365760"/>
           </a:xfrm>
           <a:prstGeom prst="rect">
             <a:avLst/>
@@ -10531,21 +11452,21 @@
                 </a:solidFill>
                 <a:latin typeface="Menlo"/>
               </a:rPr>
-              <a:t>KAPITEL 05 · FALLBEISPIEL</a:t>
-            </a:r>
-          </a:p>
-        </p:txBody>
-      </p:sp>
-      <p:sp>
-        <p:nvSpPr>
-          <p:cNvPr id="4" name="TextBox 3"/>
+              <a:t>KAPITEL 05 · DIE MESSLATTE</a:t>
+            </a:r>
+          </a:p>
+        </p:txBody>
+      </p:sp>
+      <p:sp>
+        <p:nvSpPr>
+          <p:cNvPr id="3" name="TextBox 2"/>
           <p:cNvSpPr txBox="1"/>
           <p:nvPr/>
         </p:nvSpPr>
         <p:spPr>
           <a:xfrm>
-            <a:off x="749808" y="3749039"/>
-            <a:ext cx="10881360" cy="1371600"/>
+            <a:off x="658368" y="868680"/>
+            <a:ext cx="10881360" cy="1463040"/>
           </a:xfrm>
           <a:prstGeom prst="rect">
             <a:avLst/>
@@ -10570,28 +11491,970 @@
               </a:spcAft>
             </a:pPr>
             <a:r>
-              <a:rPr sz="4000" b="1" i="0">
+              <a:rPr sz="4400" b="1" i="0">
                 <a:solidFill>
                   <a:srgbClr val="E8EEF5"/>
                 </a:solidFill>
                 <a:latin typeface="Avenir Next Condensed"/>
               </a:rPr>
-              <a:t>1. SEPTEMBER 2019 —
-DORIAN TRIFFT DIE BAHAMAS</a:t>
-            </a:r>
-          </a:p>
-        </p:txBody>
-      </p:sp>
-      <p:sp>
-        <p:nvSpPr>
-          <p:cNvPr id="5" name="Rounded Rectangle 4"/>
+              <a:t>WIE STARK IST ZU STARK?</a:t>
+            </a:r>
+          </a:p>
+        </p:txBody>
+      </p:sp>
+      <p:sp>
+        <p:nvSpPr>
+          <p:cNvPr id="4" name="TextBox 3"/>
+          <p:cNvSpPr txBox="1"/>
+          <p:nvPr/>
+        </p:nvSpPr>
+        <p:spPr>
+          <a:xfrm>
+            <a:off x="685800" y="1783080"/>
+            <a:ext cx="10515600" cy="640080"/>
+          </a:xfrm>
+          <a:prstGeom prst="rect">
+            <a:avLst/>
+          </a:prstGeom>
+          <a:noFill/>
+        </p:spPr>
+        <p:txBody>
+          <a:bodyPr wrap="square" anchor="t">
+            <a:spAutoFit/>
+          </a:bodyPr>
+          <a:lstStyle/>
+          <a:p>
+            <a:pPr algn="l">
+              <a:lnSpc>
+                <a:spcPct val="120000"/>
+              </a:lnSpc>
+              <a:spcBef>
+                <a:spcPts val="0"/>
+              </a:spcBef>
+              <a:spcAft>
+                <a:spcPts val="600"/>
+              </a:spcAft>
+            </a:pPr>
+            <a:r>
+              <a:rPr sz="1500" b="0" i="0">
+                <a:solidFill>
+                  <a:srgbClr val="9AA8BA"/>
+                </a:solidFill>
+                <a:latin typeface="Helvetica Neue"/>
+              </a:rPr>
+              <a:t>Die </a:t>
+            </a:r>
+            <a:r>
+              <a:rPr sz="1500" b="1" i="0">
+                <a:solidFill>
+                  <a:srgbClr val="E8EEF5"/>
+                </a:solidFill>
+                <a:latin typeface="Helvetica Neue"/>
+              </a:rPr>
+              <a:t>Saffir-Simpson-Skala</a:t>
+            </a:r>
+            <a:r>
+              <a:rPr sz="1500" b="0" i="0">
+                <a:solidFill>
+                  <a:srgbClr val="9AA8BA"/>
+                </a:solidFill>
+                <a:latin typeface="Helvetica Neue"/>
+              </a:rPr>
+              <a:t> teilt Hurrikane nach Windgeschwindigkeit in fünf Kategorien ein:</a:t>
+            </a:r>
+          </a:p>
+        </p:txBody>
+      </p:sp>
+      <p:sp>
+        <p:nvSpPr>
+          <p:cNvPr id="5" name="TextBox 4"/>
+          <p:cNvSpPr txBox="1"/>
+          <p:nvPr/>
+        </p:nvSpPr>
+        <p:spPr>
+          <a:xfrm>
+            <a:off x="685800" y="2560320"/>
+            <a:ext cx="1005840" cy="365760"/>
+          </a:xfrm>
+          <a:prstGeom prst="rect">
+            <a:avLst/>
+          </a:prstGeom>
+          <a:noFill/>
+        </p:spPr>
+        <p:txBody>
+          <a:bodyPr wrap="square" anchor="t">
+            <a:spAutoFit/>
+          </a:bodyPr>
+          <a:lstStyle/>
+          <a:p>
+            <a:pPr algn="l">
+              <a:spcBef>
+                <a:spcPts val="0"/>
+              </a:spcBef>
+              <a:spcAft>
+                <a:spcPts val="600"/>
+              </a:spcAft>
+            </a:pPr>
+            <a:r>
+              <a:rPr sz="1300" b="1" i="0">
+                <a:solidFill>
+                  <a:srgbClr val="F5D06E"/>
+                </a:solidFill>
+                <a:latin typeface="Menlo"/>
+              </a:rPr>
+              <a:t>KAT. 1</a:t>
+            </a:r>
+          </a:p>
+        </p:txBody>
+      </p:sp>
+      <p:sp>
+        <p:nvSpPr>
+          <p:cNvPr id="6" name="Rounded Rectangle 5"/>
           <p:cNvSpPr/>
           <p:nvPr/>
         </p:nvSpPr>
         <p:spPr>
           <a:xfrm>
-            <a:off x="777240" y="5806440"/>
-            <a:ext cx="1961388" cy="475488"/>
+            <a:off x="1783080" y="2514600"/>
+            <a:ext cx="6949440" cy="457200"/>
+          </a:xfrm>
+          <a:prstGeom prst="roundRect">
+            <a:avLst>
+              <a:gd name="adj" fmla="val 50000"/>
+            </a:avLst>
+          </a:prstGeom>
+          <a:solidFill>
+            <a:srgbClr val="131C29"/>
+          </a:solidFill>
+          <a:ln>
+            <a:noFill/>
+          </a:ln>
+          <a:effectLst/>
+        </p:spPr>
+        <p:style>
+          <a:lnRef idx="1">
+            <a:schemeClr val="accent1"/>
+          </a:lnRef>
+          <a:fillRef idx="3">
+            <a:schemeClr val="accent1"/>
+          </a:fillRef>
+          <a:effectRef idx="2">
+            <a:schemeClr val="accent1"/>
+          </a:effectRef>
+          <a:fontRef idx="minor">
+            <a:schemeClr val="lt1"/>
+          </a:fontRef>
+        </p:style>
+        <p:txBody>
+          <a:bodyPr rtlCol="0" anchor="ctr"/>
+          <a:lstStyle/>
+          <a:p>
+            <a:pPr algn="ctr"/>
+          </a:p>
+        </p:txBody>
+      </p:sp>
+      <p:sp>
+        <p:nvSpPr>
+          <p:cNvPr id="7" name="Rounded Rectangle 6"/>
+          <p:cNvSpPr/>
+          <p:nvPr/>
+        </p:nvSpPr>
+        <p:spPr>
+          <a:xfrm>
+            <a:off x="1783080" y="2514600"/>
+            <a:ext cx="3613708" cy="457200"/>
+          </a:xfrm>
+          <a:prstGeom prst="roundRect">
+            <a:avLst>
+              <a:gd name="adj" fmla="val 50000"/>
+            </a:avLst>
+          </a:prstGeom>
+          <a:solidFill>
+            <a:srgbClr val="F5D06E"/>
+          </a:solidFill>
+          <a:ln>
+            <a:noFill/>
+          </a:ln>
+          <a:effectLst/>
+        </p:spPr>
+        <p:style>
+          <a:lnRef idx="1">
+            <a:schemeClr val="accent1"/>
+          </a:lnRef>
+          <a:fillRef idx="3">
+            <a:schemeClr val="accent1"/>
+          </a:fillRef>
+          <a:effectRef idx="2">
+            <a:schemeClr val="accent1"/>
+          </a:effectRef>
+          <a:fontRef idx="minor">
+            <a:schemeClr val="lt1"/>
+          </a:fontRef>
+        </p:style>
+        <p:txBody>
+          <a:bodyPr rtlCol="0" anchor="ctr"/>
+          <a:lstStyle/>
+          <a:p>
+            <a:pPr algn="ctr"/>
+          </a:p>
+        </p:txBody>
+      </p:sp>
+      <p:sp>
+        <p:nvSpPr>
+          <p:cNvPr id="8" name="TextBox 7"/>
+          <p:cNvSpPr txBox="1"/>
+          <p:nvPr/>
+        </p:nvSpPr>
+        <p:spPr>
+          <a:xfrm>
+            <a:off x="8961119" y="2569464"/>
+            <a:ext cx="2194560" cy="365760"/>
+          </a:xfrm>
+          <a:prstGeom prst="rect">
+            <a:avLst/>
+          </a:prstGeom>
+          <a:noFill/>
+        </p:spPr>
+        <p:txBody>
+          <a:bodyPr wrap="square" anchor="t">
+            <a:spAutoFit/>
+          </a:bodyPr>
+          <a:lstStyle/>
+          <a:p>
+            <a:pPr algn="l">
+              <a:spcBef>
+                <a:spcPts val="0"/>
+              </a:spcBef>
+              <a:spcAft>
+                <a:spcPts val="600"/>
+              </a:spcAft>
+            </a:pPr>
+            <a:r>
+              <a:rPr sz="1150" b="0" i="0">
+                <a:solidFill>
+                  <a:srgbClr val="9AA8BA"/>
+                </a:solidFill>
+                <a:latin typeface="Menlo"/>
+              </a:rPr>
+              <a:t>119 – 153 km/h</a:t>
+            </a:r>
+          </a:p>
+        </p:txBody>
+      </p:sp>
+      <p:sp>
+        <p:nvSpPr>
+          <p:cNvPr id="9" name="TextBox 8"/>
+          <p:cNvSpPr txBox="1"/>
+          <p:nvPr/>
+        </p:nvSpPr>
+        <p:spPr>
+          <a:xfrm>
+            <a:off x="685800" y="3273552"/>
+            <a:ext cx="1005840" cy="365760"/>
+          </a:xfrm>
+          <a:prstGeom prst="rect">
+            <a:avLst/>
+          </a:prstGeom>
+          <a:noFill/>
+        </p:spPr>
+        <p:txBody>
+          <a:bodyPr wrap="square" anchor="t">
+            <a:spAutoFit/>
+          </a:bodyPr>
+          <a:lstStyle/>
+          <a:p>
+            <a:pPr algn="l">
+              <a:spcBef>
+                <a:spcPts val="0"/>
+              </a:spcBef>
+              <a:spcAft>
+                <a:spcPts val="600"/>
+              </a:spcAft>
+            </a:pPr>
+            <a:r>
+              <a:rPr sz="1300" b="1" i="0">
+                <a:solidFill>
+                  <a:srgbClr val="F5AE4B"/>
+                </a:solidFill>
+                <a:latin typeface="Menlo"/>
+              </a:rPr>
+              <a:t>KAT. 2</a:t>
+            </a:r>
+          </a:p>
+        </p:txBody>
+      </p:sp>
+      <p:sp>
+        <p:nvSpPr>
+          <p:cNvPr id="10" name="Rounded Rectangle 9"/>
+          <p:cNvSpPr/>
+          <p:nvPr/>
+        </p:nvSpPr>
+        <p:spPr>
+          <a:xfrm>
+            <a:off x="1783080" y="3227832"/>
+            <a:ext cx="6949440" cy="457200"/>
+          </a:xfrm>
+          <a:prstGeom prst="roundRect">
+            <a:avLst>
+              <a:gd name="adj" fmla="val 50000"/>
+            </a:avLst>
+          </a:prstGeom>
+          <a:solidFill>
+            <a:srgbClr val="131C29"/>
+          </a:solidFill>
+          <a:ln>
+            <a:noFill/>
+          </a:ln>
+          <a:effectLst/>
+        </p:spPr>
+        <p:style>
+          <a:lnRef idx="1">
+            <a:schemeClr val="accent1"/>
+          </a:lnRef>
+          <a:fillRef idx="3">
+            <a:schemeClr val="accent1"/>
+          </a:fillRef>
+          <a:effectRef idx="2">
+            <a:schemeClr val="accent1"/>
+          </a:effectRef>
+          <a:fontRef idx="minor">
+            <a:schemeClr val="lt1"/>
+          </a:fontRef>
+        </p:style>
+        <p:txBody>
+          <a:bodyPr rtlCol="0" anchor="ctr"/>
+          <a:lstStyle/>
+          <a:p>
+            <a:pPr algn="ctr"/>
+          </a:p>
+        </p:txBody>
+      </p:sp>
+      <p:sp>
+        <p:nvSpPr>
+          <p:cNvPr id="11" name="Rounded Rectangle 10"/>
+          <p:cNvSpPr/>
+          <p:nvPr/>
+        </p:nvSpPr>
+        <p:spPr>
+          <a:xfrm>
+            <a:off x="1783080" y="3227832"/>
+            <a:ext cx="4169663" cy="457200"/>
+          </a:xfrm>
+          <a:prstGeom prst="roundRect">
+            <a:avLst>
+              <a:gd name="adj" fmla="val 50000"/>
+            </a:avLst>
+          </a:prstGeom>
+          <a:solidFill>
+            <a:srgbClr val="F5AE4B"/>
+          </a:solidFill>
+          <a:ln>
+            <a:noFill/>
+          </a:ln>
+          <a:effectLst/>
+        </p:spPr>
+        <p:style>
+          <a:lnRef idx="1">
+            <a:schemeClr val="accent1"/>
+          </a:lnRef>
+          <a:fillRef idx="3">
+            <a:schemeClr val="accent1"/>
+          </a:fillRef>
+          <a:effectRef idx="2">
+            <a:schemeClr val="accent1"/>
+          </a:effectRef>
+          <a:fontRef idx="minor">
+            <a:schemeClr val="lt1"/>
+          </a:fontRef>
+        </p:style>
+        <p:txBody>
+          <a:bodyPr rtlCol="0" anchor="ctr"/>
+          <a:lstStyle/>
+          <a:p>
+            <a:pPr algn="ctr"/>
+          </a:p>
+        </p:txBody>
+      </p:sp>
+      <p:sp>
+        <p:nvSpPr>
+          <p:cNvPr id="12" name="TextBox 11"/>
+          <p:cNvSpPr txBox="1"/>
+          <p:nvPr/>
+        </p:nvSpPr>
+        <p:spPr>
+          <a:xfrm>
+            <a:off x="8961119" y="3282696"/>
+            <a:ext cx="2194560" cy="365760"/>
+          </a:xfrm>
+          <a:prstGeom prst="rect">
+            <a:avLst/>
+          </a:prstGeom>
+          <a:noFill/>
+        </p:spPr>
+        <p:txBody>
+          <a:bodyPr wrap="square" anchor="t">
+            <a:spAutoFit/>
+          </a:bodyPr>
+          <a:lstStyle/>
+          <a:p>
+            <a:pPr algn="l">
+              <a:spcBef>
+                <a:spcPts val="0"/>
+              </a:spcBef>
+              <a:spcAft>
+                <a:spcPts val="600"/>
+              </a:spcAft>
+            </a:pPr>
+            <a:r>
+              <a:rPr sz="1150" b="0" i="0">
+                <a:solidFill>
+                  <a:srgbClr val="9AA8BA"/>
+                </a:solidFill>
+                <a:latin typeface="Menlo"/>
+              </a:rPr>
+              <a:t>154 – 177 km/h</a:t>
+            </a:r>
+          </a:p>
+        </p:txBody>
+      </p:sp>
+      <p:sp>
+        <p:nvSpPr>
+          <p:cNvPr id="13" name="TextBox 12"/>
+          <p:cNvSpPr txBox="1"/>
+          <p:nvPr/>
+        </p:nvSpPr>
+        <p:spPr>
+          <a:xfrm>
+            <a:off x="685800" y="3986784"/>
+            <a:ext cx="1005840" cy="365760"/>
+          </a:xfrm>
+          <a:prstGeom prst="rect">
+            <a:avLst/>
+          </a:prstGeom>
+          <a:noFill/>
+        </p:spPr>
+        <p:txBody>
+          <a:bodyPr wrap="square" anchor="t">
+            <a:spAutoFit/>
+          </a:bodyPr>
+          <a:lstStyle/>
+          <a:p>
+            <a:pPr algn="l">
+              <a:spcBef>
+                <a:spcPts val="0"/>
+              </a:spcBef>
+              <a:spcAft>
+                <a:spcPts val="600"/>
+              </a:spcAft>
+            </a:pPr>
+            <a:r>
+              <a:rPr sz="1300" b="1" i="0">
+                <a:solidFill>
+                  <a:srgbClr val="F08138"/>
+                </a:solidFill>
+                <a:latin typeface="Menlo"/>
+              </a:rPr>
+              <a:t>KAT. 3</a:t>
+            </a:r>
+          </a:p>
+        </p:txBody>
+      </p:sp>
+      <p:sp>
+        <p:nvSpPr>
+          <p:cNvPr id="14" name="Rounded Rectangle 13"/>
+          <p:cNvSpPr/>
+          <p:nvPr/>
+        </p:nvSpPr>
+        <p:spPr>
+          <a:xfrm>
+            <a:off x="1783080" y="3941064"/>
+            <a:ext cx="6949440" cy="457200"/>
+          </a:xfrm>
+          <a:prstGeom prst="roundRect">
+            <a:avLst>
+              <a:gd name="adj" fmla="val 50000"/>
+            </a:avLst>
+          </a:prstGeom>
+          <a:solidFill>
+            <a:srgbClr val="131C29"/>
+          </a:solidFill>
+          <a:ln>
+            <a:noFill/>
+          </a:ln>
+          <a:effectLst/>
+        </p:spPr>
+        <p:style>
+          <a:lnRef idx="1">
+            <a:schemeClr val="accent1"/>
+          </a:lnRef>
+          <a:fillRef idx="3">
+            <a:schemeClr val="accent1"/>
+          </a:fillRef>
+          <a:effectRef idx="2">
+            <a:schemeClr val="accent1"/>
+          </a:effectRef>
+          <a:fontRef idx="minor">
+            <a:schemeClr val="lt1"/>
+          </a:fontRef>
+        </p:style>
+        <p:txBody>
+          <a:bodyPr rtlCol="0" anchor="ctr"/>
+          <a:lstStyle/>
+          <a:p>
+            <a:pPr algn="ctr"/>
+          </a:p>
+        </p:txBody>
+      </p:sp>
+      <p:sp>
+        <p:nvSpPr>
+          <p:cNvPr id="15" name="Rounded Rectangle 14"/>
+          <p:cNvSpPr/>
+          <p:nvPr/>
+        </p:nvSpPr>
+        <p:spPr>
+          <a:xfrm>
+            <a:off x="1783080" y="3941064"/>
+            <a:ext cx="4934102" cy="457200"/>
+          </a:xfrm>
+          <a:prstGeom prst="roundRect">
+            <a:avLst>
+              <a:gd name="adj" fmla="val 50000"/>
+            </a:avLst>
+          </a:prstGeom>
+          <a:solidFill>
+            <a:srgbClr val="F08138"/>
+          </a:solidFill>
+          <a:ln>
+            <a:noFill/>
+          </a:ln>
+          <a:effectLst/>
+        </p:spPr>
+        <p:style>
+          <a:lnRef idx="1">
+            <a:schemeClr val="accent1"/>
+          </a:lnRef>
+          <a:fillRef idx="3">
+            <a:schemeClr val="accent1"/>
+          </a:fillRef>
+          <a:effectRef idx="2">
+            <a:schemeClr val="accent1"/>
+          </a:effectRef>
+          <a:fontRef idx="minor">
+            <a:schemeClr val="lt1"/>
+          </a:fontRef>
+        </p:style>
+        <p:txBody>
+          <a:bodyPr rtlCol="0" anchor="ctr"/>
+          <a:lstStyle/>
+          <a:p>
+            <a:pPr algn="ctr"/>
+          </a:p>
+        </p:txBody>
+      </p:sp>
+      <p:sp>
+        <p:nvSpPr>
+          <p:cNvPr id="16" name="TextBox 15"/>
+          <p:cNvSpPr txBox="1"/>
+          <p:nvPr/>
+        </p:nvSpPr>
+        <p:spPr>
+          <a:xfrm>
+            <a:off x="8961119" y="3995928"/>
+            <a:ext cx="2194560" cy="365760"/>
+          </a:xfrm>
+          <a:prstGeom prst="rect">
+            <a:avLst/>
+          </a:prstGeom>
+          <a:noFill/>
+        </p:spPr>
+        <p:txBody>
+          <a:bodyPr wrap="square" anchor="t">
+            <a:spAutoFit/>
+          </a:bodyPr>
+          <a:lstStyle/>
+          <a:p>
+            <a:pPr algn="l">
+              <a:spcBef>
+                <a:spcPts val="0"/>
+              </a:spcBef>
+              <a:spcAft>
+                <a:spcPts val="600"/>
+              </a:spcAft>
+            </a:pPr>
+            <a:r>
+              <a:rPr sz="1150" b="0" i="0">
+                <a:solidFill>
+                  <a:srgbClr val="9AA8BA"/>
+                </a:solidFill>
+                <a:latin typeface="Menlo"/>
+              </a:rPr>
+              <a:t>178 – 208 km/h</a:t>
+            </a:r>
+          </a:p>
+        </p:txBody>
+      </p:sp>
+      <p:sp>
+        <p:nvSpPr>
+          <p:cNvPr id="17" name="TextBox 16"/>
+          <p:cNvSpPr txBox="1"/>
+          <p:nvPr/>
+        </p:nvSpPr>
+        <p:spPr>
+          <a:xfrm>
+            <a:off x="685800" y="4700016"/>
+            <a:ext cx="1005840" cy="365760"/>
+          </a:xfrm>
+          <a:prstGeom prst="rect">
+            <a:avLst/>
+          </a:prstGeom>
+          <a:noFill/>
+        </p:spPr>
+        <p:txBody>
+          <a:bodyPr wrap="square" anchor="t">
+            <a:spAutoFit/>
+          </a:bodyPr>
+          <a:lstStyle/>
+          <a:p>
+            <a:pPr algn="l">
+              <a:spcBef>
+                <a:spcPts val="0"/>
+              </a:spcBef>
+              <a:spcAft>
+                <a:spcPts val="600"/>
+              </a:spcAft>
+            </a:pPr>
+            <a:r>
+              <a:rPr sz="1300" b="1" i="0">
+                <a:solidFill>
+                  <a:srgbClr val="E85A3A"/>
+                </a:solidFill>
+                <a:latin typeface="Menlo"/>
+              </a:rPr>
+              <a:t>KAT. 4</a:t>
+            </a:r>
+          </a:p>
+        </p:txBody>
+      </p:sp>
+      <p:sp>
+        <p:nvSpPr>
+          <p:cNvPr id="18" name="Rounded Rectangle 17"/>
+          <p:cNvSpPr/>
+          <p:nvPr/>
+        </p:nvSpPr>
+        <p:spPr>
+          <a:xfrm>
+            <a:off x="1783080" y="4654296"/>
+            <a:ext cx="6949440" cy="457200"/>
+          </a:xfrm>
+          <a:prstGeom prst="roundRect">
+            <a:avLst>
+              <a:gd name="adj" fmla="val 50000"/>
+            </a:avLst>
+          </a:prstGeom>
+          <a:solidFill>
+            <a:srgbClr val="131C29"/>
+          </a:solidFill>
+          <a:ln>
+            <a:noFill/>
+          </a:ln>
+          <a:effectLst/>
+        </p:spPr>
+        <p:style>
+          <a:lnRef idx="1">
+            <a:schemeClr val="accent1"/>
+          </a:lnRef>
+          <a:fillRef idx="3">
+            <a:schemeClr val="accent1"/>
+          </a:fillRef>
+          <a:effectRef idx="2">
+            <a:schemeClr val="accent1"/>
+          </a:effectRef>
+          <a:fontRef idx="minor">
+            <a:schemeClr val="lt1"/>
+          </a:fontRef>
+        </p:style>
+        <p:txBody>
+          <a:bodyPr rtlCol="0" anchor="ctr"/>
+          <a:lstStyle/>
+          <a:p>
+            <a:pPr algn="ctr"/>
+          </a:p>
+        </p:txBody>
+      </p:sp>
+      <p:sp>
+        <p:nvSpPr>
+          <p:cNvPr id="19" name="Rounded Rectangle 18"/>
+          <p:cNvSpPr/>
+          <p:nvPr/>
+        </p:nvSpPr>
+        <p:spPr>
+          <a:xfrm>
+            <a:off x="1783080" y="4654296"/>
+            <a:ext cx="5907024" cy="457200"/>
+          </a:xfrm>
+          <a:prstGeom prst="roundRect">
+            <a:avLst>
+              <a:gd name="adj" fmla="val 50000"/>
+            </a:avLst>
+          </a:prstGeom>
+          <a:solidFill>
+            <a:srgbClr val="E85A3A"/>
+          </a:solidFill>
+          <a:ln>
+            <a:noFill/>
+          </a:ln>
+          <a:effectLst/>
+        </p:spPr>
+        <p:style>
+          <a:lnRef idx="1">
+            <a:schemeClr val="accent1"/>
+          </a:lnRef>
+          <a:fillRef idx="3">
+            <a:schemeClr val="accent1"/>
+          </a:fillRef>
+          <a:effectRef idx="2">
+            <a:schemeClr val="accent1"/>
+          </a:effectRef>
+          <a:fontRef idx="minor">
+            <a:schemeClr val="lt1"/>
+          </a:fontRef>
+        </p:style>
+        <p:txBody>
+          <a:bodyPr rtlCol="0" anchor="ctr"/>
+          <a:lstStyle/>
+          <a:p>
+            <a:pPr algn="ctr"/>
+          </a:p>
+        </p:txBody>
+      </p:sp>
+      <p:sp>
+        <p:nvSpPr>
+          <p:cNvPr id="20" name="TextBox 19"/>
+          <p:cNvSpPr txBox="1"/>
+          <p:nvPr/>
+        </p:nvSpPr>
+        <p:spPr>
+          <a:xfrm>
+            <a:off x="8961119" y="4709159"/>
+            <a:ext cx="2194560" cy="365760"/>
+          </a:xfrm>
+          <a:prstGeom prst="rect">
+            <a:avLst/>
+          </a:prstGeom>
+          <a:noFill/>
+        </p:spPr>
+        <p:txBody>
+          <a:bodyPr wrap="square" anchor="t">
+            <a:spAutoFit/>
+          </a:bodyPr>
+          <a:lstStyle/>
+          <a:p>
+            <a:pPr algn="l">
+              <a:spcBef>
+                <a:spcPts val="0"/>
+              </a:spcBef>
+              <a:spcAft>
+                <a:spcPts val="600"/>
+              </a:spcAft>
+            </a:pPr>
+            <a:r>
+              <a:rPr sz="1150" b="0" i="0">
+                <a:solidFill>
+                  <a:srgbClr val="9AA8BA"/>
+                </a:solidFill>
+                <a:latin typeface="Menlo"/>
+              </a:rPr>
+              <a:t>209 – 251 km/h</a:t>
+            </a:r>
+          </a:p>
+        </p:txBody>
+      </p:sp>
+      <p:sp>
+        <p:nvSpPr>
+          <p:cNvPr id="21" name="TextBox 20"/>
+          <p:cNvSpPr txBox="1"/>
+          <p:nvPr/>
+        </p:nvSpPr>
+        <p:spPr>
+          <a:xfrm>
+            <a:off x="685800" y="5413248"/>
+            <a:ext cx="1005840" cy="365760"/>
+          </a:xfrm>
+          <a:prstGeom prst="rect">
+            <a:avLst/>
+          </a:prstGeom>
+          <a:noFill/>
+        </p:spPr>
+        <p:txBody>
+          <a:bodyPr wrap="square" anchor="t">
+            <a:spAutoFit/>
+          </a:bodyPr>
+          <a:lstStyle/>
+          <a:p>
+            <a:pPr algn="l">
+              <a:spcBef>
+                <a:spcPts val="0"/>
+              </a:spcBef>
+              <a:spcAft>
+                <a:spcPts val="600"/>
+              </a:spcAft>
+            </a:pPr>
+            <a:r>
+              <a:rPr sz="1300" b="1" i="0">
+                <a:solidFill>
+                  <a:srgbClr val="E23A55"/>
+                </a:solidFill>
+                <a:latin typeface="Menlo"/>
+              </a:rPr>
+              <a:t>KAT. 5</a:t>
+            </a:r>
+          </a:p>
+        </p:txBody>
+      </p:sp>
+      <p:sp>
+        <p:nvSpPr>
+          <p:cNvPr id="22" name="Rounded Rectangle 21"/>
+          <p:cNvSpPr/>
+          <p:nvPr/>
+        </p:nvSpPr>
+        <p:spPr>
+          <a:xfrm>
+            <a:off x="1783080" y="5367528"/>
+            <a:ext cx="6949440" cy="457200"/>
+          </a:xfrm>
+          <a:prstGeom prst="roundRect">
+            <a:avLst>
+              <a:gd name="adj" fmla="val 50000"/>
+            </a:avLst>
+          </a:prstGeom>
+          <a:solidFill>
+            <a:srgbClr val="131C29"/>
+          </a:solidFill>
+          <a:ln>
+            <a:noFill/>
+          </a:ln>
+          <a:effectLst/>
+        </p:spPr>
+        <p:style>
+          <a:lnRef idx="1">
+            <a:schemeClr val="accent1"/>
+          </a:lnRef>
+          <a:fillRef idx="3">
+            <a:schemeClr val="accent1"/>
+          </a:fillRef>
+          <a:effectRef idx="2">
+            <a:schemeClr val="accent1"/>
+          </a:effectRef>
+          <a:fontRef idx="minor">
+            <a:schemeClr val="lt1"/>
+          </a:fontRef>
+        </p:style>
+        <p:txBody>
+          <a:bodyPr rtlCol="0" anchor="ctr"/>
+          <a:lstStyle/>
+          <a:p>
+            <a:pPr algn="ctr"/>
+          </a:p>
+        </p:txBody>
+      </p:sp>
+      <p:sp>
+        <p:nvSpPr>
+          <p:cNvPr id="23" name="Rounded Rectangle 22"/>
+          <p:cNvSpPr/>
+          <p:nvPr/>
+        </p:nvSpPr>
+        <p:spPr>
+          <a:xfrm>
+            <a:off x="1783080" y="5367528"/>
+            <a:ext cx="6949440" cy="457200"/>
+          </a:xfrm>
+          <a:prstGeom prst="roundRect">
+            <a:avLst>
+              <a:gd name="adj" fmla="val 50000"/>
+            </a:avLst>
+          </a:prstGeom>
+          <a:solidFill>
+            <a:srgbClr val="E23A55"/>
+          </a:solidFill>
+          <a:ln>
+            <a:noFill/>
+          </a:ln>
+          <a:effectLst/>
+        </p:spPr>
+        <p:style>
+          <a:lnRef idx="1">
+            <a:schemeClr val="accent1"/>
+          </a:lnRef>
+          <a:fillRef idx="3">
+            <a:schemeClr val="accent1"/>
+          </a:fillRef>
+          <a:effectRef idx="2">
+            <a:schemeClr val="accent1"/>
+          </a:effectRef>
+          <a:fontRef idx="minor">
+            <a:schemeClr val="lt1"/>
+          </a:fontRef>
+        </p:style>
+        <p:txBody>
+          <a:bodyPr rtlCol="0" anchor="ctr"/>
+          <a:lstStyle/>
+          <a:p>
+            <a:pPr algn="ctr"/>
+          </a:p>
+        </p:txBody>
+      </p:sp>
+      <p:sp>
+        <p:nvSpPr>
+          <p:cNvPr id="24" name="TextBox 23"/>
+          <p:cNvSpPr txBox="1"/>
+          <p:nvPr/>
+        </p:nvSpPr>
+        <p:spPr>
+          <a:xfrm>
+            <a:off x="8961119" y="5422392"/>
+            <a:ext cx="2194560" cy="365760"/>
+          </a:xfrm>
+          <a:prstGeom prst="rect">
+            <a:avLst/>
+          </a:prstGeom>
+          <a:noFill/>
+        </p:spPr>
+        <p:txBody>
+          <a:bodyPr wrap="square" anchor="t">
+            <a:spAutoFit/>
+          </a:bodyPr>
+          <a:lstStyle/>
+          <a:p>
+            <a:pPr algn="l">
+              <a:spcBef>
+                <a:spcPts val="0"/>
+              </a:spcBef>
+              <a:spcAft>
+                <a:spcPts val="600"/>
+              </a:spcAft>
+            </a:pPr>
+            <a:r>
+              <a:rPr sz="1150" b="0" i="0">
+                <a:solidFill>
+                  <a:srgbClr val="9AA8BA"/>
+                </a:solidFill>
+                <a:latin typeface="Menlo"/>
+              </a:rPr>
+              <a:t>ab 252 km/h</a:t>
+            </a:r>
+          </a:p>
+        </p:txBody>
+      </p:sp>
+      <p:sp>
+        <p:nvSpPr>
+          <p:cNvPr id="25" name="Rounded Rectangle 24"/>
+          <p:cNvSpPr/>
+          <p:nvPr/>
+        </p:nvSpPr>
+        <p:spPr>
+          <a:xfrm>
+            <a:off x="6446520" y="5888736"/>
+            <a:ext cx="2286000" cy="365760"/>
           </a:xfrm>
           <a:prstGeom prst="roundRect">
             <a:avLst>
@@ -10623,203 +12486,32 @@
           </a:fontRef>
         </p:style>
         <p:txBody>
-          <a:bodyPr rtlCol="0" anchor="ctr" wrap="none"/>
+          <a:bodyPr rtlCol="0" anchor="ctr"/>
           <a:lstStyle/>
           <a:p>
             <a:pPr algn="ctr"/>
             <a:r>
-              <a:rPr sz="1150" b="1" i="0" spc="150">
+              <a:rPr sz="1050" b="1" i="0" spc="120">
                 <a:solidFill>
                   <a:srgbClr val="12060B"/>
                 </a:solidFill>
                 <a:latin typeface="Menlo"/>
               </a:rPr>
-              <a:t>KATEGORIE 5 / 5</a:t>
-            </a:r>
-          </a:p>
-        </p:txBody>
-      </p:sp>
-      <p:sp>
-        <p:nvSpPr>
-          <p:cNvPr id="6" name="Rounded Rectangle 5"/>
-          <p:cNvSpPr/>
-          <p:nvPr/>
-        </p:nvSpPr>
-        <p:spPr>
-          <a:xfrm>
-            <a:off x="2939796" y="5806440"/>
-            <a:ext cx="1961388" cy="475488"/>
-          </a:xfrm>
-          <a:prstGeom prst="roundRect">
-            <a:avLst>
-              <a:gd name="adj" fmla="val 4500"/>
-            </a:avLst>
-          </a:prstGeom>
-          <a:solidFill>
-            <a:srgbClr val="111A27"/>
-          </a:solidFill>
-          <a:ln w="9525">
-            <a:solidFill>
-              <a:srgbClr val="2A3648"/>
-            </a:solidFill>
-          </a:ln>
-          <a:effectLst/>
-        </p:spPr>
-        <p:style>
-          <a:lnRef idx="1">
-            <a:schemeClr val="accent1"/>
-          </a:lnRef>
-          <a:fillRef idx="3">
-            <a:schemeClr val="accent1"/>
-          </a:fillRef>
-          <a:effectRef idx="2">
-            <a:schemeClr val="accent1"/>
-          </a:effectRef>
-          <a:fontRef idx="minor">
-            <a:schemeClr val="lt1"/>
-          </a:fontRef>
-        </p:style>
-        <p:txBody>
-          <a:bodyPr rtlCol="0" anchor="ctr" wrap="none"/>
-          <a:lstStyle/>
-          <a:p>
-            <a:pPr algn="ctr"/>
-            <a:r>
-              <a:rPr sz="1150" b="0" i="0" spc="150">
-                <a:solidFill>
-                  <a:srgbClr val="E8EEF5"/>
-                </a:solidFill>
-                <a:latin typeface="Menlo"/>
-              </a:rPr>
-              <a:t>WIND ≈ 300 KM/H</a:t>
-            </a:r>
-          </a:p>
-        </p:txBody>
-      </p:sp>
-      <p:sp>
-        <p:nvSpPr>
-          <p:cNvPr id="7" name="Rounded Rectangle 6"/>
-          <p:cNvSpPr/>
-          <p:nvPr/>
-        </p:nvSpPr>
-        <p:spPr>
-          <a:xfrm>
-            <a:off x="5102352" y="5806440"/>
-            <a:ext cx="1961388" cy="475488"/>
-          </a:xfrm>
-          <a:prstGeom prst="roundRect">
-            <a:avLst>
-              <a:gd name="adj" fmla="val 4500"/>
-            </a:avLst>
-          </a:prstGeom>
-          <a:solidFill>
-            <a:srgbClr val="111A27"/>
-          </a:solidFill>
-          <a:ln w="9525">
-            <a:solidFill>
-              <a:srgbClr val="2A3648"/>
-            </a:solidFill>
-          </a:ln>
-          <a:effectLst/>
-        </p:spPr>
-        <p:style>
-          <a:lnRef idx="1">
-            <a:schemeClr val="accent1"/>
-          </a:lnRef>
-          <a:fillRef idx="3">
-            <a:schemeClr val="accent1"/>
-          </a:fillRef>
-          <a:effectRef idx="2">
-            <a:schemeClr val="accent1"/>
-          </a:effectRef>
-          <a:fontRef idx="minor">
-            <a:schemeClr val="lt1"/>
-          </a:fontRef>
-        </p:style>
-        <p:txBody>
-          <a:bodyPr rtlCol="0" anchor="ctr" wrap="none"/>
-          <a:lstStyle/>
-          <a:p>
-            <a:pPr algn="ctr"/>
-            <a:r>
-              <a:rPr sz="1150" b="0" i="0" spc="150">
-                <a:solidFill>
-                  <a:srgbClr val="E8EEF5"/>
-                </a:solidFill>
-                <a:latin typeface="Menlo"/>
-              </a:rPr>
-              <a:t>BÖEN &gt; 350 KM/H</a:t>
-            </a:r>
-          </a:p>
-        </p:txBody>
-      </p:sp>
-      <p:sp>
-        <p:nvSpPr>
-          <p:cNvPr id="8" name="Rounded Rectangle 7"/>
-          <p:cNvSpPr/>
-          <p:nvPr/>
-        </p:nvSpPr>
-        <p:spPr>
-          <a:xfrm>
-            <a:off x="7264908" y="5806440"/>
-            <a:ext cx="2382012" cy="475488"/>
-          </a:xfrm>
-          <a:prstGeom prst="roundRect">
-            <a:avLst>
-              <a:gd name="adj" fmla="val 4500"/>
-            </a:avLst>
-          </a:prstGeom>
-          <a:solidFill>
-            <a:srgbClr val="111A27"/>
-          </a:solidFill>
-          <a:ln w="9525">
-            <a:solidFill>
-              <a:srgbClr val="2A3648"/>
-            </a:solidFill>
-          </a:ln>
-          <a:effectLst/>
-        </p:spPr>
-        <p:style>
-          <a:lnRef idx="1">
-            <a:schemeClr val="accent1"/>
-          </a:lnRef>
-          <a:fillRef idx="3">
-            <a:schemeClr val="accent1"/>
-          </a:fillRef>
-          <a:effectRef idx="2">
-            <a:schemeClr val="accent1"/>
-          </a:effectRef>
-          <a:fontRef idx="minor">
-            <a:schemeClr val="lt1"/>
-          </a:fontRef>
-        </p:style>
-        <p:txBody>
-          <a:bodyPr rtlCol="0" anchor="ctr" wrap="none"/>
-          <a:lstStyle/>
-          <a:p>
-            <a:pPr algn="ctr"/>
-            <a:r>
-              <a:rPr sz="1150" b="0" i="0" spc="150">
-                <a:solidFill>
-                  <a:srgbClr val="E8EEF5"/>
-                </a:solidFill>
-                <a:latin typeface="Menlo"/>
-              </a:rPr>
-              <a:t>FAST 24 H STATIONÄR</a:t>
-            </a:r>
-          </a:p>
-        </p:txBody>
-      </p:sp>
-      <p:sp>
-        <p:nvSpPr>
-          <p:cNvPr id="9" name="TextBox 8"/>
+              <a:t>▲  DORIAN ≈ 300 KM/H</a:t>
+            </a:r>
+          </a:p>
+        </p:txBody>
+      </p:sp>
+      <p:sp>
+        <p:nvSpPr>
+          <p:cNvPr id="26" name="TextBox 25"/>
           <p:cNvSpPr txBox="1"/>
           <p:nvPr/>
         </p:nvSpPr>
         <p:spPr>
           <a:xfrm>
-            <a:off x="777240" y="6419088"/>
-            <a:ext cx="10058400" cy="320040"/>
+            <a:off x="685800" y="6400800"/>
+            <a:ext cx="10881360" cy="411480"/>
           </a:xfrm>
           <a:prstGeom prst="rect">
             <a:avLst/>
@@ -10833,6 +12525,9 @@
           <a:lstStyle/>
           <a:p>
             <a:pPr algn="l">
+              <a:lnSpc>
+                <a:spcPct val="115000"/>
+              </a:lnSpc>
               <a:spcBef>
                 <a:spcPts val="0"/>
               </a:spcBef>
@@ -10841,13 +12536,22 @@
               </a:spcAft>
             </a:pPr>
             <a:r>
-              <a:rPr sz="850" b="0" i="0" spc="120">
+              <a:rPr sz="1300" b="0" i="0">
+                <a:solidFill>
+                  <a:srgbClr val="9AA8BA"/>
+                </a:solidFill>
+                <a:latin typeface="Helvetica Neue"/>
+              </a:rPr>
+              <a:t>Ab Kategorie 3: „schwerer Hurrikan“. Unter 119 km/h spricht man von einem Tropensturm.  </a:t>
+            </a:r>
+            <a:r>
+              <a:rPr sz="1100" b="0" i="0">
                 <a:solidFill>
                   <a:srgbClr val="6E7D90"/>
                 </a:solidFill>
-                <a:latin typeface="Menlo"/>
-              </a:rPr>
-              <a:t>SATELLITENBILD M3 · SCHULBUCH S. 113 · ZUSATZDATEN: NOAA / NHC</a:t>
+                <a:latin typeface="Helvetica Neue"/>
+              </a:rPr>
+              <a:t>(Recherche: NOAA/NHC)</a:t>
             </a:r>
           </a:p>
         </p:txBody>
@@ -10878,16 +12582,40 @@
         <p:nvPr/>
       </p:nvGrpSpPr>
       <p:grpSpPr/>
-      <p:sp>
-        <p:nvSpPr>
-          <p:cNvPr id="2" name="TextBox 1"/>
+      <p:pic>
+        <p:nvPicPr>
+          <p:cNvPr id="2" name="Picture 1" descr="m3_slide.jpg"/>
+          <p:cNvPicPr>
+            <a:picLocks noChangeAspect="1"/>
+          </p:cNvPicPr>
+          <p:nvPr/>
+        </p:nvPicPr>
+        <p:blipFill>
+          <a:blip r:embed="rId2"/>
+          <a:stretch>
+            <a:fillRect/>
+          </a:stretch>
+        </p:blipFill>
+        <p:spPr>
+          <a:xfrm>
+            <a:off x="0" y="0"/>
+            <a:ext cx="12191695" cy="6858000"/>
+          </a:xfrm>
+          <a:prstGeom prst="rect">
+            <a:avLst/>
+          </a:prstGeom>
+        </p:spPr>
+      </p:pic>
+      <p:sp>
+        <p:nvSpPr>
+          <p:cNvPr id="3" name="TextBox 2"/>
           <p:cNvSpPr txBox="1"/>
           <p:nvPr/>
         </p:nvSpPr>
         <p:spPr>
           <a:xfrm>
-            <a:off x="685800" y="502920"/>
-            <a:ext cx="10789920" cy="365760"/>
+            <a:off x="777240" y="3520440"/>
+            <a:ext cx="7315200" cy="365760"/>
           </a:xfrm>
           <a:prstGeom prst="rect">
             <a:avLst/>
@@ -10915,21 +12643,21 @@
                 </a:solidFill>
                 <a:latin typeface="Menlo"/>
               </a:rPr>
-              <a:t>KAPITEL 06 · DIE ZERSTÖRUNGSKRAFT</a:t>
-            </a:r>
-          </a:p>
-        </p:txBody>
-      </p:sp>
-      <p:sp>
-        <p:nvSpPr>
-          <p:cNvPr id="3" name="TextBox 2"/>
+              <a:t>KAPITEL 06 · FALLBEISPIEL</a:t>
+            </a:r>
+          </a:p>
+        </p:txBody>
+      </p:sp>
+      <p:sp>
+        <p:nvSpPr>
+          <p:cNvPr id="4" name="TextBox 3"/>
           <p:cNvSpPr txBox="1"/>
           <p:nvPr/>
         </p:nvSpPr>
         <p:spPr>
           <a:xfrm>
-            <a:off x="658368" y="868680"/>
-            <a:ext cx="10881360" cy="1463040"/>
+            <a:off x="749808" y="3749039"/>
+            <a:ext cx="10881360" cy="1371600"/>
           </a:xfrm>
           <a:prstGeom prst="rect">
             <a:avLst/>
@@ -10954,27 +12682,85 @@
               </a:spcAft>
             </a:pPr>
             <a:r>
-              <a:rPr sz="4400" b="1" i="0">
+              <a:rPr sz="4000" b="1" i="0">
                 <a:solidFill>
                   <a:srgbClr val="E8EEF5"/>
                 </a:solidFill>
                 <a:latin typeface="Avenir Next Condensed"/>
               </a:rPr>
-              <a:t>VIER WAFFEN EINES HURRIKANS</a:t>
-            </a:r>
-          </a:p>
-        </p:txBody>
-      </p:sp>
-      <p:sp>
-        <p:nvSpPr>
-          <p:cNvPr id="4" name="Rounded Rectangle 3"/>
+              <a:t>1. SEPTEMBER 2019 —
+DORIAN TRIFFT DIE BAHAMAS</a:t>
+            </a:r>
+          </a:p>
+        </p:txBody>
+      </p:sp>
+      <p:sp>
+        <p:nvSpPr>
+          <p:cNvPr id="5" name="Rounded Rectangle 4"/>
           <p:cNvSpPr/>
           <p:nvPr/>
         </p:nvSpPr>
         <p:spPr>
           <a:xfrm>
-            <a:off x="685800" y="1828800"/>
-            <a:ext cx="5285232" cy="1691640"/>
+            <a:off x="777240" y="5806440"/>
+            <a:ext cx="1961388" cy="475488"/>
+          </a:xfrm>
+          <a:prstGeom prst="roundRect">
+            <a:avLst>
+              <a:gd name="adj" fmla="val 4500"/>
+            </a:avLst>
+          </a:prstGeom>
+          <a:solidFill>
+            <a:srgbClr val="E23A55"/>
+          </a:solidFill>
+          <a:ln w="9525">
+            <a:solidFill>
+              <a:srgbClr val="E23A55"/>
+            </a:solidFill>
+          </a:ln>
+          <a:effectLst/>
+        </p:spPr>
+        <p:style>
+          <a:lnRef idx="1">
+            <a:schemeClr val="accent1"/>
+          </a:lnRef>
+          <a:fillRef idx="3">
+            <a:schemeClr val="accent1"/>
+          </a:fillRef>
+          <a:effectRef idx="2">
+            <a:schemeClr val="accent1"/>
+          </a:effectRef>
+          <a:fontRef idx="minor">
+            <a:schemeClr val="lt1"/>
+          </a:fontRef>
+        </p:style>
+        <p:txBody>
+          <a:bodyPr rtlCol="0" anchor="ctr" wrap="none"/>
+          <a:lstStyle/>
+          <a:p>
+            <a:pPr algn="ctr"/>
+            <a:r>
+              <a:rPr sz="1150" b="1" i="0" spc="150">
+                <a:solidFill>
+                  <a:srgbClr val="12060B"/>
+                </a:solidFill>
+                <a:latin typeface="Menlo"/>
+              </a:rPr>
+              <a:t>KATEGORIE 5 / 5</a:t>
+            </a:r>
+          </a:p>
+        </p:txBody>
+      </p:sp>
+      <p:sp>
+        <p:nvSpPr>
+          <p:cNvPr id="6" name="Rounded Rectangle 5"/>
+          <p:cNvSpPr/>
+          <p:nvPr/>
+        </p:nvSpPr>
+        <p:spPr>
+          <a:xfrm>
+            <a:off x="2939796" y="5806440"/>
+            <a:ext cx="1961388" cy="475488"/>
           </a:xfrm>
           <a:prstGeom prst="roundRect">
             <a:avLst>
@@ -11006,136 +12792,18 @@
           </a:fontRef>
         </p:style>
         <p:txBody>
-          <a:bodyPr rtlCol="0" anchor="ctr"/>
+          <a:bodyPr rtlCol="0" anchor="ctr" wrap="none"/>
           <a:lstStyle/>
           <a:p>
             <a:pPr algn="ctr"/>
-          </a:p>
-        </p:txBody>
-      </p:sp>
-      <p:sp>
-        <p:nvSpPr>
-          <p:cNvPr id="5" name="Rectangle 4"/>
-          <p:cNvSpPr/>
-          <p:nvPr/>
-        </p:nvSpPr>
-        <p:spPr>
-          <a:xfrm>
-            <a:off x="685800" y="1938528"/>
-            <a:ext cx="41148" cy="1472184"/>
-          </a:xfrm>
-          <a:prstGeom prst="rect">
-            <a:avLst/>
-          </a:prstGeom>
-          <a:solidFill>
-            <a:srgbClr val="E23A55"/>
-          </a:solidFill>
-          <a:ln>
-            <a:noFill/>
-          </a:ln>
-          <a:effectLst/>
-        </p:spPr>
-        <p:style>
-          <a:lnRef idx="1">
-            <a:schemeClr val="accent1"/>
-          </a:lnRef>
-          <a:fillRef idx="3">
-            <a:schemeClr val="accent1"/>
-          </a:fillRef>
-          <a:effectRef idx="2">
-            <a:schemeClr val="accent1"/>
-          </a:effectRef>
-          <a:fontRef idx="minor">
-            <a:schemeClr val="lt1"/>
-          </a:fontRef>
-        </p:style>
-        <p:txBody>
-          <a:bodyPr rtlCol="0" anchor="ctr"/>
-          <a:lstStyle/>
-          <a:p>
-            <a:pPr algn="ctr"/>
-          </a:p>
-        </p:txBody>
-      </p:sp>
-      <p:sp>
-        <p:nvSpPr>
-          <p:cNvPr id="6" name="TextBox 5"/>
-          <p:cNvSpPr txBox="1"/>
-          <p:nvPr/>
-        </p:nvSpPr>
-        <p:spPr>
-          <a:xfrm>
-            <a:off x="960120" y="1993392"/>
-            <a:ext cx="4754880" cy="1463040"/>
-          </a:xfrm>
-          <a:prstGeom prst="rect">
-            <a:avLst/>
-          </a:prstGeom>
-          <a:noFill/>
-        </p:spPr>
-        <p:txBody>
-          <a:bodyPr wrap="square" anchor="t">
-            <a:spAutoFit/>
-          </a:bodyPr>
-          <a:lstStyle/>
-          <a:p>
-            <a:pPr algn="l">
-              <a:spcBef>
-                <a:spcPts val="0"/>
-              </a:spcBef>
-              <a:spcAft>
-                <a:spcPts val="300"/>
-              </a:spcAft>
-            </a:pPr>
-            <a:r>
-              <a:rPr sz="1900" b="1" i="0">
+            <a:r>
+              <a:rPr sz="1150" b="0" i="0" spc="150">
                 <a:solidFill>
                   <a:srgbClr val="E8EEF5"/>
                 </a:solidFill>
-                <a:latin typeface="Avenir Next Condensed"/>
-              </a:rPr>
-              <a:t>ORKANWIND</a:t>
-            </a:r>
-          </a:p>
-          <a:p>
-            <a:pPr algn="l">
-              <a:lnSpc>
-                <a:spcPct val="112000"/>
-              </a:lnSpc>
-              <a:spcBef>
-                <a:spcPts val="0"/>
-              </a:spcBef>
-              <a:spcAft>
-                <a:spcPts val="400"/>
-              </a:spcAft>
-            </a:pPr>
-            <a:r>
-              <a:rPr sz="1300" b="0" i="0">
-                <a:solidFill>
-                  <a:srgbClr val="9AA8BA"/>
-                </a:solidFill>
-                <a:latin typeface="Helvetica Neue"/>
-              </a:rPr>
-              <a:t>Um 300 km/h — schwerste Sturmschäden an Gebäuden und Infrastruktur.</a:t>
-            </a:r>
-          </a:p>
-          <a:p>
-            <a:pPr algn="l">
-              <a:spcBef>
-                <a:spcPts val="0"/>
-              </a:spcBef>
-              <a:spcAft>
-                <a:spcPts val="600"/>
-              </a:spcAft>
-            </a:pPr>
-            <a:r>
-              <a:rPr sz="900" b="0" i="0" spc="180">
-                <a:solidFill>
-                  <a:srgbClr val="6E7D90"/>
-                </a:solidFill>
                 <a:latin typeface="Menlo"/>
               </a:rPr>
-              <a:t>DIREKT · SOFORT</a:t>
+              <a:t>WIND ≈ 300 KM/H</a:t>
             </a:r>
           </a:p>
         </p:txBody>
@@ -11148,8 +12816,8 @@
         </p:nvSpPr>
         <p:spPr>
           <a:xfrm>
-            <a:off x="6217920" y="1828800"/>
-            <a:ext cx="5285232" cy="1691640"/>
+            <a:off x="5102352" y="5806440"/>
+            <a:ext cx="1961388" cy="475488"/>
           </a:xfrm>
           <a:prstGeom prst="roundRect">
             <a:avLst>
@@ -11181,150 +12849,32 @@
           </a:fontRef>
         </p:style>
         <p:txBody>
-          <a:bodyPr rtlCol="0" anchor="ctr"/>
+          <a:bodyPr rtlCol="0" anchor="ctr" wrap="none"/>
           <a:lstStyle/>
           <a:p>
             <a:pPr algn="ctr"/>
-          </a:p>
-        </p:txBody>
-      </p:sp>
-      <p:sp>
-        <p:nvSpPr>
-          <p:cNvPr id="8" name="Rectangle 7"/>
+            <a:r>
+              <a:rPr sz="1150" b="0" i="0" spc="150">
+                <a:solidFill>
+                  <a:srgbClr val="E8EEF5"/>
+                </a:solidFill>
+                <a:latin typeface="Menlo"/>
+              </a:rPr>
+              <a:t>BÖEN &gt; 350 KM/H</a:t>
+            </a:r>
+          </a:p>
+        </p:txBody>
+      </p:sp>
+      <p:sp>
+        <p:nvSpPr>
+          <p:cNvPr id="8" name="Rounded Rectangle 7"/>
           <p:cNvSpPr/>
           <p:nvPr/>
         </p:nvSpPr>
         <p:spPr>
           <a:xfrm>
-            <a:off x="6217920" y="1938528"/>
-            <a:ext cx="41148" cy="1472184"/>
-          </a:xfrm>
-          <a:prstGeom prst="rect">
-            <a:avLst/>
-          </a:prstGeom>
-          <a:solidFill>
-            <a:srgbClr val="62C8DE"/>
-          </a:solidFill>
-          <a:ln>
-            <a:noFill/>
-          </a:ln>
-          <a:effectLst/>
-        </p:spPr>
-        <p:style>
-          <a:lnRef idx="1">
-            <a:schemeClr val="accent1"/>
-          </a:lnRef>
-          <a:fillRef idx="3">
-            <a:schemeClr val="accent1"/>
-          </a:fillRef>
-          <a:effectRef idx="2">
-            <a:schemeClr val="accent1"/>
-          </a:effectRef>
-          <a:fontRef idx="minor">
-            <a:schemeClr val="lt1"/>
-          </a:fontRef>
-        </p:style>
-        <p:txBody>
-          <a:bodyPr rtlCol="0" anchor="ctr"/>
-          <a:lstStyle/>
-          <a:p>
-            <a:pPr algn="ctr"/>
-          </a:p>
-        </p:txBody>
-      </p:sp>
-      <p:sp>
-        <p:nvSpPr>
-          <p:cNvPr id="9" name="TextBox 8"/>
-          <p:cNvSpPr txBox="1"/>
-          <p:nvPr/>
-        </p:nvSpPr>
-        <p:spPr>
-          <a:xfrm>
-            <a:off x="6492240" y="1993392"/>
-            <a:ext cx="4754880" cy="1463040"/>
-          </a:xfrm>
-          <a:prstGeom prst="rect">
-            <a:avLst/>
-          </a:prstGeom>
-          <a:noFill/>
-        </p:spPr>
-        <p:txBody>
-          <a:bodyPr wrap="square" anchor="t">
-            <a:spAutoFit/>
-          </a:bodyPr>
-          <a:lstStyle/>
-          <a:p>
-            <a:pPr algn="l">
-              <a:spcBef>
-                <a:spcPts val="0"/>
-              </a:spcBef>
-              <a:spcAft>
-                <a:spcPts val="300"/>
-              </a:spcAft>
-            </a:pPr>
-            <a:r>
-              <a:rPr sz="1900" b="1" i="0">
-                <a:solidFill>
-                  <a:srgbClr val="E8EEF5"/>
-                </a:solidFill>
-                <a:latin typeface="Avenir Next Condensed"/>
-              </a:rPr>
-              <a:t>FLUTWELLEN</a:t>
-            </a:r>
-          </a:p>
-          <a:p>
-            <a:pPr algn="l">
-              <a:lnSpc>
-                <a:spcPct val="112000"/>
-              </a:lnSpc>
-              <a:spcBef>
-                <a:spcPts val="0"/>
-              </a:spcBef>
-              <a:spcAft>
-                <a:spcPts val="400"/>
-              </a:spcAft>
-            </a:pPr>
-            <a:r>
-              <a:rPr sz="1300" b="0" i="0">
-                <a:solidFill>
-                  <a:srgbClr val="9AA8BA"/>
-                </a:solidFill>
-                <a:latin typeface="Helvetica Neue"/>
-              </a:rPr>
-              <a:t>Der Sturm drückt das Meer aufs Land: meterhohe Sturmfluten überschwemmen die Küsten.</a:t>
-            </a:r>
-          </a:p>
-          <a:p>
-            <a:pPr algn="l">
-              <a:spcBef>
-                <a:spcPts val="0"/>
-              </a:spcBef>
-              <a:spcAft>
-                <a:spcPts val="600"/>
-              </a:spcAft>
-            </a:pPr>
-            <a:r>
-              <a:rPr sz="900" b="0" i="0" spc="180">
-                <a:solidFill>
-                  <a:srgbClr val="6E7D90"/>
-                </a:solidFill>
-                <a:latin typeface="Menlo"/>
-              </a:rPr>
-              <a:t>KÜSTE · TÖDLICHSTE GEFAHR</a:t>
-            </a:r>
-          </a:p>
-        </p:txBody>
-      </p:sp>
-      <p:sp>
-        <p:nvSpPr>
-          <p:cNvPr id="10" name="Rounded Rectangle 9"/>
-          <p:cNvSpPr/>
-          <p:nvPr/>
-        </p:nvSpPr>
-        <p:spPr>
-          <a:xfrm>
-            <a:off x="685800" y="3703320"/>
-            <a:ext cx="5285232" cy="1691640"/>
+            <a:off x="7264908" y="5806440"/>
+            <a:ext cx="2382012" cy="475488"/>
           </a:xfrm>
           <a:prstGeom prst="roundRect">
             <a:avLst>
@@ -11356,67 +12906,32 @@
           </a:fontRef>
         </p:style>
         <p:txBody>
-          <a:bodyPr rtlCol="0" anchor="ctr"/>
+          <a:bodyPr rtlCol="0" anchor="ctr" wrap="none"/>
           <a:lstStyle/>
           <a:p>
             <a:pPr algn="ctr"/>
-          </a:p>
-        </p:txBody>
-      </p:sp>
-      <p:sp>
-        <p:nvSpPr>
-          <p:cNvPr id="11" name="Rectangle 10"/>
-          <p:cNvSpPr/>
-          <p:nvPr/>
-        </p:nvSpPr>
-        <p:spPr>
-          <a:xfrm>
-            <a:off x="685800" y="3813048"/>
-            <a:ext cx="41148" cy="1472184"/>
-          </a:xfrm>
-          <a:prstGeom prst="rect">
-            <a:avLst/>
-          </a:prstGeom>
-          <a:solidFill>
-            <a:srgbClr val="F5AE4B"/>
-          </a:solidFill>
-          <a:ln>
-            <a:noFill/>
-          </a:ln>
-          <a:effectLst/>
-        </p:spPr>
-        <p:style>
-          <a:lnRef idx="1">
-            <a:schemeClr val="accent1"/>
-          </a:lnRef>
-          <a:fillRef idx="3">
-            <a:schemeClr val="accent1"/>
-          </a:fillRef>
-          <a:effectRef idx="2">
-            <a:schemeClr val="accent1"/>
-          </a:effectRef>
-          <a:fontRef idx="minor">
-            <a:schemeClr val="lt1"/>
-          </a:fontRef>
-        </p:style>
-        <p:txBody>
-          <a:bodyPr rtlCol="0" anchor="ctr"/>
-          <a:lstStyle/>
-          <a:p>
-            <a:pPr algn="ctr"/>
-          </a:p>
-        </p:txBody>
-      </p:sp>
-      <p:sp>
-        <p:nvSpPr>
-          <p:cNvPr id="12" name="TextBox 11"/>
+            <a:r>
+              <a:rPr sz="1150" b="0" i="0" spc="150">
+                <a:solidFill>
+                  <a:srgbClr val="E8EEF5"/>
+                </a:solidFill>
+                <a:latin typeface="Menlo"/>
+              </a:rPr>
+              <a:t>FAST 24 H STATIONÄR</a:t>
+            </a:r>
+          </a:p>
+        </p:txBody>
+      </p:sp>
+      <p:sp>
+        <p:nvSpPr>
+          <p:cNvPr id="9" name="TextBox 8"/>
           <p:cNvSpPr txBox="1"/>
           <p:nvPr/>
         </p:nvSpPr>
         <p:spPr>
           <a:xfrm>
-            <a:off x="960120" y="3867911"/>
-            <a:ext cx="4754880" cy="1463040"/>
+            <a:off x="777240" y="6419088"/>
+            <a:ext cx="10058400" cy="320040"/>
           </a:xfrm>
           <a:prstGeom prst="rect">
             <a:avLst/>
@@ -11434,296 +12949,17 @@
                 <a:spcPts val="0"/>
               </a:spcBef>
               <a:spcAft>
-                <a:spcPts val="300"/>
-              </a:spcAft>
-            </a:pPr>
-            <a:r>
-              <a:rPr sz="1900" b="1" i="0">
-                <a:solidFill>
-                  <a:srgbClr val="E8EEF5"/>
-                </a:solidFill>
-                <a:latin typeface="Avenir Next Condensed"/>
-              </a:rPr>
-              <a:t>STARKREGEN</a:t>
-            </a:r>
-          </a:p>
-          <a:p>
-            <a:pPr algn="l">
-              <a:lnSpc>
-                <a:spcPct val="112000"/>
-              </a:lnSpc>
-              <a:spcBef>
-                <a:spcPts val="0"/>
-              </a:spcBef>
-              <a:spcAft>
-                <a:spcPts val="400"/>
-              </a:spcAft>
-            </a:pPr>
-            <a:r>
-              <a:rPr sz="1300" b="0" i="0">
-                <a:solidFill>
-                  <a:srgbClr val="9AA8BA"/>
-                </a:solidFill>
-                <a:latin typeface="Helvetica Neue"/>
-              </a:rPr>
-              <a:t>Extreme Regenmengen lösen großflächige Überschwemmungen aus — auch im Landesinneren.</a:t>
-            </a:r>
-          </a:p>
-          <a:p>
-            <a:pPr algn="l">
-              <a:spcBef>
-                <a:spcPts val="0"/>
-              </a:spcBef>
-              <a:spcAft>
                 <a:spcPts val="600"/>
               </a:spcAft>
             </a:pPr>
             <a:r>
-              <a:rPr sz="900" b="0" i="0" spc="180">
+              <a:rPr sz="850" b="0" i="0" spc="120">
                 <a:solidFill>
                   <a:srgbClr val="6E7D90"/>
                 </a:solidFill>
                 <a:latin typeface="Menlo"/>
               </a:rPr>
-              <a:t>STUNDEN BIS TAGE</a:t>
-            </a:r>
-          </a:p>
-        </p:txBody>
-      </p:sp>
-      <p:sp>
-        <p:nvSpPr>
-          <p:cNvPr id="13" name="Rounded Rectangle 12"/>
-          <p:cNvSpPr/>
-          <p:nvPr/>
-        </p:nvSpPr>
-        <p:spPr>
-          <a:xfrm>
-            <a:off x="6217920" y="3703320"/>
-            <a:ext cx="5285232" cy="1691640"/>
-          </a:xfrm>
-          <a:prstGeom prst="roundRect">
-            <a:avLst>
-              <a:gd name="adj" fmla="val 4500"/>
-            </a:avLst>
-          </a:prstGeom>
-          <a:solidFill>
-            <a:srgbClr val="111A27"/>
-          </a:solidFill>
-          <a:ln w="9525">
-            <a:solidFill>
-              <a:srgbClr val="2A3648"/>
-            </a:solidFill>
-          </a:ln>
-          <a:effectLst/>
-        </p:spPr>
-        <p:style>
-          <a:lnRef idx="1">
-            <a:schemeClr val="accent1"/>
-          </a:lnRef>
-          <a:fillRef idx="3">
-            <a:schemeClr val="accent1"/>
-          </a:fillRef>
-          <a:effectRef idx="2">
-            <a:schemeClr val="accent1"/>
-          </a:effectRef>
-          <a:fontRef idx="minor">
-            <a:schemeClr val="lt1"/>
-          </a:fontRef>
-        </p:style>
-        <p:txBody>
-          <a:bodyPr rtlCol="0" anchor="ctr"/>
-          <a:lstStyle/>
-          <a:p>
-            <a:pPr algn="ctr"/>
-          </a:p>
-        </p:txBody>
-      </p:sp>
-      <p:sp>
-        <p:nvSpPr>
-          <p:cNvPr id="14" name="Rectangle 13"/>
-          <p:cNvSpPr/>
-          <p:nvPr/>
-        </p:nvSpPr>
-        <p:spPr>
-          <a:xfrm>
-            <a:off x="6217920" y="3813048"/>
-            <a:ext cx="41148" cy="1472184"/>
-          </a:xfrm>
-          <a:prstGeom prst="rect">
-            <a:avLst/>
-          </a:prstGeom>
-          <a:solidFill>
-            <a:srgbClr val="E85A3A"/>
-          </a:solidFill>
-          <a:ln>
-            <a:noFill/>
-          </a:ln>
-          <a:effectLst/>
-        </p:spPr>
-        <p:style>
-          <a:lnRef idx="1">
-            <a:schemeClr val="accent1"/>
-          </a:lnRef>
-          <a:fillRef idx="3">
-            <a:schemeClr val="accent1"/>
-          </a:fillRef>
-          <a:effectRef idx="2">
-            <a:schemeClr val="accent1"/>
-          </a:effectRef>
-          <a:fontRef idx="minor">
-            <a:schemeClr val="lt1"/>
-          </a:fontRef>
-        </p:style>
-        <p:txBody>
-          <a:bodyPr rtlCol="0" anchor="ctr"/>
-          <a:lstStyle/>
-          <a:p>
-            <a:pPr algn="ctr"/>
-          </a:p>
-        </p:txBody>
-      </p:sp>
-      <p:sp>
-        <p:nvSpPr>
-          <p:cNvPr id="15" name="TextBox 14"/>
-          <p:cNvSpPr txBox="1"/>
-          <p:nvPr/>
-        </p:nvSpPr>
-        <p:spPr>
-          <a:xfrm>
-            <a:off x="6492240" y="3867911"/>
-            <a:ext cx="4754880" cy="1463040"/>
-          </a:xfrm>
-          <a:prstGeom prst="rect">
-            <a:avLst/>
-          </a:prstGeom>
-          <a:noFill/>
-        </p:spPr>
-        <p:txBody>
-          <a:bodyPr wrap="square" anchor="t">
-            <a:spAutoFit/>
-          </a:bodyPr>
-          <a:lstStyle/>
-          <a:p>
-            <a:pPr algn="l">
-              <a:spcBef>
-                <a:spcPts val="0"/>
-              </a:spcBef>
-              <a:spcAft>
-                <a:spcPts val="300"/>
-              </a:spcAft>
-            </a:pPr>
-            <a:r>
-              <a:rPr sz="1900" b="1" i="0">
-                <a:solidFill>
-                  <a:srgbClr val="E8EEF5"/>
-                </a:solidFill>
-                <a:latin typeface="Avenir Next Condensed"/>
-              </a:rPr>
-              <a:t>ERDRUTSCHE</a:t>
-            </a:r>
-          </a:p>
-          <a:p>
-            <a:pPr algn="l">
-              <a:lnSpc>
-                <a:spcPct val="112000"/>
-              </a:lnSpc>
-              <a:spcBef>
-                <a:spcPts val="0"/>
-              </a:spcBef>
-              <a:spcAft>
-                <a:spcPts val="400"/>
-              </a:spcAft>
-            </a:pPr>
-            <a:r>
-              <a:rPr sz="1300" b="0" i="0">
-                <a:solidFill>
-                  <a:srgbClr val="9AA8BA"/>
-                </a:solidFill>
-                <a:latin typeface="Helvetica Neue"/>
-              </a:rPr>
-              <a:t>An Hängen werden Böden zu Schlammlawinen und Erdrutschen, die Siedlungen begraben.</a:t>
-            </a:r>
-          </a:p>
-          <a:p>
-            <a:pPr algn="l">
-              <a:spcBef>
-                <a:spcPts val="0"/>
-              </a:spcBef>
-              <a:spcAft>
-                <a:spcPts val="600"/>
-              </a:spcAft>
-            </a:pPr>
-            <a:r>
-              <a:rPr sz="900" b="0" i="0" spc="180">
-                <a:solidFill>
-                  <a:srgbClr val="6E7D90"/>
-                </a:solidFill>
-                <a:latin typeface="Menlo"/>
-              </a:rPr>
-              <a:t>BERGLAND · NACH DEM STURM</a:t>
-            </a:r>
-          </a:p>
-        </p:txBody>
-      </p:sp>
-      <p:sp>
-        <p:nvSpPr>
-          <p:cNvPr id="16" name="TextBox 15"/>
-          <p:cNvSpPr txBox="1"/>
-          <p:nvPr/>
-        </p:nvSpPr>
-        <p:spPr>
-          <a:xfrm>
-            <a:off x="685800" y="5806440"/>
-            <a:ext cx="10881360" cy="731520"/>
-          </a:xfrm>
-          <a:prstGeom prst="rect">
-            <a:avLst/>
-          </a:prstGeom>
-          <a:noFill/>
-        </p:spPr>
-        <p:txBody>
-          <a:bodyPr wrap="square" anchor="t">
-            <a:spAutoFit/>
-          </a:bodyPr>
-          <a:lstStyle/>
-          <a:p>
-            <a:pPr algn="l">
-              <a:lnSpc>
-                <a:spcPct val="115000"/>
-              </a:lnSpc>
-              <a:spcBef>
-                <a:spcPts val="0"/>
-              </a:spcBef>
-              <a:spcAft>
-                <a:spcPts val="600"/>
-              </a:spcAft>
-            </a:pPr>
-            <a:r>
-              <a:rPr sz="1400" b="0" i="0">
-                <a:solidFill>
-                  <a:srgbClr val="9AA8BA"/>
-                </a:solidFill>
-                <a:latin typeface="Helvetica Neue"/>
-              </a:rPr>
-              <a:t>Die Folgen wirken lange nach: </a:t>
-            </a:r>
-            <a:r>
-              <a:rPr sz="1400" b="1" i="0">
-                <a:solidFill>
-                  <a:srgbClr val="E8EEF5"/>
-                </a:solidFill>
-                <a:latin typeface="Helvetica Neue"/>
-              </a:rPr>
-              <a:t>Versorgungsengpässe, Gesundheitsrisiken, enorme wirtschaftliche Verluste</a:t>
-            </a:r>
-            <a:r>
-              <a:rPr sz="1400" b="0" i="0">
-                <a:solidFill>
-                  <a:srgbClr val="9AA8BA"/>
-                </a:solidFill>
-                <a:latin typeface="Helvetica Neue"/>
-              </a:rPr>
-              <a:t> — ganze Landstriche können in kurzer Zeit verwüstet werden.  (Schulbuch S. 112)</a:t>
+              <a:t>SATELLITENBILD M3 · SCHULBUCH S. 113 · ZUSATZDATEN: NOAA / NHC</a:t>
             </a:r>
           </a:p>
         </p:txBody>
@@ -11791,7 +13027,7 @@
                 </a:solidFill>
                 <a:latin typeface="Menlo"/>
               </a:rPr>
-              <a:t>KAPITEL 07 · DANACH</a:t>
+              <a:t>KAPITEL 07 · DIE ZERSTÖRUNGSKRAFT</a:t>
             </a:r>
           </a:p>
         </p:txBody>
@@ -11830,13 +13066,13 @@
               </a:spcAft>
             </a:pPr>
             <a:r>
-              <a:rPr sz="3200" b="1" i="0">
+              <a:rPr sz="4400" b="1" i="0">
                 <a:solidFill>
                   <a:srgbClr val="E8EEF5"/>
                 </a:solidFill>
                 <a:latin typeface="Avenir Next Condensed"/>
               </a:rPr>
-              <a:t>„ALS WÄREN HÄUSER DURCH EINE MÜHLE GEDREHT“</a:t>
+              <a:t>VIER WAFFEN EINES HURRIKANS</a:t>
             </a:r>
           </a:p>
         </p:txBody>
@@ -11849,8 +13085,8 @@
         </p:nvSpPr>
         <p:spPr>
           <a:xfrm>
-            <a:off x="6382512" y="1645920"/>
-            <a:ext cx="5248656" cy="3579883"/>
+            <a:off x="685800" y="1828800"/>
+            <a:ext cx="5285232" cy="1691640"/>
           </a:xfrm>
           <a:prstGeom prst="roundRect">
             <a:avLst>
@@ -11889,30 +13125,50 @@
           </a:p>
         </p:txBody>
       </p:sp>
-      <p:pic>
-        <p:nvPicPr>
-          <p:cNvPr id="5" name="Picture 4" descr="m1_zerstoerung.jpg"/>
-          <p:cNvPicPr>
-            <a:picLocks noChangeAspect="1"/>
-          </p:cNvPicPr>
-          <p:nvPr/>
-        </p:nvPicPr>
-        <p:blipFill>
-          <a:blip r:embed="rId2"/>
-          <a:stretch>
-            <a:fillRect/>
-          </a:stretch>
-        </p:blipFill>
-        <p:spPr>
-          <a:xfrm>
-            <a:off x="6492240" y="1755648"/>
-            <a:ext cx="5029200" cy="3049531"/>
+      <p:sp>
+        <p:nvSpPr>
+          <p:cNvPr id="5" name="Rectangle 4"/>
+          <p:cNvSpPr/>
+          <p:nvPr/>
+        </p:nvSpPr>
+        <p:spPr>
+          <a:xfrm>
+            <a:off x="685800" y="1938528"/>
+            <a:ext cx="41148" cy="1472184"/>
           </a:xfrm>
           <a:prstGeom prst="rect">
             <a:avLst/>
           </a:prstGeom>
-        </p:spPr>
-      </p:pic>
+          <a:solidFill>
+            <a:srgbClr val="E23A55"/>
+          </a:solidFill>
+          <a:ln>
+            <a:noFill/>
+          </a:ln>
+          <a:effectLst/>
+        </p:spPr>
+        <p:style>
+          <a:lnRef idx="1">
+            <a:schemeClr val="accent1"/>
+          </a:lnRef>
+          <a:fillRef idx="3">
+            <a:schemeClr val="accent1"/>
+          </a:fillRef>
+          <a:effectRef idx="2">
+            <a:schemeClr val="accent1"/>
+          </a:effectRef>
+          <a:fontRef idx="minor">
+            <a:schemeClr val="lt1"/>
+          </a:fontRef>
+        </p:style>
+        <p:txBody>
+          <a:bodyPr rtlCol="0" anchor="ctr"/>
+          <a:lstStyle/>
+          <a:p>
+            <a:pPr algn="ctr"/>
+          </a:p>
+        </p:txBody>
+      </p:sp>
       <p:sp>
         <p:nvSpPr>
           <p:cNvPr id="6" name="TextBox 5"/>
@@ -11921,8 +13177,8 @@
         </p:nvSpPr>
         <p:spPr>
           <a:xfrm>
-            <a:off x="6492240" y="4860043"/>
-            <a:ext cx="5029200" cy="320040"/>
+            <a:off x="960120" y="1993392"/>
+            <a:ext cx="4754880" cy="1463040"/>
           </a:xfrm>
           <a:prstGeom prst="rect">
             <a:avLst/>
@@ -11940,163 +13196,72 @@
                 <a:spcPts val="0"/>
               </a:spcBef>
               <a:spcAft>
+                <a:spcPts val="300"/>
+              </a:spcAft>
+            </a:pPr>
+            <a:r>
+              <a:rPr sz="1900" b="1" i="0">
+                <a:solidFill>
+                  <a:srgbClr val="E8EEF5"/>
+                </a:solidFill>
+                <a:latin typeface="Avenir Next Condensed"/>
+              </a:rPr>
+              <a:t>ORKANWIND</a:t>
+            </a:r>
+          </a:p>
+          <a:p>
+            <a:pPr algn="l">
+              <a:lnSpc>
+                <a:spcPct val="112000"/>
+              </a:lnSpc>
+              <a:spcBef>
+                <a:spcPts val="0"/>
+              </a:spcBef>
+              <a:spcAft>
+                <a:spcPts val="400"/>
+              </a:spcAft>
+            </a:pPr>
+            <a:r>
+              <a:rPr sz="1300" b="0" i="0">
+                <a:solidFill>
+                  <a:srgbClr val="9AA8BA"/>
+                </a:solidFill>
+                <a:latin typeface="Helvetica Neue"/>
+              </a:rPr>
+              <a:t>Um 300 km/h — schwerste Sturmschäden an Gebäuden und Infrastruktur.</a:t>
+            </a:r>
+          </a:p>
+          <a:p>
+            <a:pPr algn="l">
+              <a:spcBef>
+                <a:spcPts val="0"/>
+              </a:spcBef>
+              <a:spcAft>
                 <a:spcPts val="600"/>
               </a:spcAft>
             </a:pPr>
             <a:r>
-              <a:rPr sz="850" b="0" i="0" spc="120">
+              <a:rPr sz="900" b="0" i="0" spc="180">
                 <a:solidFill>
                   <a:srgbClr val="6E7D90"/>
                 </a:solidFill>
                 <a:latin typeface="Menlo"/>
               </a:rPr>
-              <a:t>M1 · MARSH HARBOUR, BAHAMAS (SCHULBUCH S. 112)</a:t>
-            </a:r>
-          </a:p>
-        </p:txBody>
-      </p:sp>
-      <p:sp>
-        <p:nvSpPr>
-          <p:cNvPr id="7" name="TextBox 6"/>
-          <p:cNvSpPr txBox="1"/>
-          <p:nvPr/>
-        </p:nvSpPr>
-        <p:spPr>
-          <a:xfrm>
-            <a:off x="713232" y="1965960"/>
-            <a:ext cx="5212080" cy="1554480"/>
-          </a:xfrm>
-          <a:prstGeom prst="rect">
-            <a:avLst/>
-          </a:prstGeom>
-          <a:noFill/>
-        </p:spPr>
-        <p:txBody>
-          <a:bodyPr wrap="square" anchor="t">
-            <a:spAutoFit/>
-          </a:bodyPr>
-          <a:lstStyle/>
-          <a:p>
-            <a:pPr algn="l">
-              <a:lnSpc>
-                <a:spcPct val="122000"/>
-              </a:lnSpc>
-              <a:spcBef>
-                <a:spcPts val="0"/>
-              </a:spcBef>
-              <a:spcAft>
-                <a:spcPts val="600"/>
-              </a:spcAft>
-            </a:pPr>
-            <a:r>
-              <a:rPr sz="2100" b="0" i="1">
-                <a:solidFill>
-                  <a:srgbClr val="E8EEF5"/>
-                </a:solidFill>
-                <a:latin typeface="Helvetica Neue"/>
-              </a:rPr>
-              <a:t>„Man kann nicht erkennen, dass dort mal Häuser standen.“</a:t>
-            </a:r>
-          </a:p>
-        </p:txBody>
-      </p:sp>
-      <p:sp>
-        <p:nvSpPr>
-          <p:cNvPr id="8" name="TextBox 7"/>
-          <p:cNvSpPr txBox="1"/>
-          <p:nvPr/>
-        </p:nvSpPr>
-        <p:spPr>
-          <a:xfrm>
-            <a:off x="713232" y="3520440"/>
-            <a:ext cx="5212080" cy="365760"/>
-          </a:xfrm>
-          <a:prstGeom prst="rect">
-            <a:avLst/>
-          </a:prstGeom>
-          <a:noFill/>
-        </p:spPr>
-        <p:txBody>
-          <a:bodyPr wrap="square" anchor="t">
-            <a:spAutoFit/>
-          </a:bodyPr>
-          <a:lstStyle/>
-          <a:p>
-            <a:pPr algn="l">
-              <a:spcBef>
-                <a:spcPts val="0"/>
-              </a:spcBef>
-              <a:spcAft>
-                <a:spcPts val="600"/>
-              </a:spcAft>
-            </a:pPr>
-            <a:r>
-              <a:rPr sz="950" b="0" i="0" spc="180">
-                <a:solidFill>
-                  <a:srgbClr val="6E7D90"/>
-                </a:solidFill>
-                <a:latin typeface="Menlo"/>
-              </a:rPr>
-              <a:t>AUGENZEUGE · CNN / DPA, 6.9.2019</a:t>
-            </a:r>
-          </a:p>
-        </p:txBody>
-      </p:sp>
-      <p:sp>
-        <p:nvSpPr>
-          <p:cNvPr id="9" name="TextBox 8"/>
-          <p:cNvSpPr txBox="1"/>
-          <p:nvPr/>
-        </p:nvSpPr>
-        <p:spPr>
-          <a:xfrm>
-            <a:off x="713232" y="3977639"/>
-            <a:ext cx="5212080" cy="1188720"/>
-          </a:xfrm>
-          <a:prstGeom prst="rect">
-            <a:avLst/>
-          </a:prstGeom>
-          <a:noFill/>
-        </p:spPr>
-        <p:txBody>
-          <a:bodyPr wrap="square" anchor="t">
-            <a:spAutoFit/>
-          </a:bodyPr>
-          <a:lstStyle/>
-          <a:p>
-            <a:pPr algn="l">
-              <a:lnSpc>
-                <a:spcPct val="118000"/>
-              </a:lnSpc>
-              <a:spcBef>
-                <a:spcPts val="0"/>
-              </a:spcBef>
-              <a:spcAft>
-                <a:spcPts val="600"/>
-              </a:spcAft>
-            </a:pPr>
-            <a:r>
-              <a:rPr sz="1250" b="0" i="0">
-                <a:solidFill>
-                  <a:srgbClr val="9AA8BA"/>
-                </a:solidFill>
-                <a:latin typeface="Helvetica Neue"/>
-              </a:rPr>
-              <a:t>Dorian war der verheerendste Wirbelsturm, der die Bahamas je getroffen hat — einer der stärksten im Atlantik seit Beginn der Aufzeichnungen.</a:t>
-            </a:r>
-          </a:p>
-        </p:txBody>
-      </p:sp>
-      <p:sp>
-        <p:nvSpPr>
-          <p:cNvPr id="10" name="Rounded Rectangle 9"/>
+              <a:t>DIREKT · SOFORT</a:t>
+            </a:r>
+          </a:p>
+        </p:txBody>
+      </p:sp>
+      <p:sp>
+        <p:nvSpPr>
+          <p:cNvPr id="7" name="Rounded Rectangle 6"/>
           <p:cNvSpPr/>
           <p:nvPr/>
         </p:nvSpPr>
         <p:spPr>
           <a:xfrm>
-            <a:off x="685800" y="5394960"/>
-            <a:ext cx="2560320" cy="1280160"/>
+            <a:off x="6217920" y="1828800"/>
+            <a:ext cx="5285232" cy="1691640"/>
           </a:xfrm>
           <a:prstGeom prst="roundRect">
             <a:avLst>
@@ -12137,14 +13302,58 @@
       </p:sp>
       <p:sp>
         <p:nvSpPr>
-          <p:cNvPr id="11" name="TextBox 10"/>
+          <p:cNvPr id="8" name="Rectangle 7"/>
+          <p:cNvSpPr/>
+          <p:nvPr/>
+        </p:nvSpPr>
+        <p:spPr>
+          <a:xfrm>
+            <a:off x="6217920" y="1938528"/>
+            <a:ext cx="41148" cy="1472184"/>
+          </a:xfrm>
+          <a:prstGeom prst="rect">
+            <a:avLst/>
+          </a:prstGeom>
+          <a:solidFill>
+            <a:srgbClr val="62C8DE"/>
+          </a:solidFill>
+          <a:ln>
+            <a:noFill/>
+          </a:ln>
+          <a:effectLst/>
+        </p:spPr>
+        <p:style>
+          <a:lnRef idx="1">
+            <a:schemeClr val="accent1"/>
+          </a:lnRef>
+          <a:fillRef idx="3">
+            <a:schemeClr val="accent1"/>
+          </a:fillRef>
+          <a:effectRef idx="2">
+            <a:schemeClr val="accent1"/>
+          </a:effectRef>
+          <a:fontRef idx="minor">
+            <a:schemeClr val="lt1"/>
+          </a:fontRef>
+        </p:style>
+        <p:txBody>
+          <a:bodyPr rtlCol="0" anchor="ctr"/>
+          <a:lstStyle/>
+          <a:p>
+            <a:pPr algn="ctr"/>
+          </a:p>
+        </p:txBody>
+      </p:sp>
+      <p:sp>
+        <p:nvSpPr>
+          <p:cNvPr id="9" name="TextBox 8"/>
           <p:cNvSpPr txBox="1"/>
           <p:nvPr/>
         </p:nvSpPr>
         <p:spPr>
           <a:xfrm>
-            <a:off x="886968" y="5504688"/>
-            <a:ext cx="2194560" cy="1097280"/>
+            <a:off x="6492240" y="1993392"/>
+            <a:ext cx="4754880" cy="1463040"/>
           </a:xfrm>
           <a:prstGeom prst="rect">
             <a:avLst/>
@@ -12162,53 +13371,72 @@
                 <a:spcPts val="0"/>
               </a:spcBef>
               <a:spcAft>
-                <a:spcPts val="200"/>
-              </a:spcAft>
-            </a:pPr>
-            <a:r>
-              <a:rPr sz="2200" b="1" i="0">
-                <a:solidFill>
-                  <a:srgbClr val="E85A3A"/>
+                <a:spcPts val="300"/>
+              </a:spcAft>
+            </a:pPr>
+            <a:r>
+              <a:rPr sz="1900" b="1" i="0">
+                <a:solidFill>
+                  <a:srgbClr val="E8EEF5"/>
+                </a:solidFill>
+                <a:latin typeface="Avenir Next Condensed"/>
+              </a:rPr>
+              <a:t>FLUTWELLEN</a:t>
+            </a:r>
+          </a:p>
+          <a:p>
+            <a:pPr algn="l">
+              <a:lnSpc>
+                <a:spcPct val="112000"/>
+              </a:lnSpc>
+              <a:spcBef>
+                <a:spcPts val="0"/>
+              </a:spcBef>
+              <a:spcAft>
+                <a:spcPts val="400"/>
+              </a:spcAft>
+            </a:pPr>
+            <a:r>
+              <a:rPr sz="1300" b="0" i="0">
+                <a:solidFill>
+                  <a:srgbClr val="9AA8BA"/>
+                </a:solidFill>
+                <a:latin typeface="Helvetica Neue"/>
+              </a:rPr>
+              <a:t>Der Sturm drückt das Meer aufs Land: meterhohe Sturmfluten überschwemmen die Küsten.</a:t>
+            </a:r>
+          </a:p>
+          <a:p>
+            <a:pPr algn="l">
+              <a:spcBef>
+                <a:spcPts val="0"/>
+              </a:spcBef>
+              <a:spcAft>
+                <a:spcPts val="600"/>
+              </a:spcAft>
+            </a:pPr>
+            <a:r>
+              <a:rPr sz="900" b="0" i="0" spc="180">
+                <a:solidFill>
+                  <a:srgbClr val="6E7D90"/>
                 </a:solidFill>
                 <a:latin typeface="Menlo"/>
               </a:rPr>
-              <a:t>13.000</a:t>
-            </a:r>
-          </a:p>
-          <a:p>
-            <a:pPr algn="l">
-              <a:lnSpc>
-                <a:spcPct val="105000"/>
-              </a:lnSpc>
-              <a:spcBef>
-                <a:spcPts val="0"/>
-              </a:spcBef>
-              <a:spcAft>
-                <a:spcPts val="600"/>
-              </a:spcAft>
-            </a:pPr>
-            <a:r>
-              <a:rPr sz="1000" b="0" i="0">
-                <a:solidFill>
-                  <a:srgbClr val="9AA8BA"/>
-                </a:solidFill>
-                <a:latin typeface="Helvetica Neue"/>
-              </a:rPr>
-              <a:t>Wohnhäuser schwer beschädigt oder zerstört (Rotes Kreuz)</a:t>
-            </a:r>
-          </a:p>
-        </p:txBody>
-      </p:sp>
-      <p:sp>
-        <p:nvSpPr>
-          <p:cNvPr id="12" name="Rounded Rectangle 11"/>
+              <a:t>KÜSTE · TÖDLICHSTE GEFAHR</a:t>
+            </a:r>
+          </a:p>
+        </p:txBody>
+      </p:sp>
+      <p:sp>
+        <p:nvSpPr>
+          <p:cNvPr id="10" name="Rounded Rectangle 9"/>
           <p:cNvSpPr/>
           <p:nvPr/>
         </p:nvSpPr>
         <p:spPr>
           <a:xfrm>
-            <a:off x="3456432" y="5394960"/>
-            <a:ext cx="2560320" cy="1280160"/>
+            <a:off x="685800" y="3703320"/>
+            <a:ext cx="5285232" cy="1691640"/>
           </a:xfrm>
           <a:prstGeom prst="roundRect">
             <a:avLst>
@@ -12249,14 +13477,58 @@
       </p:sp>
       <p:sp>
         <p:nvSpPr>
-          <p:cNvPr id="13" name="TextBox 12"/>
+          <p:cNvPr id="11" name="Rectangle 10"/>
+          <p:cNvSpPr/>
+          <p:nvPr/>
+        </p:nvSpPr>
+        <p:spPr>
+          <a:xfrm>
+            <a:off x="685800" y="3813048"/>
+            <a:ext cx="41148" cy="1472184"/>
+          </a:xfrm>
+          <a:prstGeom prst="rect">
+            <a:avLst/>
+          </a:prstGeom>
+          <a:solidFill>
+            <a:srgbClr val="F5AE4B"/>
+          </a:solidFill>
+          <a:ln>
+            <a:noFill/>
+          </a:ln>
+          <a:effectLst/>
+        </p:spPr>
+        <p:style>
+          <a:lnRef idx="1">
+            <a:schemeClr val="accent1"/>
+          </a:lnRef>
+          <a:fillRef idx="3">
+            <a:schemeClr val="accent1"/>
+          </a:fillRef>
+          <a:effectRef idx="2">
+            <a:schemeClr val="accent1"/>
+          </a:effectRef>
+          <a:fontRef idx="minor">
+            <a:schemeClr val="lt1"/>
+          </a:fontRef>
+        </p:style>
+        <p:txBody>
+          <a:bodyPr rtlCol="0" anchor="ctr"/>
+          <a:lstStyle/>
+          <a:p>
+            <a:pPr algn="ctr"/>
+          </a:p>
+        </p:txBody>
+      </p:sp>
+      <p:sp>
+        <p:nvSpPr>
+          <p:cNvPr id="12" name="TextBox 11"/>
           <p:cNvSpPr txBox="1"/>
           <p:nvPr/>
         </p:nvSpPr>
         <p:spPr>
           <a:xfrm>
-            <a:off x="3657600" y="5504688"/>
-            <a:ext cx="2194560" cy="1097280"/>
+            <a:off x="960120" y="3867911"/>
+            <a:ext cx="4754880" cy="1463040"/>
           </a:xfrm>
           <a:prstGeom prst="rect">
             <a:avLst/>
@@ -12274,53 +13546,72 @@
                 <a:spcPts val="0"/>
               </a:spcBef>
               <a:spcAft>
-                <a:spcPts val="200"/>
-              </a:spcAft>
-            </a:pPr>
-            <a:r>
-              <a:rPr sz="2200" b="1" i="0">
-                <a:solidFill>
-                  <a:srgbClr val="E85A3A"/>
+                <a:spcPts val="300"/>
+              </a:spcAft>
+            </a:pPr>
+            <a:r>
+              <a:rPr sz="1900" b="1" i="0">
+                <a:solidFill>
+                  <a:srgbClr val="E8EEF5"/>
+                </a:solidFill>
+                <a:latin typeface="Avenir Next Condensed"/>
+              </a:rPr>
+              <a:t>STARKREGEN</a:t>
+            </a:r>
+          </a:p>
+          <a:p>
+            <a:pPr algn="l">
+              <a:lnSpc>
+                <a:spcPct val="112000"/>
+              </a:lnSpc>
+              <a:spcBef>
+                <a:spcPts val="0"/>
+              </a:spcBef>
+              <a:spcAft>
+                <a:spcPts val="400"/>
+              </a:spcAft>
+            </a:pPr>
+            <a:r>
+              <a:rPr sz="1300" b="0" i="0">
+                <a:solidFill>
+                  <a:srgbClr val="9AA8BA"/>
+                </a:solidFill>
+                <a:latin typeface="Helvetica Neue"/>
+              </a:rPr>
+              <a:t>Extreme Regenmengen lösen großflächige Überschwemmungen aus — auch im Landesinneren.</a:t>
+            </a:r>
+          </a:p>
+          <a:p>
+            <a:pPr algn="l">
+              <a:spcBef>
+                <a:spcPts val="0"/>
+              </a:spcBef>
+              <a:spcAft>
+                <a:spcPts val="600"/>
+              </a:spcAft>
+            </a:pPr>
+            <a:r>
+              <a:rPr sz="900" b="0" i="0" spc="180">
+                <a:solidFill>
+                  <a:srgbClr val="6E7D90"/>
                 </a:solidFill>
                 <a:latin typeface="Menlo"/>
               </a:rPr>
-              <a:t>70.000</a:t>
-            </a:r>
-          </a:p>
-          <a:p>
-            <a:pPr algn="l">
-              <a:lnSpc>
-                <a:spcPct val="105000"/>
-              </a:lnSpc>
-              <a:spcBef>
-                <a:spcPts val="0"/>
-              </a:spcBef>
-              <a:spcAft>
-                <a:spcPts val="600"/>
-              </a:spcAft>
-            </a:pPr>
-            <a:r>
-              <a:rPr sz="1000" b="0" i="0">
-                <a:solidFill>
-                  <a:srgbClr val="9AA8BA"/>
-                </a:solidFill>
-                <a:latin typeface="Helvetica Neue"/>
-              </a:rPr>
-              <a:t>Menschen brauchten dringend Hilfe — jeder fünfte Einwohner</a:t>
-            </a:r>
-          </a:p>
-        </p:txBody>
-      </p:sp>
-      <p:sp>
-        <p:nvSpPr>
-          <p:cNvPr id="14" name="Rounded Rectangle 13"/>
+              <a:t>STUNDEN BIS TAGE</a:t>
+            </a:r>
+          </a:p>
+        </p:txBody>
+      </p:sp>
+      <p:sp>
+        <p:nvSpPr>
+          <p:cNvPr id="13" name="Rounded Rectangle 12"/>
           <p:cNvSpPr/>
           <p:nvPr/>
         </p:nvSpPr>
         <p:spPr>
           <a:xfrm>
-            <a:off x="6227064" y="5394960"/>
-            <a:ext cx="2560320" cy="1280160"/>
+            <a:off x="6217920" y="3703320"/>
+            <a:ext cx="5285232" cy="1691640"/>
           </a:xfrm>
           <a:prstGeom prst="roundRect">
             <a:avLst>
@@ -12361,91 +13652,23 @@
       </p:sp>
       <p:sp>
         <p:nvSpPr>
-          <p:cNvPr id="15" name="TextBox 14"/>
-          <p:cNvSpPr txBox="1"/>
-          <p:nvPr/>
-        </p:nvSpPr>
-        <p:spPr>
-          <a:xfrm>
-            <a:off x="6428231" y="5504688"/>
-            <a:ext cx="2194560" cy="1097280"/>
+          <p:cNvPr id="14" name="Rectangle 13"/>
+          <p:cNvSpPr/>
+          <p:nvPr/>
+        </p:nvSpPr>
+        <p:spPr>
+          <a:xfrm>
+            <a:off x="6217920" y="3813048"/>
+            <a:ext cx="41148" cy="1472184"/>
           </a:xfrm>
           <a:prstGeom prst="rect">
             <a:avLst/>
           </a:prstGeom>
-          <a:noFill/>
-        </p:spPr>
-        <p:txBody>
-          <a:bodyPr wrap="square" anchor="t">
-            <a:spAutoFit/>
-          </a:bodyPr>
-          <a:lstStyle/>
-          <a:p>
-            <a:pPr algn="l">
-              <a:spcBef>
-                <a:spcPts val="0"/>
-              </a:spcBef>
-              <a:spcAft>
-                <a:spcPts val="200"/>
-              </a:spcAft>
-            </a:pPr>
-            <a:r>
-              <a:rPr sz="2200" b="1" i="0">
-                <a:solidFill>
-                  <a:srgbClr val="E85A3A"/>
-                </a:solidFill>
-                <a:latin typeface="Menlo"/>
-              </a:rPr>
-              <a:t>30+</a:t>
-            </a:r>
-          </a:p>
-          <a:p>
-            <a:pPr algn="l">
-              <a:lnSpc>
-                <a:spcPct val="105000"/>
-              </a:lnSpc>
-              <a:spcBef>
-                <a:spcPts val="0"/>
-              </a:spcBef>
-              <a:spcAft>
-                <a:spcPts val="600"/>
-              </a:spcAft>
-            </a:pPr>
-            <a:r>
-              <a:rPr sz="1000" b="0" i="0">
-                <a:solidFill>
-                  <a:srgbClr val="9AA8BA"/>
-                </a:solidFill>
-                <a:latin typeface="Helvetica Neue"/>
-              </a:rPr>
-              <a:t>Todesopfer sofort bestätigt — später über 70</a:t>
-            </a:r>
-          </a:p>
-        </p:txBody>
-      </p:sp>
-      <p:sp>
-        <p:nvSpPr>
-          <p:cNvPr id="16" name="Rounded Rectangle 15"/>
-          <p:cNvSpPr/>
-          <p:nvPr/>
-        </p:nvSpPr>
-        <p:spPr>
-          <a:xfrm>
-            <a:off x="8997696" y="5394960"/>
-            <a:ext cx="2560320" cy="1280160"/>
-          </a:xfrm>
-          <a:prstGeom prst="roundRect">
-            <a:avLst>
-              <a:gd name="adj" fmla="val 4500"/>
-            </a:avLst>
-          </a:prstGeom>
           <a:solidFill>
-            <a:srgbClr val="111A27"/>
+            <a:srgbClr val="E85A3A"/>
           </a:solidFill>
-          <a:ln w="9525">
-            <a:solidFill>
-              <a:srgbClr val="2A3648"/>
-            </a:solidFill>
+          <a:ln>
+            <a:noFill/>
           </a:ln>
           <a:effectLst/>
         </p:spPr>
@@ -12473,14 +13696,14 @@
       </p:sp>
       <p:sp>
         <p:nvSpPr>
-          <p:cNvPr id="17" name="TextBox 16"/>
+          <p:cNvPr id="15" name="TextBox 14"/>
           <p:cNvSpPr txBox="1"/>
           <p:nvPr/>
         </p:nvSpPr>
         <p:spPr>
           <a:xfrm>
-            <a:off x="9198864" y="5504688"/>
-            <a:ext cx="2194560" cy="1097280"/>
+            <a:off x="6492240" y="3867911"/>
+            <a:ext cx="4754880" cy="1463040"/>
           </a:xfrm>
           <a:prstGeom prst="rect">
             <a:avLst/>
@@ -12498,23 +13721,87 @@
                 <a:spcPts val="0"/>
               </a:spcBef>
               <a:spcAft>
-                <a:spcPts val="200"/>
-              </a:spcAft>
-            </a:pPr>
-            <a:r>
-              <a:rPr sz="2200" b="1" i="0">
-                <a:solidFill>
-                  <a:srgbClr val="E85A3A"/>
+                <a:spcPts val="300"/>
+              </a:spcAft>
+            </a:pPr>
+            <a:r>
+              <a:rPr sz="1900" b="1" i="0">
+                <a:solidFill>
+                  <a:srgbClr val="E8EEF5"/>
+                </a:solidFill>
+                <a:latin typeface="Avenir Next Condensed"/>
+              </a:rPr>
+              <a:t>ERDRUTSCHE</a:t>
+            </a:r>
+          </a:p>
+          <a:p>
+            <a:pPr algn="l">
+              <a:lnSpc>
+                <a:spcPct val="112000"/>
+              </a:lnSpc>
+              <a:spcBef>
+                <a:spcPts val="0"/>
+              </a:spcBef>
+              <a:spcAft>
+                <a:spcPts val="400"/>
+              </a:spcAft>
+            </a:pPr>
+            <a:r>
+              <a:rPr sz="1300" b="0" i="0">
+                <a:solidFill>
+                  <a:srgbClr val="9AA8BA"/>
+                </a:solidFill>
+                <a:latin typeface="Helvetica Neue"/>
+              </a:rPr>
+              <a:t>An Hängen werden Böden zu Schlammlawinen und Erdrutschen, die Siedlungen begraben.</a:t>
+            </a:r>
+          </a:p>
+          <a:p>
+            <a:pPr algn="l">
+              <a:spcBef>
+                <a:spcPts val="0"/>
+              </a:spcBef>
+              <a:spcAft>
+                <a:spcPts val="600"/>
+              </a:spcAft>
+            </a:pPr>
+            <a:r>
+              <a:rPr sz="900" b="0" i="0" spc="180">
+                <a:solidFill>
+                  <a:srgbClr val="6E7D90"/>
                 </a:solidFill>
                 <a:latin typeface="Menlo"/>
               </a:rPr>
-              <a:t>7 t</a:t>
-            </a:r>
-          </a:p>
+              <a:t>BERGLAND · NACH DEM STURM</a:t>
+            </a:r>
+          </a:p>
+        </p:txBody>
+      </p:sp>
+      <p:sp>
+        <p:nvSpPr>
+          <p:cNvPr id="16" name="TextBox 15"/>
+          <p:cNvSpPr txBox="1"/>
+          <p:nvPr/>
+        </p:nvSpPr>
+        <p:spPr>
+          <a:xfrm>
+            <a:off x="685800" y="5806440"/>
+            <a:ext cx="10881360" cy="731520"/>
+          </a:xfrm>
+          <a:prstGeom prst="rect">
+            <a:avLst/>
+          </a:prstGeom>
+          <a:noFill/>
+        </p:spPr>
+        <p:txBody>
+          <a:bodyPr wrap="square" anchor="t">
+            <a:spAutoFit/>
+          </a:bodyPr>
+          <a:lstStyle/>
           <a:p>
             <a:pPr algn="l">
               <a:lnSpc>
-                <a:spcPct val="105000"/>
+                <a:spcPct val="115000"/>
               </a:lnSpc>
               <a:spcBef>
                 <a:spcPts val="0"/>
@@ -12524,13 +13811,31 @@
               </a:spcAft>
             </a:pPr>
             <a:r>
-              <a:rPr sz="1000" b="0" i="0">
+              <a:rPr sz="1400" b="0" i="0">
                 <a:solidFill>
                   <a:srgbClr val="9AA8BA"/>
                 </a:solidFill>
                 <a:latin typeface="Helvetica Neue"/>
               </a:rPr>
-              <a:t>Fertiggerichte lieferte das Welternährungsprogramm</a:t>
+              <a:t>Die Folgen wirken lange nach: </a:t>
+            </a:r>
+            <a:r>
+              <a:rPr sz="1400" b="1" i="0">
+                <a:solidFill>
+                  <a:srgbClr val="E8EEF5"/>
+                </a:solidFill>
+                <a:latin typeface="Helvetica Neue"/>
+              </a:rPr>
+              <a:t>Versorgungsengpässe, Gesundheitsrisiken, enorme wirtschaftliche Verluste</a:t>
+            </a:r>
+            <a:r>
+              <a:rPr sz="1400" b="0" i="0">
+                <a:solidFill>
+                  <a:srgbClr val="9AA8BA"/>
+                </a:solidFill>
+                <a:latin typeface="Helvetica Neue"/>
+              </a:rPr>
+              <a:t> — ganze Landstriche können in kurzer Zeit verwüstet werden.  (Schulbuch S. 112)</a:t>
             </a:r>
           </a:p>
         </p:txBody>
